--- a/presentation/CA3_Presentation.pptx
+++ b/presentation/CA3_Presentation.pptx
@@ -5,22 +5,22 @@
     <p:sldMasterId id="2147483648" r:id="rId1"/>
   </p:sldMasterIdLst>
   <p:sldIdLst>
-    <p:sldId id="256" r:id="rId7"/>
-    <p:sldId id="257" r:id="rId8"/>
-    <p:sldId id="258" r:id="rId9"/>
-    <p:sldId id="259" r:id="rId10"/>
-    <p:sldId id="260" r:id="rId11"/>
-    <p:sldId id="261" r:id="rId12"/>
-    <p:sldId id="262" r:id="rId13"/>
-    <p:sldId id="263" r:id="rId14"/>
-    <p:sldId id="264" r:id="rId15"/>
-    <p:sldId id="265" r:id="rId16"/>
-    <p:sldId id="266" r:id="rId17"/>
-    <p:sldId id="267" r:id="rId18"/>
-    <p:sldId id="268" r:id="rId19"/>
-    <p:sldId id="269" r:id="rId20"/>
+    <p:sldId id="256" r:id="rId2"/>
+    <p:sldId id="257" r:id="rId3"/>
+    <p:sldId id="258" r:id="rId4"/>
+    <p:sldId id="259" r:id="rId5"/>
+    <p:sldId id="260" r:id="rId6"/>
+    <p:sldId id="261" r:id="rId7"/>
+    <p:sldId id="262" r:id="rId8"/>
+    <p:sldId id="263" r:id="rId9"/>
+    <p:sldId id="264" r:id="rId10"/>
+    <p:sldId id="265" r:id="rId11"/>
+    <p:sldId id="266" r:id="rId12"/>
+    <p:sldId id="267" r:id="rId13"/>
+    <p:sldId id="268" r:id="rId14"/>
+    <p:sldId id="269" r:id="rId15"/>
   </p:sldIdLst>
-  <p:sldSz cx="12191695" cy="6858000" type="screen4x3"/>
+  <p:sldSz cx="12192000" cy="6858000"/>
   <p:notesSz cx="6858000" cy="9144000"/>
   <p:defaultTextStyle>
     <a:defPPr>
@@ -117,7 +117,84 @@
       </a:defRPr>
     </a:lvl9pPr>
   </p:defaultTextStyle>
+  <p:extLst>
+    <p:ext uri="{EFAFB233-063F-42B5-8137-9DF3F51BA10A}">
+      <p15:sldGuideLst xmlns:p15="http://schemas.microsoft.com/office/powerpoint/2012/main">
+        <p15:guide id="1" orient="horz" pos="2160">
+          <p15:clr>
+            <a:srgbClr val="A4A3A4"/>
+          </p15:clr>
+        </p15:guide>
+        <p15:guide id="2" pos="2880">
+          <p15:clr>
+            <a:srgbClr val="A4A3A4"/>
+          </p15:clr>
+        </p15:guide>
+      </p15:sldGuideLst>
+    </p:ext>
+  </p:extLst>
 </p:presentation>
+</file>
+
+<file path=ppt/changesInfos/changesInfo1.xml><?xml version="1.0" encoding="utf-8"?>
+<pc:chgInfo xmlns:a="http://schemas.openxmlformats.org/drawingml/2006/main" xmlns:r="http://schemas.openxmlformats.org/officeDocument/2006/relationships" xmlns:ac="http://schemas.microsoft.com/office/drawing/2013/main/command" xmlns:pc="http://schemas.microsoft.com/office/powerpoint/2013/main/command">
+  <pc:docChgLst>
+    <pc:chgData name="Yesh Raheja" userId="0343116cb2735489" providerId="LiveId" clId="{D2BC58EF-A0A9-4B9D-A40B-172E3387DB63}"/>
+    <pc:docChg chg="custSel modSld">
+      <pc:chgData name="Yesh Raheja" userId="0343116cb2735489" providerId="LiveId" clId="{D2BC58EF-A0A9-4B9D-A40B-172E3387DB63}" dt="2026-10-24T10:55:24.923" v="122" actId="255"/>
+      <pc:docMkLst>
+        <pc:docMk/>
+      </pc:docMkLst>
+      <pc:sldChg chg="delSp modSp mod">
+        <pc:chgData name="Yesh Raheja" userId="0343116cb2735489" providerId="LiveId" clId="{D2BC58EF-A0A9-4B9D-A40B-172E3387DB63}" dt="2026-10-24T10:55:24.923" v="122" actId="255"/>
+        <pc:sldMkLst>
+          <pc:docMk/>
+          <pc:sldMk cId="0" sldId="256"/>
+        </pc:sldMkLst>
+        <pc:spChg chg="mod">
+          <ac:chgData name="Yesh Raheja" userId="0343116cb2735489" providerId="LiveId" clId="{D2BC58EF-A0A9-4B9D-A40B-172E3387DB63}" dt="2026-10-24T10:51:38.406" v="26" actId="20577"/>
+          <ac:spMkLst>
+            <pc:docMk/>
+            <pc:sldMk cId="0" sldId="256"/>
+            <ac:spMk id="3" creationId="{00000000-0000-0000-0000-000000000000}"/>
+          </ac:spMkLst>
+        </pc:spChg>
+        <pc:spChg chg="mod">
+          <ac:chgData name="Yesh Raheja" userId="0343116cb2735489" providerId="LiveId" clId="{D2BC58EF-A0A9-4B9D-A40B-172E3387DB63}" dt="2026-10-24T10:55:24.923" v="122" actId="255"/>
+          <ac:spMkLst>
+            <pc:docMk/>
+            <pc:sldMk cId="0" sldId="256"/>
+            <ac:spMk id="5" creationId="{00000000-0000-0000-0000-000000000000}"/>
+          </ac:spMkLst>
+        </pc:spChg>
+        <pc:spChg chg="mod">
+          <ac:chgData name="Yesh Raheja" userId="0343116cb2735489" providerId="LiveId" clId="{D2BC58EF-A0A9-4B9D-A40B-172E3387DB63}" dt="2026-10-24T10:53:45.777" v="29" actId="1076"/>
+          <ac:spMkLst>
+            <pc:docMk/>
+            <pc:sldMk cId="0" sldId="256"/>
+            <ac:spMk id="11" creationId="{00000000-0000-0000-0000-000000000000}"/>
+          </ac:spMkLst>
+        </pc:spChg>
+        <pc:spChg chg="del">
+          <ac:chgData name="Yesh Raheja" userId="0343116cb2735489" providerId="LiveId" clId="{D2BC58EF-A0A9-4B9D-A40B-172E3387DB63}" dt="2026-10-24T10:53:42.855" v="28" actId="478"/>
+          <ac:spMkLst>
+            <pc:docMk/>
+            <pc:sldMk cId="0" sldId="256"/>
+            <ac:spMk id="12" creationId="{00000000-0000-0000-0000-000000000000}"/>
+          </ac:spMkLst>
+        </pc:spChg>
+        <pc:spChg chg="del">
+          <ac:chgData name="Yesh Raheja" userId="0343116cb2735489" providerId="LiveId" clId="{D2BC58EF-A0A9-4B9D-A40B-172E3387DB63}" dt="2026-10-24T10:53:41.603" v="27" actId="478"/>
+          <ac:spMkLst>
+            <pc:docMk/>
+            <pc:sldMk cId="0" sldId="256"/>
+            <ac:spMk id="13" creationId="{00000000-0000-0000-0000-000000000000}"/>
+          </ac:spMkLst>
+        </pc:spChg>
+      </pc:sldChg>
+    </pc:docChg>
+  </pc:docChgLst>
+</pc:chgInfo>
 </file>
 
 <file path=ppt/slideLayouts/slideLayout1.xml><?xml version="1.0" encoding="utf-8"?>
@@ -158,10 +235,9 @@
           <a:lstStyle/>
           <a:p>
             <a:r>
-              <a:rPr lang="en-US" smtClean="0"/>
+              <a:rPr lang="en-US"/>
               <a:t>Click to edit Master title style</a:t>
             </a:r>
-            <a:endParaRPr lang="en-US"/>
           </a:p>
         </p:txBody>
       </p:sp>
@@ -277,10 +353,9 @@
           </a:lstStyle>
           <a:p>
             <a:r>
-              <a:rPr lang="en-US" smtClean="0"/>
+              <a:rPr lang="en-US"/>
               <a:t>Click to edit Master subtitle style</a:t>
             </a:r>
-            <a:endParaRPr lang="en-US"/>
           </a:p>
         </p:txBody>
       </p:sp>
@@ -301,7 +376,7 @@
           <a:p>
             <a:fld id="{5BCAD085-E8A6-8845-BD4E-CB4CCA059FC4}" type="datetimeFigureOut">
               <a:rPr lang="en-US" smtClean="0"/>
-              <a:t>1/27/13</a:t>
+              <a:t>10/24/2026</a:t>
             </a:fld>
             <a:endParaRPr lang="en-US"/>
           </a:p>
@@ -395,10 +470,9 @@
           <a:lstStyle/>
           <a:p>
             <a:r>
-              <a:rPr lang="en-US" smtClean="0"/>
+              <a:rPr lang="en-US"/>
               <a:t>Click to edit Master title style</a:t>
             </a:r>
-            <a:endParaRPr lang="en-US"/>
           </a:p>
         </p:txBody>
       </p:sp>
@@ -419,38 +493,37 @@
           <a:p>
             <a:pPr lvl="0"/>
             <a:r>
-              <a:rPr lang="en-US" smtClean="0"/>
+              <a:rPr lang="en-US"/>
               <a:t>Click to edit Master text styles</a:t>
             </a:r>
           </a:p>
           <a:p>
             <a:pPr lvl="1"/>
             <a:r>
-              <a:rPr lang="en-US" smtClean="0"/>
+              <a:rPr lang="en-US"/>
               <a:t>Second level</a:t>
             </a:r>
           </a:p>
           <a:p>
             <a:pPr lvl="2"/>
             <a:r>
-              <a:rPr lang="en-US" smtClean="0"/>
+              <a:rPr lang="en-US"/>
               <a:t>Third level</a:t>
             </a:r>
           </a:p>
           <a:p>
             <a:pPr lvl="3"/>
             <a:r>
-              <a:rPr lang="en-US" smtClean="0"/>
+              <a:rPr lang="en-US"/>
               <a:t>Fourth level</a:t>
             </a:r>
           </a:p>
           <a:p>
             <a:pPr lvl="4"/>
             <a:r>
-              <a:rPr lang="en-US" smtClean="0"/>
+              <a:rPr lang="en-US"/>
               <a:t>Fifth level</a:t>
             </a:r>
-            <a:endParaRPr lang="en-US"/>
           </a:p>
         </p:txBody>
       </p:sp>
@@ -471,7 +544,7 @@
           <a:p>
             <a:fld id="{5BCAD085-E8A6-8845-BD4E-CB4CCA059FC4}" type="datetimeFigureOut">
               <a:rPr lang="en-US" smtClean="0"/>
-              <a:t>1/27/13</a:t>
+              <a:t>10/24/2026</a:t>
             </a:fld>
             <a:endParaRPr lang="en-US"/>
           </a:p>
@@ -570,10 +643,9 @@
           <a:lstStyle/>
           <a:p>
             <a:r>
-              <a:rPr lang="en-US" smtClean="0"/>
+              <a:rPr lang="en-US"/>
               <a:t>Click to edit Master title style</a:t>
             </a:r>
-            <a:endParaRPr lang="en-US"/>
           </a:p>
         </p:txBody>
       </p:sp>
@@ -599,38 +671,37 @@
           <a:p>
             <a:pPr lvl="0"/>
             <a:r>
-              <a:rPr lang="en-US" smtClean="0"/>
+              <a:rPr lang="en-US"/>
               <a:t>Click to edit Master text styles</a:t>
             </a:r>
           </a:p>
           <a:p>
             <a:pPr lvl="1"/>
             <a:r>
-              <a:rPr lang="en-US" smtClean="0"/>
+              <a:rPr lang="en-US"/>
               <a:t>Second level</a:t>
             </a:r>
           </a:p>
           <a:p>
             <a:pPr lvl="2"/>
             <a:r>
-              <a:rPr lang="en-US" smtClean="0"/>
+              <a:rPr lang="en-US"/>
               <a:t>Third level</a:t>
             </a:r>
           </a:p>
           <a:p>
             <a:pPr lvl="3"/>
             <a:r>
-              <a:rPr lang="en-US" smtClean="0"/>
+              <a:rPr lang="en-US"/>
               <a:t>Fourth level</a:t>
             </a:r>
           </a:p>
           <a:p>
             <a:pPr lvl="4"/>
             <a:r>
-              <a:rPr lang="en-US" smtClean="0"/>
+              <a:rPr lang="en-US"/>
               <a:t>Fifth level</a:t>
             </a:r>
-            <a:endParaRPr lang="en-US"/>
           </a:p>
         </p:txBody>
       </p:sp>
@@ -651,7 +722,7 @@
           <a:p>
             <a:fld id="{5BCAD085-E8A6-8845-BD4E-CB4CCA059FC4}" type="datetimeFigureOut">
               <a:rPr lang="en-US" smtClean="0"/>
-              <a:t>1/27/13</a:t>
+              <a:t>10/24/2026</a:t>
             </a:fld>
             <a:endParaRPr lang="en-US"/>
           </a:p>
@@ -745,10 +816,9 @@
           <a:lstStyle/>
           <a:p>
             <a:r>
-              <a:rPr lang="en-US" smtClean="0"/>
+              <a:rPr lang="en-US"/>
               <a:t>Click to edit Master title style</a:t>
             </a:r>
-            <a:endParaRPr lang="en-US"/>
           </a:p>
         </p:txBody>
       </p:sp>
@@ -769,38 +839,37 @@
           <a:p>
             <a:pPr lvl="0"/>
             <a:r>
-              <a:rPr lang="en-US" smtClean="0"/>
+              <a:rPr lang="en-US"/>
               <a:t>Click to edit Master text styles</a:t>
             </a:r>
           </a:p>
           <a:p>
             <a:pPr lvl="1"/>
             <a:r>
-              <a:rPr lang="en-US" smtClean="0"/>
+              <a:rPr lang="en-US"/>
               <a:t>Second level</a:t>
             </a:r>
           </a:p>
           <a:p>
             <a:pPr lvl="2"/>
             <a:r>
-              <a:rPr lang="en-US" smtClean="0"/>
+              <a:rPr lang="en-US"/>
               <a:t>Third level</a:t>
             </a:r>
           </a:p>
           <a:p>
             <a:pPr lvl="3"/>
             <a:r>
-              <a:rPr lang="en-US" smtClean="0"/>
+              <a:rPr lang="en-US"/>
               <a:t>Fourth level</a:t>
             </a:r>
           </a:p>
           <a:p>
             <a:pPr lvl="4"/>
             <a:r>
-              <a:rPr lang="en-US" smtClean="0"/>
+              <a:rPr lang="en-US"/>
               <a:t>Fifth level</a:t>
             </a:r>
-            <a:endParaRPr lang="en-US"/>
           </a:p>
         </p:txBody>
       </p:sp>
@@ -821,7 +890,7 @@
           <a:p>
             <a:fld id="{5BCAD085-E8A6-8845-BD4E-CB4CCA059FC4}" type="datetimeFigureOut">
               <a:rPr lang="en-US" smtClean="0"/>
-              <a:t>1/27/13</a:t>
+              <a:t>10/24/2026</a:t>
             </a:fld>
             <a:endParaRPr lang="en-US"/>
           </a:p>
@@ -924,10 +993,9 @@
           </a:lstStyle>
           <a:p>
             <a:r>
-              <a:rPr lang="en-US" smtClean="0"/>
+              <a:rPr lang="en-US"/>
               <a:t>Click to edit Master title style</a:t>
             </a:r>
-            <a:endParaRPr lang="en-US"/>
           </a:p>
         </p:txBody>
       </p:sp>
@@ -1044,7 +1112,7 @@
           <a:p>
             <a:pPr lvl="0"/>
             <a:r>
-              <a:rPr lang="en-US" smtClean="0"/>
+              <a:rPr lang="en-US"/>
               <a:t>Click to edit Master text styles</a:t>
             </a:r>
           </a:p>
@@ -1067,7 +1135,7 @@
           <a:p>
             <a:fld id="{5BCAD085-E8A6-8845-BD4E-CB4CCA059FC4}" type="datetimeFigureOut">
               <a:rPr lang="en-US" smtClean="0"/>
-              <a:t>1/27/13</a:t>
+              <a:t>10/24/2026</a:t>
             </a:fld>
             <a:endParaRPr lang="en-US"/>
           </a:p>
@@ -1161,10 +1229,9 @@
           <a:lstStyle/>
           <a:p>
             <a:r>
-              <a:rPr lang="en-US" smtClean="0"/>
+              <a:rPr lang="en-US"/>
               <a:t>Click to edit Master title style</a:t>
             </a:r>
-            <a:endParaRPr lang="en-US"/>
           </a:p>
         </p:txBody>
       </p:sp>
@@ -1218,38 +1285,37 @@
           <a:p>
             <a:pPr lvl="0"/>
             <a:r>
-              <a:rPr lang="en-US" smtClean="0"/>
+              <a:rPr lang="en-US"/>
               <a:t>Click to edit Master text styles</a:t>
             </a:r>
           </a:p>
           <a:p>
             <a:pPr lvl="1"/>
             <a:r>
-              <a:rPr lang="en-US" smtClean="0"/>
+              <a:rPr lang="en-US"/>
               <a:t>Second level</a:t>
             </a:r>
           </a:p>
           <a:p>
             <a:pPr lvl="2"/>
             <a:r>
-              <a:rPr lang="en-US" smtClean="0"/>
+              <a:rPr lang="en-US"/>
               <a:t>Third level</a:t>
             </a:r>
           </a:p>
           <a:p>
             <a:pPr lvl="3"/>
             <a:r>
-              <a:rPr lang="en-US" smtClean="0"/>
+              <a:rPr lang="en-US"/>
               <a:t>Fourth level</a:t>
             </a:r>
           </a:p>
           <a:p>
             <a:pPr lvl="4"/>
             <a:r>
-              <a:rPr lang="en-US" smtClean="0"/>
+              <a:rPr lang="en-US"/>
               <a:t>Fifth level</a:t>
             </a:r>
-            <a:endParaRPr lang="en-US"/>
           </a:p>
         </p:txBody>
       </p:sp>
@@ -1303,38 +1369,37 @@
           <a:p>
             <a:pPr lvl="0"/>
             <a:r>
-              <a:rPr lang="en-US" smtClean="0"/>
+              <a:rPr lang="en-US"/>
               <a:t>Click to edit Master text styles</a:t>
             </a:r>
           </a:p>
           <a:p>
             <a:pPr lvl="1"/>
             <a:r>
-              <a:rPr lang="en-US" smtClean="0"/>
+              <a:rPr lang="en-US"/>
               <a:t>Second level</a:t>
             </a:r>
           </a:p>
           <a:p>
             <a:pPr lvl="2"/>
             <a:r>
-              <a:rPr lang="en-US" smtClean="0"/>
+              <a:rPr lang="en-US"/>
               <a:t>Third level</a:t>
             </a:r>
           </a:p>
           <a:p>
             <a:pPr lvl="3"/>
             <a:r>
-              <a:rPr lang="en-US" smtClean="0"/>
+              <a:rPr lang="en-US"/>
               <a:t>Fourth level</a:t>
             </a:r>
           </a:p>
           <a:p>
             <a:pPr lvl="4"/>
             <a:r>
-              <a:rPr lang="en-US" smtClean="0"/>
+              <a:rPr lang="en-US"/>
               <a:t>Fifth level</a:t>
             </a:r>
-            <a:endParaRPr lang="en-US"/>
           </a:p>
         </p:txBody>
       </p:sp>
@@ -1355,7 +1420,7 @@
           <a:p>
             <a:fld id="{5BCAD085-E8A6-8845-BD4E-CB4CCA059FC4}" type="datetimeFigureOut">
               <a:rPr lang="en-US" smtClean="0"/>
-              <a:t>1/27/13</a:t>
+              <a:t>10/24/2026</a:t>
             </a:fld>
             <a:endParaRPr lang="en-US"/>
           </a:p>
@@ -1453,10 +1518,9 @@
           </a:lstStyle>
           <a:p>
             <a:r>
-              <a:rPr lang="en-US" smtClean="0"/>
+              <a:rPr lang="en-US"/>
               <a:t>Click to edit Master title style</a:t>
             </a:r>
-            <a:endParaRPr lang="en-US"/>
           </a:p>
         </p:txBody>
       </p:sp>
@@ -1519,7 +1583,7 @@
           <a:p>
             <a:pPr lvl="0"/>
             <a:r>
-              <a:rPr lang="en-US" smtClean="0"/>
+              <a:rPr lang="en-US"/>
               <a:t>Click to edit Master text styles</a:t>
             </a:r>
           </a:p>
@@ -1575,38 +1639,37 @@
           <a:p>
             <a:pPr lvl="0"/>
             <a:r>
-              <a:rPr lang="en-US" smtClean="0"/>
+              <a:rPr lang="en-US"/>
               <a:t>Click to edit Master text styles</a:t>
             </a:r>
           </a:p>
           <a:p>
             <a:pPr lvl="1"/>
             <a:r>
-              <a:rPr lang="en-US" smtClean="0"/>
+              <a:rPr lang="en-US"/>
               <a:t>Second level</a:t>
             </a:r>
           </a:p>
           <a:p>
             <a:pPr lvl="2"/>
             <a:r>
-              <a:rPr lang="en-US" smtClean="0"/>
+              <a:rPr lang="en-US"/>
               <a:t>Third level</a:t>
             </a:r>
           </a:p>
           <a:p>
             <a:pPr lvl="3"/>
             <a:r>
-              <a:rPr lang="en-US" smtClean="0"/>
+              <a:rPr lang="en-US"/>
               <a:t>Fourth level</a:t>
             </a:r>
           </a:p>
           <a:p>
             <a:pPr lvl="4"/>
             <a:r>
-              <a:rPr lang="en-US" smtClean="0"/>
+              <a:rPr lang="en-US"/>
               <a:t>Fifth level</a:t>
             </a:r>
-            <a:endParaRPr lang="en-US"/>
           </a:p>
         </p:txBody>
       </p:sp>
@@ -1669,7 +1732,7 @@
           <a:p>
             <a:pPr lvl="0"/>
             <a:r>
-              <a:rPr lang="en-US" smtClean="0"/>
+              <a:rPr lang="en-US"/>
               <a:t>Click to edit Master text styles</a:t>
             </a:r>
           </a:p>
@@ -1725,38 +1788,37 @@
           <a:p>
             <a:pPr lvl="0"/>
             <a:r>
-              <a:rPr lang="en-US" smtClean="0"/>
+              <a:rPr lang="en-US"/>
               <a:t>Click to edit Master text styles</a:t>
             </a:r>
           </a:p>
           <a:p>
             <a:pPr lvl="1"/>
             <a:r>
-              <a:rPr lang="en-US" smtClean="0"/>
+              <a:rPr lang="en-US"/>
               <a:t>Second level</a:t>
             </a:r>
           </a:p>
           <a:p>
             <a:pPr lvl="2"/>
             <a:r>
-              <a:rPr lang="en-US" smtClean="0"/>
+              <a:rPr lang="en-US"/>
               <a:t>Third level</a:t>
             </a:r>
           </a:p>
           <a:p>
             <a:pPr lvl="3"/>
             <a:r>
-              <a:rPr lang="en-US" smtClean="0"/>
+              <a:rPr lang="en-US"/>
               <a:t>Fourth level</a:t>
             </a:r>
           </a:p>
           <a:p>
             <a:pPr lvl="4"/>
             <a:r>
-              <a:rPr lang="en-US" smtClean="0"/>
+              <a:rPr lang="en-US"/>
               <a:t>Fifth level</a:t>
             </a:r>
-            <a:endParaRPr lang="en-US"/>
           </a:p>
         </p:txBody>
       </p:sp>
@@ -1777,7 +1839,7 @@
           <a:p>
             <a:fld id="{5BCAD085-E8A6-8845-BD4E-CB4CCA059FC4}" type="datetimeFigureOut">
               <a:rPr lang="en-US" smtClean="0"/>
-              <a:t>1/27/13</a:t>
+              <a:t>10/24/2026</a:t>
             </a:fld>
             <a:endParaRPr lang="en-US"/>
           </a:p>
@@ -1871,10 +1933,9 @@
           <a:lstStyle/>
           <a:p>
             <a:r>
-              <a:rPr lang="en-US" smtClean="0"/>
+              <a:rPr lang="en-US"/>
               <a:t>Click to edit Master title style</a:t>
             </a:r>
-            <a:endParaRPr lang="en-US"/>
           </a:p>
         </p:txBody>
       </p:sp>
@@ -1895,7 +1956,7 @@
           <a:p>
             <a:fld id="{5BCAD085-E8A6-8845-BD4E-CB4CCA059FC4}" type="datetimeFigureOut">
               <a:rPr lang="en-US" smtClean="0"/>
-              <a:t>1/27/13</a:t>
+              <a:t>10/24/2026</a:t>
             </a:fld>
             <a:endParaRPr lang="en-US"/>
           </a:p>
@@ -1990,7 +2051,7 @@
           <a:p>
             <a:fld id="{5BCAD085-E8A6-8845-BD4E-CB4CCA059FC4}" type="datetimeFigureOut">
               <a:rPr lang="en-US" smtClean="0"/>
-              <a:t>1/27/13</a:t>
+              <a:t>10/24/2026</a:t>
             </a:fld>
             <a:endParaRPr lang="en-US"/>
           </a:p>
@@ -2093,10 +2154,9 @@
           </a:lstStyle>
           <a:p>
             <a:r>
-              <a:rPr lang="en-US" smtClean="0"/>
+              <a:rPr lang="en-US"/>
               <a:t>Click to edit Master title style</a:t>
             </a:r>
-            <a:endParaRPr lang="en-US"/>
           </a:p>
         </p:txBody>
       </p:sp>
@@ -2150,38 +2210,37 @@
           <a:p>
             <a:pPr lvl="0"/>
             <a:r>
-              <a:rPr lang="en-US" smtClean="0"/>
+              <a:rPr lang="en-US"/>
               <a:t>Click to edit Master text styles</a:t>
             </a:r>
           </a:p>
           <a:p>
             <a:pPr lvl="1"/>
             <a:r>
-              <a:rPr lang="en-US" smtClean="0"/>
+              <a:rPr lang="en-US"/>
               <a:t>Second level</a:t>
             </a:r>
           </a:p>
           <a:p>
             <a:pPr lvl="2"/>
             <a:r>
-              <a:rPr lang="en-US" smtClean="0"/>
+              <a:rPr lang="en-US"/>
               <a:t>Third level</a:t>
             </a:r>
           </a:p>
           <a:p>
             <a:pPr lvl="3"/>
             <a:r>
-              <a:rPr lang="en-US" smtClean="0"/>
+              <a:rPr lang="en-US"/>
               <a:t>Fourth level</a:t>
             </a:r>
           </a:p>
           <a:p>
             <a:pPr lvl="4"/>
             <a:r>
-              <a:rPr lang="en-US" smtClean="0"/>
+              <a:rPr lang="en-US"/>
               <a:t>Fifth level</a:t>
             </a:r>
-            <a:endParaRPr lang="en-US"/>
           </a:p>
         </p:txBody>
       </p:sp>
@@ -2244,7 +2303,7 @@
           <a:p>
             <a:pPr lvl="0"/>
             <a:r>
-              <a:rPr lang="en-US" smtClean="0"/>
+              <a:rPr lang="en-US"/>
               <a:t>Click to edit Master text styles</a:t>
             </a:r>
           </a:p>
@@ -2267,7 +2326,7 @@
           <a:p>
             <a:fld id="{5BCAD085-E8A6-8845-BD4E-CB4CCA059FC4}" type="datetimeFigureOut">
               <a:rPr lang="en-US" smtClean="0"/>
-              <a:t>1/27/13</a:t>
+              <a:t>10/24/2026</a:t>
             </a:fld>
             <a:endParaRPr lang="en-US"/>
           </a:p>
@@ -2370,10 +2429,9 @@
           </a:lstStyle>
           <a:p>
             <a:r>
-              <a:rPr lang="en-US" smtClean="0"/>
+              <a:rPr lang="en-US"/>
               <a:t>Click to edit Master title style</a:t>
             </a:r>
-            <a:endParaRPr lang="en-US"/>
           </a:p>
         </p:txBody>
       </p:sp>
@@ -2497,7 +2555,7 @@
           <a:p>
             <a:pPr lvl="0"/>
             <a:r>
-              <a:rPr lang="en-US" smtClean="0"/>
+              <a:rPr lang="en-US"/>
               <a:t>Click to edit Master text styles</a:t>
             </a:r>
           </a:p>
@@ -2520,7 +2578,7 @@
           <a:p>
             <a:fld id="{5BCAD085-E8A6-8845-BD4E-CB4CCA059FC4}" type="datetimeFigureOut">
               <a:rPr lang="en-US" smtClean="0"/>
-              <a:t>1/27/13</a:t>
+              <a:t>10/24/2026</a:t>
             </a:fld>
             <a:endParaRPr lang="en-US"/>
           </a:p>
@@ -2629,10 +2687,9 @@
           <a:lstStyle/>
           <a:p>
             <a:r>
-              <a:rPr lang="en-US" smtClean="0"/>
+              <a:rPr lang="en-US"/>
               <a:t>Click to edit Master title style</a:t>
             </a:r>
-            <a:endParaRPr lang="en-US"/>
           </a:p>
         </p:txBody>
       </p:sp>
@@ -2663,38 +2720,37 @@
           <a:p>
             <a:pPr lvl="0"/>
             <a:r>
-              <a:rPr lang="en-US" smtClean="0"/>
+              <a:rPr lang="en-US"/>
               <a:t>Click to edit Master text styles</a:t>
             </a:r>
           </a:p>
           <a:p>
             <a:pPr lvl="1"/>
             <a:r>
-              <a:rPr lang="en-US" smtClean="0"/>
+              <a:rPr lang="en-US"/>
               <a:t>Second level</a:t>
             </a:r>
           </a:p>
           <a:p>
             <a:pPr lvl="2"/>
             <a:r>
-              <a:rPr lang="en-US" smtClean="0"/>
+              <a:rPr lang="en-US"/>
               <a:t>Third level</a:t>
             </a:r>
           </a:p>
           <a:p>
             <a:pPr lvl="3"/>
             <a:r>
-              <a:rPr lang="en-US" smtClean="0"/>
+              <a:rPr lang="en-US"/>
               <a:t>Fourth level</a:t>
             </a:r>
           </a:p>
           <a:p>
             <a:pPr lvl="4"/>
             <a:r>
-              <a:rPr lang="en-US" smtClean="0"/>
+              <a:rPr lang="en-US"/>
               <a:t>Fifth level</a:t>
             </a:r>
-            <a:endParaRPr lang="en-US"/>
           </a:p>
         </p:txBody>
       </p:sp>
@@ -2733,7 +2789,7 @@
           <a:p>
             <a:fld id="{5BCAD085-E8A6-8845-BD4E-CB4CCA059FC4}" type="datetimeFigureOut">
               <a:rPr lang="en-US" smtClean="0"/>
-              <a:t>1/27/13</a:t>
+              <a:t>10/24/2026</a:t>
             </a:fld>
             <a:endParaRPr lang="en-US"/>
           </a:p>
@@ -3092,7 +3148,7 @@
 </file>
 
 <file path=ppt/slides/slide1.xml><?xml version="1.0" encoding="utf-8"?>
-<p:sld xmlns:a="http://schemas.openxmlformats.org/drawingml/2006/main" xmlns:p="http://schemas.openxmlformats.org/presentationml/2006/main" xmlns:r="http://schemas.openxmlformats.org/officeDocument/2006/relationships">
+<p:sld xmlns:a="http://schemas.openxmlformats.org/drawingml/2006/main" xmlns:r="http://schemas.openxmlformats.org/officeDocument/2006/relationships" xmlns:p="http://schemas.openxmlformats.org/presentationml/2006/main">
   <p:cSld>
     <p:spTree>
       <p:nvGrpSpPr>
@@ -3100,7 +3156,14 @@
         <p:cNvGrpSpPr/>
         <p:nvPr/>
       </p:nvGrpSpPr>
-      <p:grpSpPr/>
+      <p:grpSpPr>
+        <a:xfrm>
+          <a:off x="0" y="0"/>
+          <a:ext cx="0" cy="0"/>
+          <a:chOff x="0" y="0"/>
+          <a:chExt cx="0" cy="0"/>
+        </a:xfrm>
+      </p:grpSpPr>
       <p:sp>
         <p:nvSpPr>
           <p:cNvPr id="2" name="Rectangle 1"/>
@@ -3141,6 +3204,7 @@
           <a:lstStyle/>
           <a:p>
             <a:pPr algn="ctr"/>
+            <a:endParaRPr/>
           </a:p>
         </p:txBody>
       </p:sp>
@@ -3153,7 +3217,7 @@
         <p:spPr>
           <a:xfrm>
             <a:off x="731520" y="731520"/>
-            <a:ext cx="10698480" cy="365760"/>
+            <a:ext cx="3563796" cy="261610"/>
           </a:xfrm>
           <a:prstGeom prst="rect">
             <a:avLst/>
@@ -3174,7 +3238,8 @@
               </a:defRPr>
             </a:pPr>
             <a:r>
-              <a:t>ACADEMIC YEAR 2026-2027  |  DEPARTMENT OF COMPUTER SCIENCE &amp; ENGINEERING</a:t>
+              <a:rPr dirty="0"/>
+              <a:t> DEPARTMENT OF COMPUTER SCIENCE &amp; ENGINEERING</a:t>
             </a:r>
           </a:p>
         </p:txBody>
@@ -3219,6 +3284,7 @@
           <a:lstStyle/>
           <a:p>
             <a:pPr algn="ctr"/>
+            <a:endParaRPr/>
           </a:p>
         </p:txBody>
       </p:sp>
@@ -3231,7 +3297,7 @@
         <p:spPr>
           <a:xfrm>
             <a:off x="731520" y="1417320"/>
-            <a:ext cx="10728655" cy="2468880"/>
+            <a:ext cx="10728655" cy="2421176"/>
           </a:xfrm>
           <a:prstGeom prst="rect">
             <a:avLst/>
@@ -3252,10 +3318,14 @@
               </a:defRPr>
             </a:pPr>
             <a:r>
+              <a:rPr dirty="0"/>
               <a:t>Healthcare Facility Financial and Resource Utilization</a:t>
             </a:r>
-            <a:br/>
-            <a:r>
+            <a:br>
+              <a:rPr dirty="0"/>
+            </a:br>
+            <a:r>
+              <a:rPr dirty="0"/>
               <a:t>Pattern Analysis Using Machine Learning</a:t>
             </a:r>
           </a:p>
@@ -3271,6 +3341,7 @@
               </a:defRPr>
             </a:pPr>
             <a:r>
+              <a:rPr dirty="0"/>
               <a:t>CA3 Machine Learning Mini-Project  |  Tri-Algorithm Clustering, Empirical Benchmarking &amp; Decision Support</a:t>
             </a:r>
           </a:p>
@@ -3286,8 +3357,64 @@
               </a:defRPr>
             </a:pPr>
             <a:r>
+              <a:rPr sz="1400" dirty="0"/>
               <a:t>Rigorous unsupervised partitioning of 428 California healthcare facilities from multi-quarter state disclosures.</a:t>
             </a:r>
+            <a:endParaRPr lang="en-IN" sz="1400" dirty="0"/>
+          </a:p>
+          <a:p>
+            <a:pPr>
+              <a:spcBef>
+                <a:spcPts val="600"/>
+              </a:spcBef>
+              <a:defRPr sz="1100">
+                <a:solidFill>
+                  <a:srgbClr val="BECDDC"/>
+                </a:solidFill>
+              </a:defRPr>
+            </a:pPr>
+            <a:endParaRPr lang="en-IN" dirty="0"/>
+          </a:p>
+          <a:p>
+            <a:pPr>
+              <a:spcBef>
+                <a:spcPts val="600"/>
+              </a:spcBef>
+              <a:defRPr sz="1100">
+                <a:solidFill>
+                  <a:srgbClr val="BECDDC"/>
+                </a:solidFill>
+              </a:defRPr>
+            </a:pPr>
+            <a:r>
+              <a:rPr lang="en-IN" sz="1400" dirty="0"/>
+              <a:t>Name: Yesh Raheja  PRN: 23070521174 &amp;</a:t>
+            </a:r>
+          </a:p>
+          <a:p>
+            <a:pPr>
+              <a:spcBef>
+                <a:spcPts val="600"/>
+              </a:spcBef>
+              <a:defRPr sz="1100">
+                <a:solidFill>
+                  <a:srgbClr val="BECDDC"/>
+                </a:solidFill>
+              </a:defRPr>
+            </a:pPr>
+            <a:r>
+              <a:rPr lang="en-IN" sz="1400" dirty="0"/>
+              <a:t>Name: Aditya </a:t>
+            </a:r>
+            <a:r>
+              <a:rPr lang="en-IN" sz="1400" dirty="0" err="1"/>
+              <a:t>Gurve</a:t>
+            </a:r>
+            <a:r>
+              <a:rPr lang="en-IN" sz="1400" dirty="0"/>
+              <a:t>  PRN :23070521231</a:t>
+            </a:r>
+            <a:endParaRPr sz="1400" dirty="0"/>
           </a:p>
         </p:txBody>
       </p:sp>
@@ -3333,6 +3460,7 @@
           <a:lstStyle/>
           <a:p>
             <a:pPr algn="ctr"/>
+            <a:endParaRPr/>
           </a:p>
         </p:txBody>
       </p:sp>
@@ -3455,6 +3583,7 @@
           <a:lstStyle/>
           <a:p>
             <a:pPr algn="ctr"/>
+            <a:endParaRPr/>
           </a:p>
         </p:txBody>
       </p:sp>
@@ -3577,6 +3706,7 @@
           <a:lstStyle/>
           <a:p>
             <a:pPr algn="ctr"/>
+            <a:endParaRPr/>
           </a:p>
         </p:txBody>
       </p:sp>
@@ -3588,7 +3718,7 @@
         </p:nvSpPr>
         <p:spPr>
           <a:xfrm>
-            <a:off x="6318504" y="4251960"/>
+            <a:off x="6318504" y="4251959"/>
             <a:ext cx="2267712" cy="1874519"/>
           </a:xfrm>
           <a:prstGeom prst="rect">
@@ -3653,128 +3783,6 @@
             <a:br/>
             <a:r>
               <a:t>Non-Causal Academic Framing</a:t>
-            </a:r>
-          </a:p>
-        </p:txBody>
-      </p:sp>
-      <p:sp>
-        <p:nvSpPr>
-          <p:cNvPr id="12" name="Rectangle 11"/>
-          <p:cNvSpPr/>
-          <p:nvPr/>
-        </p:nvSpPr>
-        <p:spPr>
-          <a:xfrm>
-            <a:off x="8906256" y="4160520"/>
-            <a:ext cx="2542032" cy="2057400"/>
-          </a:xfrm>
-          <a:prstGeom prst="rect">
-            <a:avLst/>
-          </a:prstGeom>
-          <a:solidFill>
-            <a:srgbClr val="103050"/>
-          </a:solidFill>
-          <a:ln w="15240">
-            <a:solidFill>
-              <a:srgbClr val="007A87"/>
-            </a:solidFill>
-          </a:ln>
-        </p:spPr>
-        <p:style>
-          <a:lnRef idx="1">
-            <a:schemeClr val="accent1"/>
-          </a:lnRef>
-          <a:fillRef idx="3">
-            <a:schemeClr val="accent1"/>
-          </a:fillRef>
-          <a:effectRef idx="2">
-            <a:schemeClr val="accent1"/>
-          </a:effectRef>
-          <a:fontRef idx="minor">
-            <a:schemeClr val="lt1"/>
-          </a:fontRef>
-        </p:style>
-        <p:txBody>
-          <a:bodyPr rtlCol="0" anchor="ctr"/>
-          <a:lstStyle/>
-          <a:p>
-            <a:pPr algn="ctr"/>
-          </a:p>
-        </p:txBody>
-      </p:sp>
-      <p:sp>
-        <p:nvSpPr>
-          <p:cNvPr id="13" name="TextBox 12"/>
-          <p:cNvSpPr txBox="1"/>
-          <p:nvPr/>
-        </p:nvSpPr>
-        <p:spPr>
-          <a:xfrm>
-            <a:off x="9043416" y="4251960"/>
-            <a:ext cx="2267712" cy="1874519"/>
-          </a:xfrm>
-          <a:prstGeom prst="rect">
-            <a:avLst/>
-          </a:prstGeom>
-          <a:noFill/>
-        </p:spPr>
-        <p:txBody>
-          <a:bodyPr wrap="square">
-            <a:spAutoFit/>
-          </a:bodyPr>
-          <a:lstStyle/>
-          <a:p>
-            <a:pPr>
-              <a:defRPr sz="900" b="1">
-                <a:solidFill>
-                  <a:srgbClr val="007A87"/>
-                </a:solidFill>
-              </a:defRPr>
-            </a:pPr>
-            <a:r>
-              <a:t>SUBMISSION DETAILS</a:t>
-            </a:r>
-          </a:p>
-          <a:p>
-            <a:pPr>
-              <a:spcBef>
-                <a:spcPts val="300"/>
-              </a:spcBef>
-              <a:defRPr sz="1100" b="1">
-                <a:solidFill>
-                  <a:srgbClr val="FFFFFF"/>
-                </a:solidFill>
-              </a:defRPr>
-            </a:pPr>
-            <a:r>
-              <a:t>Candidate: Aditya09977</a:t>
-            </a:r>
-          </a:p>
-          <a:p>
-            <a:pPr>
-              <a:spcBef>
-                <a:spcPts val="400"/>
-              </a:spcBef>
-              <a:defRPr sz="950">
-                <a:solidFill>
-                  <a:srgbClr val="D2E1F0"/>
-                </a:solidFill>
-              </a:defRPr>
-            </a:pPr>
-            <a:r>
-              <a:t>Course: CA3 Machine Learning</a:t>
-            </a:r>
-            <a:br/>
-            <a:r>
-              <a:t>Target Deadline: 24 Oct 2026, 8:00 PM</a:t>
-            </a:r>
-            <a:br/>
-            <a:r>
-              <a:t>Live Streamlit Interactive App</a:t>
-            </a:r>
-            <a:br/>
-            <a:r>
-              <a:t>Complete Reproducible GitHub Repo</a:t>
             </a:r>
           </a:p>
         </p:txBody>
@@ -3788,7 +3796,7 @@
 </file>
 
 <file path=ppt/slides/slide10.xml><?xml version="1.0" encoding="utf-8"?>
-<p:sld xmlns:a="http://schemas.openxmlformats.org/drawingml/2006/main" xmlns:p="http://schemas.openxmlformats.org/presentationml/2006/main" xmlns:r="http://schemas.openxmlformats.org/officeDocument/2006/relationships">
+<p:sld xmlns:a="http://schemas.openxmlformats.org/drawingml/2006/main" xmlns:r="http://schemas.openxmlformats.org/officeDocument/2006/relationships" xmlns:p="http://schemas.openxmlformats.org/presentationml/2006/main">
   <p:cSld>
     <p:spTree>
       <p:nvGrpSpPr>
@@ -3796,7 +3804,14 @@
         <p:cNvGrpSpPr/>
         <p:nvPr/>
       </p:nvGrpSpPr>
-      <p:grpSpPr/>
+      <p:grpSpPr>
+        <a:xfrm>
+          <a:off x="0" y="0"/>
+          <a:ext cx="0" cy="0"/>
+          <a:chOff x="0" y="0"/>
+          <a:chExt cx="0" cy="0"/>
+        </a:xfrm>
+      </p:grpSpPr>
       <p:sp>
         <p:nvSpPr>
           <p:cNvPr id="2" name="Rectangle 1"/>
@@ -3837,6 +3852,7 @@
           <a:lstStyle/>
           <a:p>
             <a:pPr algn="ctr"/>
+            <a:endParaRPr/>
           </a:p>
         </p:txBody>
       </p:sp>
@@ -3880,6 +3896,7 @@
           <a:lstStyle/>
           <a:p>
             <a:pPr algn="ctr"/>
+            <a:endParaRPr/>
           </a:p>
         </p:txBody>
       </p:sp>
@@ -3923,6 +3940,7 @@
           <a:lstStyle/>
           <a:p>
             <a:pPr algn="ctr"/>
+            <a:endParaRPr/>
           </a:p>
         </p:txBody>
       </p:sp>
@@ -3943,7 +3961,7 @@
           <a:noFill/>
         </p:spPr>
         <p:txBody>
-          <a:bodyPr wrap="square" tIns="0" bIns="0" lIns="0" rIns="0">
+          <a:bodyPr wrap="square" lIns="0" tIns="0" rIns="0" bIns="0">
             <a:spAutoFit/>
           </a:bodyPr>
           <a:lstStyle/>
@@ -4025,20 +4043,20 @@
           <a:noFill/>
         </p:spPr>
         <p:txBody>
-          <a:bodyPr wrap="none" tIns="0" bIns="0" lIns="0" rIns="0">
+          <a:bodyPr wrap="none" lIns="0" tIns="0" rIns="0" bIns="0">
             <a:spAutoFit/>
           </a:bodyPr>
           <a:lstStyle/>
           <a:p>
             <a:pPr>
-              <a:defRPr sz="850">
-                <a:solidFill>
-                  <a:srgbClr val="5A6978"/>
+              <a:defRPr sz="750">
+                <a:solidFill>
+                  <a:srgbClr val="8090A0"/>
                 </a:solidFill>
               </a:defRPr>
             </a:pPr>
             <a:r>
-              <a:t>CA3 Machine Learning Mini-Project  |  Healthcare Facility Analytics  |  Candidate: Aditya09977  |  Submission: Oct 2026</a:t>
+              <a:t>CA3 Machine Learning Mini-Project  |  Healthcare Facility Analytics  |  Yesh Raheja (23070521174) &amp; Aditya Gurve (23070521231)  |  Oct 2026</a:t>
             </a:r>
           </a:p>
         </p:txBody>
@@ -4085,6 +4103,7 @@
           <a:lstStyle/>
           <a:p>
             <a:pPr algn="ctr"/>
+            <a:endParaRPr/>
           </a:p>
         </p:txBody>
       </p:sp>
@@ -4128,6 +4147,7 @@
           <a:lstStyle/>
           <a:p>
             <a:pPr algn="ctr"/>
+            <a:endParaRPr/>
           </a:p>
         </p:txBody>
       </p:sp>
@@ -4148,7 +4168,7 @@
           <a:noFill/>
         </p:spPr>
         <p:txBody>
-          <a:bodyPr wrap="square" tIns="0" bIns="0" lIns="0" rIns="0">
+          <a:bodyPr wrap="square" lIns="0" tIns="0" rIns="0" bIns="0">
             <a:spAutoFit/>
           </a:bodyPr>
           <a:lstStyle/>
@@ -4183,13 +4203,13 @@
           <a:noFill/>
         </p:spPr>
         <p:txBody>
-          <a:bodyPr wrap="square" tIns="0" bIns="0" lIns="0" rIns="0">
+          <a:bodyPr wrap="square" lIns="0" tIns="0" rIns="0" bIns="0">
             <a:spAutoFit/>
           </a:bodyPr>
           <a:lstStyle/>
           <a:p>
             <a:r>
-              <a:rPr b="1" i="0" sz="900">
+              <a:rPr sz="900" b="1" i="0">
                 <a:solidFill>
                   <a:srgbClr val="007A87"/>
                 </a:solidFill>
@@ -4198,7 +4218,7 @@
               <a:t>Host Platform: </a:t>
             </a:r>
             <a:r>
-              <a:rPr b="0" i="0" sz="850">
+              <a:rPr sz="850" b="0" i="0">
                 <a:solidFill>
                   <a:srgbClr val="192330"/>
                 </a:solidFill>
@@ -4214,7 +4234,7 @@
               </a:spcBef>
             </a:pPr>
             <a:r>
-              <a:rPr b="1" i="0" sz="900">
+              <a:rPr sz="900" b="1" i="0">
                 <a:solidFill>
                   <a:srgbClr val="007A87"/>
                 </a:solidFill>
@@ -4223,7 +4243,7 @@
               <a:t>Python Version: </a:t>
             </a:r>
             <a:r>
-              <a:rPr b="0" i="0" sz="850">
+              <a:rPr sz="850" b="0" i="0">
                 <a:solidFill>
                   <a:srgbClr val="192330"/>
                 </a:solidFill>
@@ -4239,7 +4259,7 @@
               </a:spcBef>
             </a:pPr>
             <a:r>
-              <a:rPr b="1" i="0" sz="900">
+              <a:rPr sz="900" b="1" i="0">
                 <a:solidFill>
                   <a:srgbClr val="007A87"/>
                 </a:solidFill>
@@ -4248,7 +4268,7 @@
               <a:t>Core ML Suite: </a:t>
             </a:r>
             <a:r>
-              <a:rPr b="0" i="0" sz="850">
+              <a:rPr sz="850" b="0" i="0">
                 <a:solidFill>
                   <a:srgbClr val="192330"/>
                 </a:solidFill>
@@ -4264,7 +4284,7 @@
               </a:spcBef>
             </a:pPr>
             <a:r>
-              <a:rPr b="1" i="0" sz="900">
+              <a:rPr sz="900" b="1" i="0">
                 <a:solidFill>
                   <a:srgbClr val="007A87"/>
                 </a:solidFill>
@@ -4273,7 +4293,7 @@
               <a:t>Data Manipulation: </a:t>
             </a:r>
             <a:r>
-              <a:rPr b="0" i="0" sz="850">
+              <a:rPr sz="850" b="0" i="0">
                 <a:solidFill>
                   <a:srgbClr val="192330"/>
                 </a:solidFill>
@@ -4289,7 +4309,7 @@
               </a:spcBef>
             </a:pPr>
             <a:r>
-              <a:rPr b="1" i="0" sz="900">
+              <a:rPr sz="900" b="1" i="0">
                 <a:solidFill>
                   <a:srgbClr val="007A87"/>
                 </a:solidFill>
@@ -4298,7 +4318,7 @@
               <a:t>Scientific Computing: </a:t>
             </a:r>
             <a:r>
-              <a:rPr b="0" i="0" sz="850">
+              <a:rPr sz="850" b="0" i="0">
                 <a:solidFill>
                   <a:srgbClr val="192330"/>
                 </a:solidFill>
@@ -4314,7 +4334,7 @@
               </a:spcBef>
             </a:pPr>
             <a:r>
-              <a:rPr b="1" i="0" sz="900">
+              <a:rPr sz="900" b="1" i="0">
                 <a:solidFill>
                   <a:srgbClr val="007A87"/>
                 </a:solidFill>
@@ -4323,7 +4343,7 @@
               <a:t>Data Visualization: </a:t>
             </a:r>
             <a:r>
-              <a:rPr b="0" i="0" sz="850">
+              <a:rPr sz="850" b="0" i="0">
                 <a:solidFill>
                   <a:srgbClr val="192330"/>
                 </a:solidFill>
@@ -4339,7 +4359,7 @@
               </a:spcBef>
             </a:pPr>
             <a:r>
-              <a:rPr b="1" i="0" sz="900">
+              <a:rPr sz="900" b="1" i="0">
                 <a:solidFill>
                   <a:srgbClr val="007A87"/>
                 </a:solidFill>
@@ -4348,7 +4368,7 @@
               <a:t>Interactive Web App: </a:t>
             </a:r>
             <a:r>
-              <a:rPr b="0" i="0" sz="850">
+              <a:rPr sz="850" b="0" i="0">
                 <a:solidFill>
                   <a:srgbClr val="192330"/>
                 </a:solidFill>
@@ -4364,7 +4384,7 @@
               </a:spcBef>
             </a:pPr>
             <a:r>
-              <a:rPr b="1" i="0" sz="900">
+              <a:rPr sz="900" b="1" i="0">
                 <a:solidFill>
                   <a:srgbClr val="007A87"/>
                 </a:solidFill>
@@ -4373,7 +4393,7 @@
               <a:t>Execution Overhead: </a:t>
             </a:r>
             <a:r>
-              <a:rPr b="0" i="0" sz="850">
+              <a:rPr sz="850" b="0" i="0">
                 <a:solidFill>
                   <a:srgbClr val="192330"/>
                 </a:solidFill>
@@ -4426,6 +4446,7 @@
           <a:lstStyle/>
           <a:p>
             <a:pPr algn="ctr"/>
+            <a:endParaRPr/>
           </a:p>
         </p:txBody>
       </p:sp>
@@ -4469,6 +4490,7 @@
           <a:lstStyle/>
           <a:p>
             <a:pPr algn="ctr"/>
+            <a:endParaRPr/>
           </a:p>
         </p:txBody>
       </p:sp>
@@ -4489,7 +4511,7 @@
           <a:noFill/>
         </p:spPr>
         <p:txBody>
-          <a:bodyPr wrap="square" tIns="0" bIns="0" lIns="0" rIns="0">
+          <a:bodyPr wrap="square" lIns="0" tIns="0" rIns="0" bIns="0">
             <a:spAutoFit/>
           </a:bodyPr>
           <a:lstStyle/>
@@ -4524,13 +4546,13 @@
           <a:noFill/>
         </p:spPr>
         <p:txBody>
-          <a:bodyPr wrap="square" tIns="0" bIns="0" lIns="0" rIns="0">
+          <a:bodyPr wrap="square" lIns="0" tIns="0" rIns="0" bIns="0">
             <a:spAutoFit/>
           </a:bodyPr>
           <a:lstStyle/>
           <a:p>
             <a:r>
-              <a:rPr b="1" i="0" sz="950">
+              <a:rPr sz="950" b="1" i="0">
                 <a:solidFill>
                   <a:srgbClr val="0A2540"/>
                 </a:solidFill>
@@ -4539,7 +4561,7 @@
               <a:t>• Deterministic Random State: </a:t>
             </a:r>
             <a:r>
-              <a:rPr b="0" i="0" sz="850">
+              <a:rPr sz="850" b="0" i="0">
                 <a:solidFill>
                   <a:srgbClr val="192330"/>
                 </a:solidFill>
@@ -4555,7 +4577,7 @@
               </a:spcBef>
             </a:pPr>
             <a:r>
-              <a:rPr b="1" i="0" sz="950">
+              <a:rPr sz="950" b="1" i="0">
                 <a:solidFill>
                   <a:srgbClr val="0A2540"/>
                 </a:solidFill>
@@ -4564,7 +4586,7 @@
               <a:t>• Initialization Protocol: </a:t>
             </a:r>
             <a:r>
-              <a:rPr b="0" i="0" sz="850">
+              <a:rPr sz="850" b="0" i="0">
                 <a:solidFill>
                   <a:srgbClr val="192330"/>
                 </a:solidFill>
@@ -4580,7 +4602,7 @@
               </a:spcBef>
             </a:pPr>
             <a:r>
-              <a:rPr b="1" i="0" sz="950">
+              <a:rPr sz="950" b="1" i="0">
                 <a:solidFill>
                   <a:srgbClr val="0A2540"/>
                 </a:solidFill>
@@ -4589,7 +4611,7 @@
               <a:t>• Systematic Benchmark Logging: </a:t>
             </a:r>
             <a:r>
-              <a:rPr b="0" i="0" sz="850">
+              <a:rPr sz="850" b="0" i="0">
                 <a:solidFill>
                   <a:srgbClr val="192330"/>
                 </a:solidFill>
@@ -4605,7 +4627,7 @@
               </a:spcBef>
             </a:pPr>
             <a:r>
-              <a:rPr b="1" i="0" sz="950">
+              <a:rPr sz="950" b="1" i="0">
                 <a:solidFill>
                   <a:srgbClr val="0A2540"/>
                 </a:solidFill>
@@ -4614,7 +4636,7 @@
               <a:t>• Git Version Control: </a:t>
             </a:r>
             <a:r>
-              <a:rPr b="0" i="0" sz="850">
+              <a:rPr sz="850" b="0" i="0">
                 <a:solidFill>
                   <a:srgbClr val="192330"/>
                 </a:solidFill>
@@ -4644,21 +4666,51 @@
                 <a:tableStyleId>{5C22544A-7EE6-4342-B048-85BDC9FD1C3A}</a:tableStyleId>
               </a:tblPr>
               <a:tblGrid>
-                <a:gridCol w="1463040"/>
-                <a:gridCol w="1645920"/>
-                <a:gridCol w="1371600"/>
-                <a:gridCol w="914400"/>
-                <a:gridCol w="1097280"/>
+                <a:gridCol w="1463040">
+                  <a:extLst>
+                    <a:ext uri="{9D8B030D-6E8A-4147-A177-3AD203B41FA5}">
+                      <a16:colId xmlns:a16="http://schemas.microsoft.com/office/drawing/2014/main" val="20000"/>
+                    </a:ext>
+                  </a:extLst>
+                </a:gridCol>
+                <a:gridCol w="1645920">
+                  <a:extLst>
+                    <a:ext uri="{9D8B030D-6E8A-4147-A177-3AD203B41FA5}">
+                      <a16:colId xmlns:a16="http://schemas.microsoft.com/office/drawing/2014/main" val="20001"/>
+                    </a:ext>
+                  </a:extLst>
+                </a:gridCol>
+                <a:gridCol w="1371600">
+                  <a:extLst>
+                    <a:ext uri="{9D8B030D-6E8A-4147-A177-3AD203B41FA5}">
+                      <a16:colId xmlns:a16="http://schemas.microsoft.com/office/drawing/2014/main" val="20002"/>
+                    </a:ext>
+                  </a:extLst>
+                </a:gridCol>
+                <a:gridCol w="914400">
+                  <a:extLst>
+                    <a:ext uri="{9D8B030D-6E8A-4147-A177-3AD203B41FA5}">
+                      <a16:colId xmlns:a16="http://schemas.microsoft.com/office/drawing/2014/main" val="20003"/>
+                    </a:ext>
+                  </a:extLst>
+                </a:gridCol>
+                <a:gridCol w="1097280">
+                  <a:extLst>
+                    <a:ext uri="{9D8B030D-6E8A-4147-A177-3AD203B41FA5}">
+                      <a16:colId xmlns:a16="http://schemas.microsoft.com/office/drawing/2014/main" val="20004"/>
+                    </a:ext>
+                  </a:extLst>
+                </a:gridCol>
               </a:tblGrid>
               <a:tr h="731520">
                 <a:tc>
                   <a:txBody>
-                    <a:bodyPr wrap="square" lIns="73152" rIns="73152" tIns="36576" bIns="36576"/>
+                    <a:bodyPr/>
                     <a:lstStyle/>
                     <a:p>
                       <a:pPr algn="l"/>
                       <a:r>
-                        <a:rPr b="1" i="0" sz="900">
+                        <a:rPr sz="900" b="1" i="0">
                           <a:solidFill>
                             <a:srgbClr val="FFFFFF"/>
                           </a:solidFill>
@@ -4676,12 +4728,12 @@
                 </a:tc>
                 <a:tc>
                   <a:txBody>
-                    <a:bodyPr wrap="square" lIns="73152" rIns="73152" tIns="36576" bIns="36576"/>
+                    <a:bodyPr/>
                     <a:lstStyle/>
                     <a:p>
                       <a:pPr algn="l"/>
                       <a:r>
-                        <a:rPr b="1" i="0" sz="900">
+                        <a:rPr sz="900" b="1" i="0">
                           <a:solidFill>
                             <a:srgbClr val="FFFFFF"/>
                           </a:solidFill>
@@ -4699,12 +4751,12 @@
                 </a:tc>
                 <a:tc>
                   <a:txBody>
-                    <a:bodyPr wrap="square" lIns="73152" rIns="73152" tIns="36576" bIns="36576"/>
+                    <a:bodyPr/>
                     <a:lstStyle/>
                     <a:p>
                       <a:pPr algn="l"/>
                       <a:r>
-                        <a:rPr b="1" i="0" sz="900">
+                        <a:rPr sz="900" b="1" i="0">
                           <a:solidFill>
                             <a:srgbClr val="FFFFFF"/>
                           </a:solidFill>
@@ -4722,12 +4774,12 @@
                 </a:tc>
                 <a:tc>
                   <a:txBody>
-                    <a:bodyPr wrap="square" lIns="73152" rIns="73152" tIns="36576" bIns="36576"/>
+                    <a:bodyPr/>
                     <a:lstStyle/>
                     <a:p>
                       <a:pPr algn="ctr"/>
                       <a:r>
-                        <a:rPr b="1" i="0" sz="900">
+                        <a:rPr sz="900" b="1" i="0">
                           <a:solidFill>
                             <a:srgbClr val="FFFFFF"/>
                           </a:solidFill>
@@ -4745,12 +4797,12 @@
                 </a:tc>
                 <a:tc>
                   <a:txBody>
-                    <a:bodyPr wrap="square" lIns="73152" rIns="73152" tIns="36576" bIns="36576"/>
+                    <a:bodyPr/>
                     <a:lstStyle/>
                     <a:p>
                       <a:pPr algn="ctr"/>
                       <a:r>
-                        <a:rPr b="1" i="0" sz="900">
+                        <a:rPr sz="900" b="1" i="0">
                           <a:solidFill>
                             <a:srgbClr val="FFFFFF"/>
                           </a:solidFill>
@@ -4766,16 +4818,21 @@
                     </a:solidFill>
                   </a:tcPr>
                 </a:tc>
+                <a:extLst>
+                  <a:ext uri="{0D108BD9-81ED-4DB2-BD59-A6C34878D82A}">
+                    <a16:rowId xmlns:a16="http://schemas.microsoft.com/office/drawing/2014/main" val="10000"/>
+                  </a:ext>
+                </a:extLst>
               </a:tr>
               <a:tr h="731520">
                 <a:tc>
                   <a:txBody>
-                    <a:bodyPr wrap="square" lIns="73152" rIns="73152" tIns="36576" bIns="36576"/>
+                    <a:bodyPr/>
                     <a:lstStyle/>
                     <a:p>
                       <a:pPr algn="l"/>
                       <a:r>
-                        <a:rPr b="1" i="0" sz="900">
+                        <a:rPr sz="900" b="1" i="0">
                           <a:solidFill>
                             <a:srgbClr val="0A2540"/>
                           </a:solidFill>
@@ -4793,12 +4850,12 @@
                 </a:tc>
                 <a:tc>
                   <a:txBody>
-                    <a:bodyPr wrap="square" lIns="73152" rIns="73152" tIns="36576" bIns="36576"/>
+                    <a:bodyPr/>
                     <a:lstStyle/>
                     <a:p>
                       <a:pPr algn="l"/>
                       <a:r>
-                        <a:rPr b="0" i="0" sz="850">
+                        <a:rPr sz="850" b="0" i="0">
                           <a:solidFill>
                             <a:srgbClr val="192330"/>
                           </a:solidFill>
@@ -4816,12 +4873,12 @@
                 </a:tc>
                 <a:tc>
                   <a:txBody>
-                    <a:bodyPr wrap="square" lIns="73152" rIns="73152" tIns="36576" bIns="36576"/>
+                    <a:bodyPr/>
                     <a:lstStyle/>
                     <a:p>
                       <a:pPr algn="l"/>
                       <a:r>
-                        <a:rPr b="0" i="0" sz="850">
+                        <a:rPr sz="850" b="0" i="0">
                           <a:solidFill>
                             <a:srgbClr val="00555F"/>
                           </a:solidFill>
@@ -4839,12 +4896,12 @@
                 </a:tc>
                 <a:tc>
                   <a:txBody>
-                    <a:bodyPr wrap="square" lIns="73152" rIns="73152" tIns="36576" bIns="36576"/>
+                    <a:bodyPr/>
                     <a:lstStyle/>
                     <a:p>
                       <a:pPr algn="ctr"/>
                       <a:r>
-                        <a:rPr b="1" i="0" sz="900">
+                        <a:rPr sz="900" b="1" i="0">
                           <a:solidFill>
                             <a:srgbClr val="0A2540"/>
                           </a:solidFill>
@@ -4862,12 +4919,12 @@
                 </a:tc>
                 <a:tc>
                   <a:txBody>
-                    <a:bodyPr wrap="square" lIns="73152" rIns="73152" tIns="36576" bIns="36576"/>
+                    <a:bodyPr/>
                     <a:lstStyle/>
                     <a:p>
                       <a:pPr algn="ctr"/>
                       <a:r>
-                        <a:rPr b="0" i="0" sz="850">
+                        <a:rPr sz="850" b="0" i="0">
                           <a:solidFill>
                             <a:srgbClr val="192330"/>
                           </a:solidFill>
@@ -4883,16 +4940,21 @@
                     </a:solidFill>
                   </a:tcPr>
                 </a:tc>
+                <a:extLst>
+                  <a:ext uri="{0D108BD9-81ED-4DB2-BD59-A6C34878D82A}">
+                    <a16:rowId xmlns:a16="http://schemas.microsoft.com/office/drawing/2014/main" val="10001"/>
+                  </a:ext>
+                </a:extLst>
               </a:tr>
               <a:tr h="731520">
                 <a:tc>
                   <a:txBody>
-                    <a:bodyPr wrap="square" lIns="73152" rIns="73152" tIns="36576" bIns="36576"/>
+                    <a:bodyPr/>
                     <a:lstStyle/>
                     <a:p>
                       <a:pPr algn="l"/>
                       <a:r>
-                        <a:rPr b="1" i="0" sz="900">
+                        <a:rPr sz="900" b="1" i="0">
                           <a:solidFill>
                             <a:srgbClr val="0A2540"/>
                           </a:solidFill>
@@ -4910,12 +4972,12 @@
                 </a:tc>
                 <a:tc>
                   <a:txBody>
-                    <a:bodyPr wrap="square" lIns="73152" rIns="73152" tIns="36576" bIns="36576"/>
+                    <a:bodyPr/>
                     <a:lstStyle/>
                     <a:p>
                       <a:pPr algn="l"/>
                       <a:r>
-                        <a:rPr b="0" i="0" sz="850">
+                        <a:rPr sz="850" b="0" i="0">
                           <a:solidFill>
                             <a:srgbClr val="192330"/>
                           </a:solidFill>
@@ -4934,12 +4996,12 @@
                 </a:tc>
                 <a:tc>
                   <a:txBody>
-                    <a:bodyPr wrap="square" lIns="73152" rIns="73152" tIns="36576" bIns="36576"/>
+                    <a:bodyPr/>
                     <a:lstStyle/>
                     <a:p>
                       <a:pPr algn="l"/>
                       <a:r>
-                        <a:rPr b="0" i="0" sz="850">
+                        <a:rPr sz="850" b="0" i="0">
                           <a:solidFill>
                             <a:srgbClr val="00555F"/>
                           </a:solidFill>
@@ -4958,12 +5020,12 @@
                 </a:tc>
                 <a:tc>
                   <a:txBody>
-                    <a:bodyPr wrap="square" lIns="73152" rIns="73152" tIns="36576" bIns="36576"/>
+                    <a:bodyPr/>
                     <a:lstStyle/>
                     <a:p>
                       <a:pPr algn="ctr"/>
                       <a:r>
-                        <a:rPr b="1" i="0" sz="900">
+                        <a:rPr sz="900" b="1" i="0">
                           <a:solidFill>
                             <a:srgbClr val="0A2540"/>
                           </a:solidFill>
@@ -4981,12 +5043,12 @@
                 </a:tc>
                 <a:tc>
                   <a:txBody>
-                    <a:bodyPr wrap="square" lIns="73152" rIns="73152" tIns="36576" bIns="36576"/>
+                    <a:bodyPr/>
                     <a:lstStyle/>
                     <a:p>
                       <a:pPr algn="ctr"/>
                       <a:r>
-                        <a:rPr b="0" i="0" sz="850">
+                        <a:rPr sz="850" b="0" i="0">
                           <a:solidFill>
                             <a:srgbClr val="192330"/>
                           </a:solidFill>
@@ -5002,16 +5064,21 @@
                     </a:solidFill>
                   </a:tcPr>
                 </a:tc>
+                <a:extLst>
+                  <a:ext uri="{0D108BD9-81ED-4DB2-BD59-A6C34878D82A}">
+                    <a16:rowId xmlns:a16="http://schemas.microsoft.com/office/drawing/2014/main" val="10002"/>
+                  </a:ext>
+                </a:extLst>
               </a:tr>
               <a:tr h="731520">
                 <a:tc>
                   <a:txBody>
-                    <a:bodyPr wrap="square" lIns="73152" rIns="73152" tIns="36576" bIns="36576"/>
+                    <a:bodyPr/>
                     <a:lstStyle/>
                     <a:p>
                       <a:pPr algn="l"/>
                       <a:r>
-                        <a:rPr b="1" i="0" sz="900">
+                        <a:rPr sz="900" b="1" i="0">
                           <a:solidFill>
                             <a:srgbClr val="0A2540"/>
                           </a:solidFill>
@@ -5029,12 +5096,12 @@
                 </a:tc>
                 <a:tc>
                   <a:txBody>
-                    <a:bodyPr wrap="square" lIns="73152" rIns="73152" tIns="36576" bIns="36576"/>
+                    <a:bodyPr/>
                     <a:lstStyle/>
                     <a:p>
                       <a:pPr algn="l"/>
                       <a:r>
-                        <a:rPr b="0" i="0" sz="850">
+                        <a:rPr sz="850" b="0" i="0">
                           <a:solidFill>
                             <a:srgbClr val="192330"/>
                           </a:solidFill>
@@ -5053,12 +5120,12 @@
                 </a:tc>
                 <a:tc>
                   <a:txBody>
-                    <a:bodyPr wrap="square" lIns="73152" rIns="73152" tIns="36576" bIns="36576"/>
+                    <a:bodyPr/>
                     <a:lstStyle/>
                     <a:p>
                       <a:pPr algn="l"/>
                       <a:r>
-                        <a:rPr b="0" i="0" sz="850">
+                        <a:rPr sz="850" b="0" i="0">
                           <a:solidFill>
                             <a:srgbClr val="00555F"/>
                           </a:solidFill>
@@ -5077,12 +5144,12 @@
                 </a:tc>
                 <a:tc>
                   <a:txBody>
-                    <a:bodyPr wrap="square" lIns="73152" rIns="73152" tIns="36576" bIns="36576"/>
+                    <a:bodyPr/>
                     <a:lstStyle/>
                     <a:p>
                       <a:pPr algn="ctr"/>
                       <a:r>
-                        <a:rPr b="1" i="0" sz="900">
+                        <a:rPr sz="900" b="1" i="0">
                           <a:solidFill>
                             <a:srgbClr val="0A2540"/>
                           </a:solidFill>
@@ -5100,12 +5167,12 @@
                 </a:tc>
                 <a:tc>
                   <a:txBody>
-                    <a:bodyPr wrap="square" lIns="73152" rIns="73152" tIns="36576" bIns="36576"/>
+                    <a:bodyPr/>
                     <a:lstStyle/>
                     <a:p>
                       <a:pPr algn="ctr"/>
                       <a:r>
-                        <a:rPr b="0" i="0" sz="850">
+                        <a:rPr sz="850" b="0" i="0">
                           <a:solidFill>
                             <a:srgbClr val="192330"/>
                           </a:solidFill>
@@ -5121,6 +5188,11 @@
                     </a:solidFill>
                   </a:tcPr>
                 </a:tc>
+                <a:extLst>
+                  <a:ext uri="{0D108BD9-81ED-4DB2-BD59-A6C34878D82A}">
+                    <a16:rowId xmlns:a16="http://schemas.microsoft.com/office/drawing/2014/main" val="10003"/>
+                  </a:ext>
+                </a:extLst>
               </a:tr>
             </a:tbl>
           </a:graphicData>
@@ -5168,6 +5240,7 @@
           <a:lstStyle/>
           <a:p>
             <a:pPr algn="ctr"/>
+            <a:endParaRPr/>
           </a:p>
         </p:txBody>
       </p:sp>
@@ -5211,6 +5284,7 @@
           <a:lstStyle/>
           <a:p>
             <a:pPr algn="ctr"/>
+            <a:endParaRPr/>
           </a:p>
         </p:txBody>
       </p:sp>
@@ -5231,7 +5305,7 @@
           <a:noFill/>
         </p:spPr>
         <p:txBody>
-          <a:bodyPr wrap="square" tIns="0" bIns="0" lIns="0" rIns="0">
+          <a:bodyPr wrap="square" lIns="0" tIns="0" rIns="0" bIns="0">
             <a:spAutoFit/>
           </a:bodyPr>
           <a:lstStyle/>
@@ -5266,13 +5340,13 @@
           <a:noFill/>
         </p:spPr>
         <p:txBody>
-          <a:bodyPr wrap="square" tIns="0" bIns="0" lIns="0" rIns="0">
+          <a:bodyPr wrap="square" lIns="0" tIns="0" rIns="0" bIns="0">
             <a:spAutoFit/>
           </a:bodyPr>
           <a:lstStyle/>
           <a:p>
             <a:r>
-              <a:rPr b="1" i="0" sz="950">
+              <a:rPr sz="950" b="1" i="0">
                 <a:solidFill>
                   <a:srgbClr val="0A2540"/>
                 </a:solidFill>
@@ -5281,7 +5355,7 @@
               <a:t>• 64 Total Experimental Configurations: </a:t>
             </a:r>
             <a:r>
-              <a:rPr b="0" i="0" sz="900">
+              <a:rPr sz="900" b="0" i="0">
                 <a:solidFill>
                   <a:srgbClr val="192330"/>
                 </a:solidFill>
@@ -5298,7 +5372,7 @@
               </a:spcBef>
             </a:pPr>
             <a:r>
-              <a:rPr b="1" i="0" sz="950">
+              <a:rPr sz="950" b="1" i="0">
                 <a:solidFill>
                   <a:srgbClr val="0A2540"/>
                 </a:solidFill>
@@ -5307,7 +5381,7 @@
               <a:t>• Computational Efficiency: </a:t>
             </a:r>
             <a:r>
-              <a:rPr b="0" i="0" sz="900">
+              <a:rPr sz="900" b="0" i="0">
                 <a:solidFill>
                   <a:srgbClr val="192330"/>
                 </a:solidFill>
@@ -5324,7 +5398,7 @@
               </a:spcBef>
             </a:pPr>
             <a:r>
-              <a:rPr b="1" i="0" sz="950">
+              <a:rPr sz="950" b="1" i="0">
                 <a:solidFill>
                   <a:srgbClr val="0A2540"/>
                 </a:solidFill>
@@ -5333,7 +5407,7 @@
               <a:t>• Metric Logging: </a:t>
             </a:r>
             <a:r>
-              <a:rPr b="0" i="0" sz="900">
+              <a:rPr sz="900" b="0" i="0">
                 <a:solidFill>
                   <a:srgbClr val="192330"/>
                 </a:solidFill>
@@ -5353,7 +5427,7 @@
 </file>
 
 <file path=ppt/slides/slide11.xml><?xml version="1.0" encoding="utf-8"?>
-<p:sld xmlns:a="http://schemas.openxmlformats.org/drawingml/2006/main" xmlns:p="http://schemas.openxmlformats.org/presentationml/2006/main" xmlns:r="http://schemas.openxmlformats.org/officeDocument/2006/relationships">
+<p:sld xmlns:a="http://schemas.openxmlformats.org/drawingml/2006/main" xmlns:r="http://schemas.openxmlformats.org/officeDocument/2006/relationships" xmlns:p="http://schemas.openxmlformats.org/presentationml/2006/main">
   <p:cSld>
     <p:spTree>
       <p:nvGrpSpPr>
@@ -5361,7 +5435,14 @@
         <p:cNvGrpSpPr/>
         <p:nvPr/>
       </p:nvGrpSpPr>
-      <p:grpSpPr/>
+      <p:grpSpPr>
+        <a:xfrm>
+          <a:off x="0" y="0"/>
+          <a:ext cx="0" cy="0"/>
+          <a:chOff x="0" y="0"/>
+          <a:chExt cx="0" cy="0"/>
+        </a:xfrm>
+      </p:grpSpPr>
       <p:sp>
         <p:nvSpPr>
           <p:cNvPr id="2" name="Rectangle 1"/>
@@ -5402,6 +5483,7 @@
           <a:lstStyle/>
           <a:p>
             <a:pPr algn="ctr"/>
+            <a:endParaRPr/>
           </a:p>
         </p:txBody>
       </p:sp>
@@ -5445,6 +5527,7 @@
           <a:lstStyle/>
           <a:p>
             <a:pPr algn="ctr"/>
+            <a:endParaRPr/>
           </a:p>
         </p:txBody>
       </p:sp>
@@ -5488,6 +5571,7 @@
           <a:lstStyle/>
           <a:p>
             <a:pPr algn="ctr"/>
+            <a:endParaRPr/>
           </a:p>
         </p:txBody>
       </p:sp>
@@ -5508,7 +5592,7 @@
           <a:noFill/>
         </p:spPr>
         <p:txBody>
-          <a:bodyPr wrap="square" tIns="0" bIns="0" lIns="0" rIns="0">
+          <a:bodyPr wrap="square" lIns="0" tIns="0" rIns="0" bIns="0">
             <a:spAutoFit/>
           </a:bodyPr>
           <a:lstStyle/>
@@ -5590,20 +5674,20 @@
           <a:noFill/>
         </p:spPr>
         <p:txBody>
-          <a:bodyPr wrap="none" tIns="0" bIns="0" lIns="0" rIns="0">
+          <a:bodyPr wrap="none" lIns="0" tIns="0" rIns="0" bIns="0">
             <a:spAutoFit/>
           </a:bodyPr>
           <a:lstStyle/>
           <a:p>
             <a:pPr>
-              <a:defRPr sz="850">
-                <a:solidFill>
-                  <a:srgbClr val="5A6978"/>
+              <a:defRPr sz="750">
+                <a:solidFill>
+                  <a:srgbClr val="8090A0"/>
                 </a:solidFill>
               </a:defRPr>
             </a:pPr>
             <a:r>
-              <a:t>CA3 Machine Learning Mini-Project  |  Healthcare Facility Analytics  |  Candidate: Aditya09977  |  Submission: Oct 2026</a:t>
+              <a:t>CA3 Machine Learning Mini-Project  |  Healthcare Facility Analytics  |  Yesh Raheja (23070521174) &amp; Aditya Gurve (23070521231)  |  Oct 2026</a:t>
             </a:r>
           </a:p>
         </p:txBody>
@@ -5674,6 +5758,7 @@
           <a:lstStyle/>
           <a:p>
             <a:pPr algn="ctr"/>
+            <a:endParaRPr/>
           </a:p>
         </p:txBody>
       </p:sp>
@@ -5717,6 +5802,7 @@
           <a:lstStyle/>
           <a:p>
             <a:pPr algn="ctr"/>
+            <a:endParaRPr/>
           </a:p>
         </p:txBody>
       </p:sp>
@@ -5737,7 +5823,7 @@
           <a:noFill/>
         </p:spPr>
         <p:txBody>
-          <a:bodyPr wrap="square" tIns="0" bIns="0" lIns="0" rIns="0">
+          <a:bodyPr wrap="square" lIns="0" tIns="0" rIns="0" bIns="0">
             <a:spAutoFit/>
           </a:bodyPr>
           <a:lstStyle/>
@@ -5772,13 +5858,13 @@
           <a:noFill/>
         </p:spPr>
         <p:txBody>
-          <a:bodyPr wrap="square" tIns="0" bIns="0" lIns="0" rIns="0">
+          <a:bodyPr wrap="square" lIns="0" tIns="0" rIns="0" bIns="0">
             <a:spAutoFit/>
           </a:bodyPr>
           <a:lstStyle/>
           <a:p>
             <a:r>
-              <a:rPr b="1" i="0" sz="950">
+              <a:rPr sz="950" b="1" i="0">
                 <a:solidFill>
                   <a:srgbClr val="00555F"/>
                 </a:solidFill>
@@ -5787,7 +5873,7 @@
               <a:t>• Inertia Inflection at k=4: </a:t>
             </a:r>
             <a:r>
-              <a:rPr b="0" i="0" sz="900">
+              <a:rPr sz="900" b="0" i="0">
                 <a:solidFill>
                   <a:srgbClr val="192330"/>
                 </a:solidFill>
@@ -5804,7 +5890,7 @@
               </a:spcBef>
             </a:pPr>
             <a:r>
-              <a:rPr b="1" i="0" sz="950">
+              <a:rPr sz="950" b="1" i="0">
                 <a:solidFill>
                   <a:srgbClr val="00555F"/>
                 </a:solidFill>
@@ -5813,7 +5899,7 @@
               <a:t>• Davies-Bouldin &amp; Calinski-Harabasz: </a:t>
             </a:r>
             <a:r>
-              <a:rPr b="0" i="0" sz="900">
+              <a:rPr sz="900" b="0" i="0">
                 <a:solidFill>
                   <a:srgbClr val="192330"/>
                 </a:solidFill>
@@ -5843,22 +5929,58 @@
                 <a:tableStyleId>{5C22544A-7EE6-4342-B048-85BDC9FD1C3A}</a:tableStyleId>
               </a:tblPr>
               <a:tblGrid>
-                <a:gridCol w="1737360"/>
-                <a:gridCol w="777240"/>
-                <a:gridCol w="731520"/>
-                <a:gridCol w="731520"/>
-                <a:gridCol w="685800"/>
-                <a:gridCol w="822960"/>
+                <a:gridCol w="1737360">
+                  <a:extLst>
+                    <a:ext uri="{9D8B030D-6E8A-4147-A177-3AD203B41FA5}">
+                      <a16:colId xmlns:a16="http://schemas.microsoft.com/office/drawing/2014/main" val="20000"/>
+                    </a:ext>
+                  </a:extLst>
+                </a:gridCol>
+                <a:gridCol w="777240">
+                  <a:extLst>
+                    <a:ext uri="{9D8B030D-6E8A-4147-A177-3AD203B41FA5}">
+                      <a16:colId xmlns:a16="http://schemas.microsoft.com/office/drawing/2014/main" val="20001"/>
+                    </a:ext>
+                  </a:extLst>
+                </a:gridCol>
+                <a:gridCol w="731520">
+                  <a:extLst>
+                    <a:ext uri="{9D8B030D-6E8A-4147-A177-3AD203B41FA5}">
+                      <a16:colId xmlns:a16="http://schemas.microsoft.com/office/drawing/2014/main" val="20002"/>
+                    </a:ext>
+                  </a:extLst>
+                </a:gridCol>
+                <a:gridCol w="731520">
+                  <a:extLst>
+                    <a:ext uri="{9D8B030D-6E8A-4147-A177-3AD203B41FA5}">
+                      <a16:colId xmlns:a16="http://schemas.microsoft.com/office/drawing/2014/main" val="20003"/>
+                    </a:ext>
+                  </a:extLst>
+                </a:gridCol>
+                <a:gridCol w="685800">
+                  <a:extLst>
+                    <a:ext uri="{9D8B030D-6E8A-4147-A177-3AD203B41FA5}">
+                      <a16:colId xmlns:a16="http://schemas.microsoft.com/office/drawing/2014/main" val="20004"/>
+                    </a:ext>
+                  </a:extLst>
+                </a:gridCol>
+                <a:gridCol w="822960">
+                  <a:extLst>
+                    <a:ext uri="{9D8B030D-6E8A-4147-A177-3AD203B41FA5}">
+                      <a16:colId xmlns:a16="http://schemas.microsoft.com/office/drawing/2014/main" val="20005"/>
+                    </a:ext>
+                  </a:extLst>
+                </a:gridCol>
               </a:tblGrid>
               <a:tr h="352044">
                 <a:tc>
                   <a:txBody>
-                    <a:bodyPr wrap="square" lIns="73152" rIns="73152" tIns="36576" bIns="36576"/>
+                    <a:bodyPr/>
                     <a:lstStyle/>
                     <a:p>
                       <a:pPr algn="l"/>
                       <a:r>
-                        <a:rPr b="1" i="0" sz="850">
+                        <a:rPr sz="850" b="1" i="0">
                           <a:solidFill>
                             <a:srgbClr val="FFFFFF"/>
                           </a:solidFill>
@@ -5876,12 +5998,12 @@
                 </a:tc>
                 <a:tc>
                   <a:txBody>
-                    <a:bodyPr wrap="square" lIns="73152" rIns="73152" tIns="36576" bIns="36576"/>
+                    <a:bodyPr/>
                     <a:lstStyle/>
                     <a:p>
                       <a:pPr algn="ctr"/>
                       <a:r>
-                        <a:rPr b="1" i="0" sz="850">
+                        <a:rPr sz="850" b="1" i="0">
                           <a:solidFill>
                             <a:srgbClr val="FFFFFF"/>
                           </a:solidFill>
@@ -5899,12 +6021,12 @@
                 </a:tc>
                 <a:tc>
                   <a:txBody>
-                    <a:bodyPr wrap="square" lIns="73152" rIns="73152" tIns="36576" bIns="36576"/>
+                    <a:bodyPr/>
                     <a:lstStyle/>
                     <a:p>
                       <a:pPr algn="ctr"/>
                       <a:r>
-                        <a:rPr b="1" i="0" sz="850">
+                        <a:rPr sz="850" b="1" i="0">
                           <a:solidFill>
                             <a:srgbClr val="FFFFFF"/>
                           </a:solidFill>
@@ -5922,12 +6044,12 @@
                 </a:tc>
                 <a:tc>
                   <a:txBody>
-                    <a:bodyPr wrap="square" lIns="73152" rIns="73152" tIns="36576" bIns="36576"/>
+                    <a:bodyPr/>
                     <a:lstStyle/>
                     <a:p>
                       <a:pPr algn="ctr"/>
                       <a:r>
-                        <a:rPr b="1" i="0" sz="850">
+                        <a:rPr sz="850" b="1" i="0">
                           <a:solidFill>
                             <a:srgbClr val="FFFFFF"/>
                           </a:solidFill>
@@ -5945,12 +6067,12 @@
                 </a:tc>
                 <a:tc>
                   <a:txBody>
-                    <a:bodyPr wrap="square" lIns="73152" rIns="73152" tIns="36576" bIns="36576"/>
+                    <a:bodyPr/>
                     <a:lstStyle/>
                     <a:p>
                       <a:pPr algn="ctr"/>
                       <a:r>
-                        <a:rPr b="1" i="0" sz="850">
+                        <a:rPr sz="850" b="1" i="0">
                           <a:solidFill>
                             <a:srgbClr val="FFFFFF"/>
                           </a:solidFill>
@@ -5968,12 +6090,12 @@
                 </a:tc>
                 <a:tc>
                   <a:txBody>
-                    <a:bodyPr wrap="square" lIns="73152" rIns="73152" tIns="36576" bIns="36576"/>
+                    <a:bodyPr/>
                     <a:lstStyle/>
                     <a:p>
                       <a:pPr algn="ctr"/>
                       <a:r>
-                        <a:rPr b="1" i="0" sz="850">
+                        <a:rPr sz="850" b="1" i="0">
                           <a:solidFill>
                             <a:srgbClr val="FFFFFF"/>
                           </a:solidFill>
@@ -5989,16 +6111,21 @@
                     </a:solidFill>
                   </a:tcPr>
                 </a:tc>
+                <a:extLst>
+                  <a:ext uri="{0D108BD9-81ED-4DB2-BD59-A6C34878D82A}">
+                    <a16:rowId xmlns:a16="http://schemas.microsoft.com/office/drawing/2014/main" val="10000"/>
+                  </a:ext>
+                </a:extLst>
               </a:tr>
               <a:tr h="352044">
                 <a:tc>
                   <a:txBody>
-                    <a:bodyPr wrap="square" lIns="73152" rIns="73152" tIns="36576" bIns="36576"/>
+                    <a:bodyPr/>
                     <a:lstStyle/>
                     <a:p>
                       <a:pPr algn="l"/>
                       <a:r>
-                        <a:rPr b="0" i="0" sz="850">
+                        <a:rPr sz="850" b="0" i="0">
                           <a:solidFill>
                             <a:srgbClr val="0A2540"/>
                           </a:solidFill>
@@ -6016,12 +6143,12 @@
                 </a:tc>
                 <a:tc>
                   <a:txBody>
-                    <a:bodyPr wrap="square" lIns="73152" rIns="73152" tIns="36576" bIns="36576"/>
+                    <a:bodyPr/>
                     <a:lstStyle/>
                     <a:p>
                       <a:pPr algn="ctr"/>
                       <a:r>
-                        <a:rPr b="0" i="0" sz="850">
+                        <a:rPr sz="850" b="0" i="0">
                           <a:solidFill>
                             <a:srgbClr val="192330"/>
                           </a:solidFill>
@@ -6039,12 +6166,12 @@
                 </a:tc>
                 <a:tc>
                   <a:txBody>
-                    <a:bodyPr wrap="square" lIns="73152" rIns="73152" tIns="36576" bIns="36576"/>
+                    <a:bodyPr/>
                     <a:lstStyle/>
                     <a:p>
                       <a:pPr algn="ctr"/>
                       <a:r>
-                        <a:rPr b="0" i="0" sz="850">
+                        <a:rPr sz="850" b="0" i="0">
                           <a:solidFill>
                             <a:srgbClr val="192330"/>
                           </a:solidFill>
@@ -6062,12 +6189,12 @@
                 </a:tc>
                 <a:tc>
                   <a:txBody>
-                    <a:bodyPr wrap="square" lIns="73152" rIns="73152" tIns="36576" bIns="36576"/>
+                    <a:bodyPr/>
                     <a:lstStyle/>
                     <a:p>
                       <a:pPr algn="ctr"/>
                       <a:r>
-                        <a:rPr b="0" i="0" sz="850">
+                        <a:rPr sz="850" b="0" i="0">
                           <a:solidFill>
                             <a:srgbClr val="192330"/>
                           </a:solidFill>
@@ -6085,12 +6212,12 @@
                 </a:tc>
                 <a:tc>
                   <a:txBody>
-                    <a:bodyPr wrap="square" lIns="73152" rIns="73152" tIns="36576" bIns="36576"/>
+                    <a:bodyPr/>
                     <a:lstStyle/>
                     <a:p>
                       <a:pPr algn="ctr"/>
                       <a:r>
-                        <a:rPr b="0" i="0" sz="850">
+                        <a:rPr sz="850" b="0" i="0">
                           <a:solidFill>
                             <a:srgbClr val="192330"/>
                           </a:solidFill>
@@ -6108,12 +6235,12 @@
                 </a:tc>
                 <a:tc>
                   <a:txBody>
-                    <a:bodyPr wrap="square" lIns="73152" rIns="73152" tIns="36576" bIns="36576"/>
+                    <a:bodyPr/>
                     <a:lstStyle/>
                     <a:p>
                       <a:pPr algn="ctr"/>
                       <a:r>
-                        <a:rPr b="1" i="0" sz="800">
+                        <a:rPr sz="800" b="1" i="0">
                           <a:solidFill>
                             <a:srgbClr val="5A6978"/>
                           </a:solidFill>
@@ -6129,16 +6256,21 @@
                     </a:solidFill>
                   </a:tcPr>
                 </a:tc>
+                <a:extLst>
+                  <a:ext uri="{0D108BD9-81ED-4DB2-BD59-A6C34878D82A}">
+                    <a16:rowId xmlns:a16="http://schemas.microsoft.com/office/drawing/2014/main" val="10001"/>
+                  </a:ext>
+                </a:extLst>
               </a:tr>
               <a:tr h="352044">
                 <a:tc>
                   <a:txBody>
-                    <a:bodyPr wrap="square" lIns="73152" rIns="73152" tIns="36576" bIns="36576"/>
+                    <a:bodyPr/>
                     <a:lstStyle/>
                     <a:p>
                       <a:pPr algn="l"/>
                       <a:r>
-                        <a:rPr b="0" i="0" sz="850">
+                        <a:rPr sz="850" b="0" i="0">
                           <a:solidFill>
                             <a:srgbClr val="0A2540"/>
                           </a:solidFill>
@@ -6156,12 +6288,12 @@
                 </a:tc>
                 <a:tc>
                   <a:txBody>
-                    <a:bodyPr wrap="square" lIns="73152" rIns="73152" tIns="36576" bIns="36576"/>
+                    <a:bodyPr/>
                     <a:lstStyle/>
                     <a:p>
                       <a:pPr algn="ctr"/>
                       <a:r>
-                        <a:rPr b="0" i="0" sz="850">
+                        <a:rPr sz="850" b="0" i="0">
                           <a:solidFill>
                             <a:srgbClr val="192330"/>
                           </a:solidFill>
@@ -6179,12 +6311,12 @@
                 </a:tc>
                 <a:tc>
                   <a:txBody>
-                    <a:bodyPr wrap="square" lIns="73152" rIns="73152" tIns="36576" bIns="36576"/>
+                    <a:bodyPr/>
                     <a:lstStyle/>
                     <a:p>
                       <a:pPr algn="ctr"/>
                       <a:r>
-                        <a:rPr b="0" i="0" sz="850">
+                        <a:rPr sz="850" b="0" i="0">
                           <a:solidFill>
                             <a:srgbClr val="192330"/>
                           </a:solidFill>
@@ -6202,12 +6334,12 @@
                 </a:tc>
                 <a:tc>
                   <a:txBody>
-                    <a:bodyPr wrap="square" lIns="73152" rIns="73152" tIns="36576" bIns="36576"/>
+                    <a:bodyPr/>
                     <a:lstStyle/>
                     <a:p>
                       <a:pPr algn="ctr"/>
                       <a:r>
-                        <a:rPr b="0" i="0" sz="850">
+                        <a:rPr sz="850" b="0" i="0">
                           <a:solidFill>
                             <a:srgbClr val="192330"/>
                           </a:solidFill>
@@ -6225,12 +6357,12 @@
                 </a:tc>
                 <a:tc>
                   <a:txBody>
-                    <a:bodyPr wrap="square" lIns="73152" rIns="73152" tIns="36576" bIns="36576"/>
+                    <a:bodyPr/>
                     <a:lstStyle/>
                     <a:p>
                       <a:pPr algn="ctr"/>
                       <a:r>
-                        <a:rPr b="0" i="0" sz="850">
+                        <a:rPr sz="850" b="0" i="0">
                           <a:solidFill>
                             <a:srgbClr val="192330"/>
                           </a:solidFill>
@@ -6248,12 +6380,12 @@
                 </a:tc>
                 <a:tc>
                   <a:txBody>
-                    <a:bodyPr wrap="square" lIns="73152" rIns="73152" tIns="36576" bIns="36576"/>
+                    <a:bodyPr/>
                     <a:lstStyle/>
                     <a:p>
                       <a:pPr algn="ctr"/>
                       <a:r>
-                        <a:rPr b="1" i="0" sz="800">
+                        <a:rPr sz="800" b="1" i="0">
                           <a:solidFill>
                             <a:srgbClr val="5A6978"/>
                           </a:solidFill>
@@ -6269,16 +6401,21 @@
                     </a:solidFill>
                   </a:tcPr>
                 </a:tc>
+                <a:extLst>
+                  <a:ext uri="{0D108BD9-81ED-4DB2-BD59-A6C34878D82A}">
+                    <a16:rowId xmlns:a16="http://schemas.microsoft.com/office/drawing/2014/main" val="10002"/>
+                  </a:ext>
+                </a:extLst>
               </a:tr>
               <a:tr h="352044">
                 <a:tc>
                   <a:txBody>
-                    <a:bodyPr wrap="square" lIns="73152" rIns="73152" tIns="36576" bIns="36576"/>
+                    <a:bodyPr/>
                     <a:lstStyle/>
                     <a:p>
                       <a:pPr algn="l"/>
                       <a:r>
-                        <a:rPr b="1" i="0" sz="850">
+                        <a:rPr sz="850" b="1" i="0">
                           <a:solidFill>
                             <a:srgbClr val="00555F"/>
                           </a:solidFill>
@@ -6296,12 +6433,12 @@
                 </a:tc>
                 <a:tc>
                   <a:txBody>
-                    <a:bodyPr wrap="square" lIns="73152" rIns="73152" tIns="36576" bIns="36576"/>
+                    <a:bodyPr/>
                     <a:lstStyle/>
                     <a:p>
                       <a:pPr algn="ctr"/>
                       <a:r>
-                        <a:rPr b="1" i="0" sz="850">
+                        <a:rPr sz="850" b="1" i="0">
                           <a:solidFill>
                             <a:srgbClr val="192330"/>
                           </a:solidFill>
@@ -6319,12 +6456,12 @@
                 </a:tc>
                 <a:tc>
                   <a:txBody>
-                    <a:bodyPr wrap="square" lIns="73152" rIns="73152" tIns="36576" bIns="36576"/>
+                    <a:bodyPr/>
                     <a:lstStyle/>
                     <a:p>
                       <a:pPr algn="ctr"/>
                       <a:r>
-                        <a:rPr b="1" i="0" sz="850">
+                        <a:rPr sz="850" b="1" i="0">
                           <a:solidFill>
                             <a:srgbClr val="192330"/>
                           </a:solidFill>
@@ -6342,12 +6479,12 @@
                 </a:tc>
                 <a:tc>
                   <a:txBody>
-                    <a:bodyPr wrap="square" lIns="73152" rIns="73152" tIns="36576" bIns="36576"/>
+                    <a:bodyPr/>
                     <a:lstStyle/>
                     <a:p>
                       <a:pPr algn="ctr"/>
                       <a:r>
-                        <a:rPr b="1" i="0" sz="850">
+                        <a:rPr sz="850" b="1" i="0">
                           <a:solidFill>
                             <a:srgbClr val="192330"/>
                           </a:solidFill>
@@ -6365,12 +6502,12 @@
                 </a:tc>
                 <a:tc>
                   <a:txBody>
-                    <a:bodyPr wrap="square" lIns="73152" rIns="73152" tIns="36576" bIns="36576"/>
+                    <a:bodyPr/>
                     <a:lstStyle/>
                     <a:p>
                       <a:pPr algn="ctr"/>
                       <a:r>
-                        <a:rPr b="1" i="0" sz="850">
+                        <a:rPr sz="850" b="1" i="0">
                           <a:solidFill>
                             <a:srgbClr val="192330"/>
                           </a:solidFill>
@@ -6388,12 +6525,12 @@
                 </a:tc>
                 <a:tc>
                   <a:txBody>
-                    <a:bodyPr wrap="square" lIns="73152" rIns="73152" tIns="36576" bIns="36576"/>
+                    <a:bodyPr/>
                     <a:lstStyle/>
                     <a:p>
                       <a:pPr algn="ctr"/>
                       <a:r>
-                        <a:rPr b="1" i="0" sz="800">
+                        <a:rPr sz="800" b="1" i="0">
                           <a:solidFill>
                             <a:srgbClr val="14733C"/>
                           </a:solidFill>
@@ -6409,16 +6546,21 @@
                     </a:solidFill>
                   </a:tcPr>
                 </a:tc>
+                <a:extLst>
+                  <a:ext uri="{0D108BD9-81ED-4DB2-BD59-A6C34878D82A}">
+                    <a16:rowId xmlns:a16="http://schemas.microsoft.com/office/drawing/2014/main" val="10003"/>
+                  </a:ext>
+                </a:extLst>
               </a:tr>
               <a:tr h="352044">
                 <a:tc>
                   <a:txBody>
-                    <a:bodyPr wrap="square" lIns="73152" rIns="73152" tIns="36576" bIns="36576"/>
+                    <a:bodyPr/>
                     <a:lstStyle/>
                     <a:p>
                       <a:pPr algn="l"/>
                       <a:r>
-                        <a:rPr b="0" i="0" sz="850">
+                        <a:rPr sz="850" b="0" i="0">
                           <a:solidFill>
                             <a:srgbClr val="0A2540"/>
                           </a:solidFill>
@@ -6436,12 +6578,12 @@
                 </a:tc>
                 <a:tc>
                   <a:txBody>
-                    <a:bodyPr wrap="square" lIns="73152" rIns="73152" tIns="36576" bIns="36576"/>
+                    <a:bodyPr/>
                     <a:lstStyle/>
                     <a:p>
                       <a:pPr algn="ctr"/>
                       <a:r>
-                        <a:rPr b="0" i="0" sz="850">
+                        <a:rPr sz="850" b="0" i="0">
                           <a:solidFill>
                             <a:srgbClr val="192330"/>
                           </a:solidFill>
@@ -6459,12 +6601,12 @@
                 </a:tc>
                 <a:tc>
                   <a:txBody>
-                    <a:bodyPr wrap="square" lIns="73152" rIns="73152" tIns="36576" bIns="36576"/>
+                    <a:bodyPr/>
                     <a:lstStyle/>
                     <a:p>
                       <a:pPr algn="ctr"/>
                       <a:r>
-                        <a:rPr b="0" i="0" sz="850">
+                        <a:rPr sz="850" b="0" i="0">
                           <a:solidFill>
                             <a:srgbClr val="192330"/>
                           </a:solidFill>
@@ -6482,12 +6624,12 @@
                 </a:tc>
                 <a:tc>
                   <a:txBody>
-                    <a:bodyPr wrap="square" lIns="73152" rIns="73152" tIns="36576" bIns="36576"/>
+                    <a:bodyPr/>
                     <a:lstStyle/>
                     <a:p>
                       <a:pPr algn="ctr"/>
                       <a:r>
-                        <a:rPr b="0" i="0" sz="850">
+                        <a:rPr sz="850" b="0" i="0">
                           <a:solidFill>
                             <a:srgbClr val="192330"/>
                           </a:solidFill>
@@ -6505,12 +6647,12 @@
                 </a:tc>
                 <a:tc>
                   <a:txBody>
-                    <a:bodyPr wrap="square" lIns="73152" rIns="73152" tIns="36576" bIns="36576"/>
+                    <a:bodyPr/>
                     <a:lstStyle/>
                     <a:p>
                       <a:pPr algn="ctr"/>
                       <a:r>
-                        <a:rPr b="0" i="0" sz="850">
+                        <a:rPr sz="850" b="0" i="0">
                           <a:solidFill>
                             <a:srgbClr val="192330"/>
                           </a:solidFill>
@@ -6528,12 +6670,12 @@
                 </a:tc>
                 <a:tc>
                   <a:txBody>
-                    <a:bodyPr wrap="square" lIns="73152" rIns="73152" tIns="36576" bIns="36576"/>
+                    <a:bodyPr/>
                     <a:lstStyle/>
                     <a:p>
                       <a:pPr algn="ctr"/>
                       <a:r>
-                        <a:rPr b="1" i="0" sz="800">
+                        <a:rPr sz="800" b="1" i="0">
                           <a:solidFill>
                             <a:srgbClr val="5A6978"/>
                           </a:solidFill>
@@ -6549,16 +6691,21 @@
                     </a:solidFill>
                   </a:tcPr>
                 </a:tc>
+                <a:extLst>
+                  <a:ext uri="{0D108BD9-81ED-4DB2-BD59-A6C34878D82A}">
+                    <a16:rowId xmlns:a16="http://schemas.microsoft.com/office/drawing/2014/main" val="10004"/>
+                  </a:ext>
+                </a:extLst>
               </a:tr>
               <a:tr h="352044">
                 <a:tc>
                   <a:txBody>
-                    <a:bodyPr wrap="square" lIns="73152" rIns="73152" tIns="36576" bIns="36576"/>
+                    <a:bodyPr/>
                     <a:lstStyle/>
                     <a:p>
                       <a:pPr algn="l"/>
                       <a:r>
-                        <a:rPr b="0" i="0" sz="850">
+                        <a:rPr sz="850" b="0" i="0">
                           <a:solidFill>
                             <a:srgbClr val="0A2540"/>
                           </a:solidFill>
@@ -6576,12 +6723,12 @@
                 </a:tc>
                 <a:tc>
                   <a:txBody>
-                    <a:bodyPr wrap="square" lIns="73152" rIns="73152" tIns="36576" bIns="36576"/>
+                    <a:bodyPr/>
                     <a:lstStyle/>
                     <a:p>
                       <a:pPr algn="ctr"/>
                       <a:r>
-                        <a:rPr b="0" i="0" sz="850">
+                        <a:rPr sz="850" b="0" i="0">
                           <a:solidFill>
                             <a:srgbClr val="192330"/>
                           </a:solidFill>
@@ -6599,12 +6746,12 @@
                 </a:tc>
                 <a:tc>
                   <a:txBody>
-                    <a:bodyPr wrap="square" lIns="73152" rIns="73152" tIns="36576" bIns="36576"/>
+                    <a:bodyPr/>
                     <a:lstStyle/>
                     <a:p>
                       <a:pPr algn="ctr"/>
                       <a:r>
-                        <a:rPr b="0" i="0" sz="850">
+                        <a:rPr sz="850" b="0" i="0">
                           <a:solidFill>
                             <a:srgbClr val="192330"/>
                           </a:solidFill>
@@ -6622,12 +6769,12 @@
                 </a:tc>
                 <a:tc>
                   <a:txBody>
-                    <a:bodyPr wrap="square" lIns="73152" rIns="73152" tIns="36576" bIns="36576"/>
+                    <a:bodyPr/>
                     <a:lstStyle/>
                     <a:p>
                       <a:pPr algn="ctr"/>
                       <a:r>
-                        <a:rPr b="0" i="0" sz="850">
+                        <a:rPr sz="850" b="0" i="0">
                           <a:solidFill>
                             <a:srgbClr val="192330"/>
                           </a:solidFill>
@@ -6645,12 +6792,12 @@
                 </a:tc>
                 <a:tc>
                   <a:txBody>
-                    <a:bodyPr wrap="square" lIns="73152" rIns="73152" tIns="36576" bIns="36576"/>
+                    <a:bodyPr/>
                     <a:lstStyle/>
                     <a:p>
                       <a:pPr algn="ctr"/>
                       <a:r>
-                        <a:rPr b="0" i="0" sz="850">
+                        <a:rPr sz="850" b="0" i="0">
                           <a:solidFill>
                             <a:srgbClr val="192330"/>
                           </a:solidFill>
@@ -6668,12 +6815,12 @@
                 </a:tc>
                 <a:tc>
                   <a:txBody>
-                    <a:bodyPr wrap="square" lIns="73152" rIns="73152" tIns="36576" bIns="36576"/>
+                    <a:bodyPr/>
                     <a:lstStyle/>
                     <a:p>
                       <a:pPr algn="ctr"/>
                       <a:r>
-                        <a:rPr b="1" i="0" sz="800">
+                        <a:rPr sz="800" b="1" i="0">
                           <a:solidFill>
                             <a:srgbClr val="5A6978"/>
                           </a:solidFill>
@@ -6689,16 +6836,21 @@
                     </a:solidFill>
                   </a:tcPr>
                 </a:tc>
+                <a:extLst>
+                  <a:ext uri="{0D108BD9-81ED-4DB2-BD59-A6C34878D82A}">
+                    <a16:rowId xmlns:a16="http://schemas.microsoft.com/office/drawing/2014/main" val="10005"/>
+                  </a:ext>
+                </a:extLst>
               </a:tr>
               <a:tr h="352044">
                 <a:tc>
                   <a:txBody>
-                    <a:bodyPr wrap="square" lIns="73152" rIns="73152" tIns="36576" bIns="36576"/>
+                    <a:bodyPr/>
                     <a:lstStyle/>
                     <a:p>
                       <a:pPr algn="l"/>
                       <a:r>
-                        <a:rPr b="0" i="0" sz="850">
+                        <a:rPr sz="850" b="0" i="0">
                           <a:solidFill>
                             <a:srgbClr val="0A2540"/>
                           </a:solidFill>
@@ -6716,12 +6868,12 @@
                 </a:tc>
                 <a:tc>
                   <a:txBody>
-                    <a:bodyPr wrap="square" lIns="73152" rIns="73152" tIns="36576" bIns="36576"/>
+                    <a:bodyPr/>
                     <a:lstStyle/>
                     <a:p>
                       <a:pPr algn="ctr"/>
                       <a:r>
-                        <a:rPr b="0" i="0" sz="850">
+                        <a:rPr sz="850" b="0" i="0">
                           <a:solidFill>
                             <a:srgbClr val="192330"/>
                           </a:solidFill>
@@ -6739,12 +6891,12 @@
                 </a:tc>
                 <a:tc>
                   <a:txBody>
-                    <a:bodyPr wrap="square" lIns="73152" rIns="73152" tIns="36576" bIns="36576"/>
+                    <a:bodyPr/>
                     <a:lstStyle/>
                     <a:p>
                       <a:pPr algn="ctr"/>
                       <a:r>
-                        <a:rPr b="0" i="0" sz="850">
+                        <a:rPr sz="850" b="0" i="0">
                           <a:solidFill>
                             <a:srgbClr val="192330"/>
                           </a:solidFill>
@@ -6762,12 +6914,12 @@
                 </a:tc>
                 <a:tc>
                   <a:txBody>
-                    <a:bodyPr wrap="square" lIns="73152" rIns="73152" tIns="36576" bIns="36576"/>
+                    <a:bodyPr/>
                     <a:lstStyle/>
                     <a:p>
                       <a:pPr algn="ctr"/>
                       <a:r>
-                        <a:rPr b="0" i="0" sz="850">
+                        <a:rPr sz="850" b="0" i="0">
                           <a:solidFill>
                             <a:srgbClr val="192330"/>
                           </a:solidFill>
@@ -6785,12 +6937,12 @@
                 </a:tc>
                 <a:tc>
                   <a:txBody>
-                    <a:bodyPr wrap="square" lIns="73152" rIns="73152" tIns="36576" bIns="36576"/>
+                    <a:bodyPr/>
                     <a:lstStyle/>
                     <a:p>
                       <a:pPr algn="ctr"/>
                       <a:r>
-                        <a:rPr b="0" i="0" sz="850">
+                        <a:rPr sz="850" b="0" i="0">
                           <a:solidFill>
                             <a:srgbClr val="192330"/>
                           </a:solidFill>
@@ -6808,12 +6960,12 @@
                 </a:tc>
                 <a:tc>
                   <a:txBody>
-                    <a:bodyPr wrap="square" lIns="73152" rIns="73152" tIns="36576" bIns="36576"/>
+                    <a:bodyPr/>
                     <a:lstStyle/>
                     <a:p>
                       <a:pPr algn="ctr"/>
                       <a:r>
-                        <a:rPr b="1" i="0" sz="800">
+                        <a:rPr sz="800" b="1" i="0">
                           <a:solidFill>
                             <a:srgbClr val="5A6978"/>
                           </a:solidFill>
@@ -6829,16 +6981,21 @@
                     </a:solidFill>
                   </a:tcPr>
                 </a:tc>
+                <a:extLst>
+                  <a:ext uri="{0D108BD9-81ED-4DB2-BD59-A6C34878D82A}">
+                    <a16:rowId xmlns:a16="http://schemas.microsoft.com/office/drawing/2014/main" val="10006"/>
+                  </a:ext>
+                </a:extLst>
               </a:tr>
               <a:tr h="352044">
                 <a:tc>
                   <a:txBody>
-                    <a:bodyPr wrap="square" lIns="73152" rIns="73152" tIns="36576" bIns="36576"/>
+                    <a:bodyPr/>
                     <a:lstStyle/>
                     <a:p>
                       <a:pPr algn="l"/>
                       <a:r>
-                        <a:rPr b="0" i="0" sz="850">
+                        <a:rPr sz="850" b="0" i="0">
                           <a:solidFill>
                             <a:srgbClr val="0A2540"/>
                           </a:solidFill>
@@ -6856,12 +7013,12 @@
                 </a:tc>
                 <a:tc>
                   <a:txBody>
-                    <a:bodyPr wrap="square" lIns="73152" rIns="73152" tIns="36576" bIns="36576"/>
+                    <a:bodyPr/>
                     <a:lstStyle/>
                     <a:p>
                       <a:pPr algn="ctr"/>
                       <a:r>
-                        <a:rPr b="0" i="0" sz="850">
+                        <a:rPr sz="850" b="0" i="0">
                           <a:solidFill>
                             <a:srgbClr val="192330"/>
                           </a:solidFill>
@@ -6879,12 +7036,12 @@
                 </a:tc>
                 <a:tc>
                   <a:txBody>
-                    <a:bodyPr wrap="square" lIns="73152" rIns="73152" tIns="36576" bIns="36576"/>
+                    <a:bodyPr/>
                     <a:lstStyle/>
                     <a:p>
                       <a:pPr algn="ctr"/>
                       <a:r>
-                        <a:rPr b="0" i="0" sz="850">
+                        <a:rPr sz="850" b="0" i="0">
                           <a:solidFill>
                             <a:srgbClr val="192330"/>
                           </a:solidFill>
@@ -6902,12 +7059,12 @@
                 </a:tc>
                 <a:tc>
                   <a:txBody>
-                    <a:bodyPr wrap="square" lIns="73152" rIns="73152" tIns="36576" bIns="36576"/>
+                    <a:bodyPr/>
                     <a:lstStyle/>
                     <a:p>
                       <a:pPr algn="ctr"/>
                       <a:r>
-                        <a:rPr b="0" i="0" sz="850">
+                        <a:rPr sz="850" b="0" i="0">
                           <a:solidFill>
                             <a:srgbClr val="192330"/>
                           </a:solidFill>
@@ -6925,12 +7082,12 @@
                 </a:tc>
                 <a:tc>
                   <a:txBody>
-                    <a:bodyPr wrap="square" lIns="73152" rIns="73152" tIns="36576" bIns="36576"/>
+                    <a:bodyPr/>
                     <a:lstStyle/>
                     <a:p>
                       <a:pPr algn="ctr"/>
                       <a:r>
-                        <a:rPr b="0" i="0" sz="850">
+                        <a:rPr sz="850" b="0" i="0">
                           <a:solidFill>
                             <a:srgbClr val="192330"/>
                           </a:solidFill>
@@ -6948,12 +7105,12 @@
                 </a:tc>
                 <a:tc>
                   <a:txBody>
-                    <a:bodyPr wrap="square" lIns="73152" rIns="73152" tIns="36576" bIns="36576"/>
+                    <a:bodyPr/>
                     <a:lstStyle/>
                     <a:p>
                       <a:pPr algn="ctr"/>
                       <a:r>
-                        <a:rPr b="1" i="0" sz="800">
+                        <a:rPr sz="800" b="1" i="0">
                           <a:solidFill>
                             <a:srgbClr val="5A6978"/>
                           </a:solidFill>
@@ -6969,16 +7126,21 @@
                     </a:solidFill>
                   </a:tcPr>
                 </a:tc>
+                <a:extLst>
+                  <a:ext uri="{0D108BD9-81ED-4DB2-BD59-A6C34878D82A}">
+                    <a16:rowId xmlns:a16="http://schemas.microsoft.com/office/drawing/2014/main" val="10007"/>
+                  </a:ext>
+                </a:extLst>
               </a:tr>
               <a:tr h="352044">
                 <a:tc>
                   <a:txBody>
-                    <a:bodyPr wrap="square" lIns="73152" rIns="73152" tIns="36576" bIns="36576"/>
+                    <a:bodyPr/>
                     <a:lstStyle/>
                     <a:p>
                       <a:pPr algn="l"/>
                       <a:r>
-                        <a:rPr b="0" i="0" sz="850">
+                        <a:rPr sz="850" b="0" i="0">
                           <a:solidFill>
                             <a:srgbClr val="0A2540"/>
                           </a:solidFill>
@@ -6996,12 +7158,12 @@
                 </a:tc>
                 <a:tc>
                   <a:txBody>
-                    <a:bodyPr wrap="square" lIns="73152" rIns="73152" tIns="36576" bIns="36576"/>
+                    <a:bodyPr/>
                     <a:lstStyle/>
                     <a:p>
                       <a:pPr algn="ctr"/>
                       <a:r>
-                        <a:rPr b="0" i="0" sz="850">
+                        <a:rPr sz="850" b="0" i="0">
                           <a:solidFill>
                             <a:srgbClr val="192330"/>
                           </a:solidFill>
@@ -7019,12 +7181,12 @@
                 </a:tc>
                 <a:tc>
                   <a:txBody>
-                    <a:bodyPr wrap="square" lIns="73152" rIns="73152" tIns="36576" bIns="36576"/>
+                    <a:bodyPr/>
                     <a:lstStyle/>
                     <a:p>
                       <a:pPr algn="ctr"/>
                       <a:r>
-                        <a:rPr b="0" i="0" sz="850">
+                        <a:rPr sz="850" b="0" i="0">
                           <a:solidFill>
                             <a:srgbClr val="192330"/>
                           </a:solidFill>
@@ -7042,12 +7204,12 @@
                 </a:tc>
                 <a:tc>
                   <a:txBody>
-                    <a:bodyPr wrap="square" lIns="73152" rIns="73152" tIns="36576" bIns="36576"/>
+                    <a:bodyPr/>
                     <a:lstStyle/>
                     <a:p>
                       <a:pPr algn="ctr"/>
                       <a:r>
-                        <a:rPr b="0" i="0" sz="850">
+                        <a:rPr sz="850" b="0" i="0">
                           <a:solidFill>
                             <a:srgbClr val="192330"/>
                           </a:solidFill>
@@ -7065,12 +7227,12 @@
                 </a:tc>
                 <a:tc>
                   <a:txBody>
-                    <a:bodyPr wrap="square" lIns="73152" rIns="73152" tIns="36576" bIns="36576"/>
+                    <a:bodyPr/>
                     <a:lstStyle/>
                     <a:p>
                       <a:pPr algn="ctr"/>
                       <a:r>
-                        <a:rPr b="0" i="0" sz="850">
+                        <a:rPr sz="850" b="0" i="0">
                           <a:solidFill>
                             <a:srgbClr val="192330"/>
                           </a:solidFill>
@@ -7088,12 +7250,12 @@
                 </a:tc>
                 <a:tc>
                   <a:txBody>
-                    <a:bodyPr wrap="square" lIns="73152" rIns="73152" tIns="36576" bIns="36576"/>
+                    <a:bodyPr/>
                     <a:lstStyle/>
                     <a:p>
                       <a:pPr algn="ctr"/>
                       <a:r>
-                        <a:rPr b="1" i="0" sz="800">
+                        <a:rPr sz="800" b="1" i="0">
                           <a:solidFill>
                             <a:srgbClr val="5A6978"/>
                           </a:solidFill>
@@ -7109,16 +7271,21 @@
                     </a:solidFill>
                   </a:tcPr>
                 </a:tc>
+                <a:extLst>
+                  <a:ext uri="{0D108BD9-81ED-4DB2-BD59-A6C34878D82A}">
+                    <a16:rowId xmlns:a16="http://schemas.microsoft.com/office/drawing/2014/main" val="10008"/>
+                  </a:ext>
+                </a:extLst>
               </a:tr>
               <a:tr h="352044">
                 <a:tc>
                   <a:txBody>
-                    <a:bodyPr wrap="square" lIns="73152" rIns="73152" tIns="36576" bIns="36576"/>
+                    <a:bodyPr/>
                     <a:lstStyle/>
                     <a:p>
                       <a:pPr algn="l"/>
                       <a:r>
-                        <a:rPr b="0" i="0" sz="850">
+                        <a:rPr sz="850" b="0" i="0">
                           <a:solidFill>
                             <a:srgbClr val="0A2540"/>
                           </a:solidFill>
@@ -7136,12 +7303,12 @@
                 </a:tc>
                 <a:tc>
                   <a:txBody>
-                    <a:bodyPr wrap="square" lIns="73152" rIns="73152" tIns="36576" bIns="36576"/>
+                    <a:bodyPr/>
                     <a:lstStyle/>
                     <a:p>
                       <a:pPr algn="ctr"/>
                       <a:r>
-                        <a:rPr b="0" i="0" sz="850">
+                        <a:rPr sz="850" b="0" i="0">
                           <a:solidFill>
                             <a:srgbClr val="192330"/>
                           </a:solidFill>
@@ -7159,12 +7326,12 @@
                 </a:tc>
                 <a:tc>
                   <a:txBody>
-                    <a:bodyPr wrap="square" lIns="73152" rIns="73152" tIns="36576" bIns="36576"/>
+                    <a:bodyPr/>
                     <a:lstStyle/>
                     <a:p>
                       <a:pPr algn="ctr"/>
                       <a:r>
-                        <a:rPr b="0" i="0" sz="850">
+                        <a:rPr sz="850" b="0" i="0">
                           <a:solidFill>
                             <a:srgbClr val="192330"/>
                           </a:solidFill>
@@ -7182,12 +7349,12 @@
                 </a:tc>
                 <a:tc>
                   <a:txBody>
-                    <a:bodyPr wrap="square" lIns="73152" rIns="73152" tIns="36576" bIns="36576"/>
+                    <a:bodyPr/>
                     <a:lstStyle/>
                     <a:p>
                       <a:pPr algn="ctr"/>
                       <a:r>
-                        <a:rPr b="0" i="0" sz="850">
+                        <a:rPr sz="850" b="0" i="0">
                           <a:solidFill>
                             <a:srgbClr val="192330"/>
                           </a:solidFill>
@@ -7205,12 +7372,12 @@
                 </a:tc>
                 <a:tc>
                   <a:txBody>
-                    <a:bodyPr wrap="square" lIns="73152" rIns="73152" tIns="36576" bIns="36576"/>
+                    <a:bodyPr/>
                     <a:lstStyle/>
                     <a:p>
                       <a:pPr algn="ctr"/>
                       <a:r>
-                        <a:rPr b="0" i="0" sz="850">
+                        <a:rPr sz="850" b="0" i="0">
                           <a:solidFill>
                             <a:srgbClr val="192330"/>
                           </a:solidFill>
@@ -7228,12 +7395,12 @@
                 </a:tc>
                 <a:tc>
                   <a:txBody>
-                    <a:bodyPr wrap="square" lIns="73152" rIns="73152" tIns="36576" bIns="36576"/>
+                    <a:bodyPr/>
                     <a:lstStyle/>
                     <a:p>
                       <a:pPr algn="ctr"/>
                       <a:r>
-                        <a:rPr b="1" i="0" sz="800">
+                        <a:rPr sz="800" b="1" i="0">
                           <a:solidFill>
                             <a:srgbClr val="5A6978"/>
                           </a:solidFill>
@@ -7249,6 +7416,11 @@
                     </a:solidFill>
                   </a:tcPr>
                 </a:tc>
+                <a:extLst>
+                  <a:ext uri="{0D108BD9-81ED-4DB2-BD59-A6C34878D82A}">
+                    <a16:rowId xmlns:a16="http://schemas.microsoft.com/office/drawing/2014/main" val="10009"/>
+                  </a:ext>
+                </a:extLst>
               </a:tr>
             </a:tbl>
           </a:graphicData>
@@ -7296,6 +7468,7 @@
           <a:lstStyle/>
           <a:p>
             <a:pPr algn="ctr"/>
+            <a:endParaRPr/>
           </a:p>
         </p:txBody>
       </p:sp>
@@ -7339,6 +7512,7 @@
           <a:lstStyle/>
           <a:p>
             <a:pPr algn="ctr"/>
+            <a:endParaRPr/>
           </a:p>
         </p:txBody>
       </p:sp>
@@ -7359,7 +7533,7 @@
           <a:noFill/>
         </p:spPr>
         <p:txBody>
-          <a:bodyPr wrap="square" tIns="0" bIns="0" lIns="0" rIns="0">
+          <a:bodyPr wrap="square" lIns="0" tIns="0" rIns="0" bIns="0">
             <a:spAutoFit/>
           </a:bodyPr>
           <a:lstStyle/>
@@ -7394,13 +7568,13 @@
           <a:noFill/>
         </p:spPr>
         <p:txBody>
-          <a:bodyPr wrap="square" tIns="0" bIns="0" lIns="0" rIns="0">
+          <a:bodyPr wrap="square" lIns="0" tIns="0" rIns="0" bIns="0">
             <a:spAutoFit/>
           </a:bodyPr>
           <a:lstStyle/>
           <a:p>
             <a:r>
-              <a:rPr b="1" i="0" sz="950">
+              <a:rPr sz="950" b="1" i="0">
                 <a:solidFill>
                   <a:srgbClr val="B92319"/>
                 </a:solidFill>
@@ -7409,7 +7583,7 @@
               <a:t>Why k=4 over k=2? </a:t>
             </a:r>
             <a:r>
-              <a:rPr b="0" i="0" sz="900">
+              <a:rPr sz="900" b="0" i="0">
                 <a:solidFill>
                   <a:srgbClr val="192330"/>
                 </a:solidFill>
@@ -7426,7 +7600,7 @@
               </a:spcBef>
             </a:pPr>
             <a:r>
-              <a:rPr b="1" i="0" sz="950">
+              <a:rPr sz="950" b="1" i="0">
                 <a:solidFill>
                   <a:srgbClr val="00555F"/>
                 </a:solidFill>
@@ -7435,7 +7609,7 @@
               <a:t>Actionable Partitioning: </a:t>
             </a:r>
             <a:r>
-              <a:rPr b="0" i="0" sz="900">
+              <a:rPr sz="900" b="0" i="0">
                 <a:solidFill>
                   <a:srgbClr val="192330"/>
                 </a:solidFill>
@@ -7455,7 +7629,7 @@
 </file>
 
 <file path=ppt/slides/slide12.xml><?xml version="1.0" encoding="utf-8"?>
-<p:sld xmlns:a="http://schemas.openxmlformats.org/drawingml/2006/main" xmlns:p="http://schemas.openxmlformats.org/presentationml/2006/main" xmlns:r="http://schemas.openxmlformats.org/officeDocument/2006/relationships">
+<p:sld xmlns:a="http://schemas.openxmlformats.org/drawingml/2006/main" xmlns:r="http://schemas.openxmlformats.org/officeDocument/2006/relationships" xmlns:p="http://schemas.openxmlformats.org/presentationml/2006/main">
   <p:cSld>
     <p:spTree>
       <p:nvGrpSpPr>
@@ -7463,7 +7637,14 @@
         <p:cNvGrpSpPr/>
         <p:nvPr/>
       </p:nvGrpSpPr>
-      <p:grpSpPr/>
+      <p:grpSpPr>
+        <a:xfrm>
+          <a:off x="0" y="0"/>
+          <a:ext cx="0" cy="0"/>
+          <a:chOff x="0" y="0"/>
+          <a:chExt cx="0" cy="0"/>
+        </a:xfrm>
+      </p:grpSpPr>
       <p:sp>
         <p:nvSpPr>
           <p:cNvPr id="2" name="Rectangle 1"/>
@@ -7504,6 +7685,7 @@
           <a:lstStyle/>
           <a:p>
             <a:pPr algn="ctr"/>
+            <a:endParaRPr/>
           </a:p>
         </p:txBody>
       </p:sp>
@@ -7547,6 +7729,7 @@
           <a:lstStyle/>
           <a:p>
             <a:pPr algn="ctr"/>
+            <a:endParaRPr/>
           </a:p>
         </p:txBody>
       </p:sp>
@@ -7590,6 +7773,7 @@
           <a:lstStyle/>
           <a:p>
             <a:pPr algn="ctr"/>
+            <a:endParaRPr/>
           </a:p>
         </p:txBody>
       </p:sp>
@@ -7610,7 +7794,7 @@
           <a:noFill/>
         </p:spPr>
         <p:txBody>
-          <a:bodyPr wrap="square" tIns="0" bIns="0" lIns="0" rIns="0">
+          <a:bodyPr wrap="square" lIns="0" tIns="0" rIns="0" bIns="0">
             <a:spAutoFit/>
           </a:bodyPr>
           <a:lstStyle/>
@@ -7692,20 +7876,20 @@
           <a:noFill/>
         </p:spPr>
         <p:txBody>
-          <a:bodyPr wrap="none" tIns="0" bIns="0" lIns="0" rIns="0">
+          <a:bodyPr wrap="none" lIns="0" tIns="0" rIns="0" bIns="0">
             <a:spAutoFit/>
           </a:bodyPr>
           <a:lstStyle/>
           <a:p>
             <a:pPr>
-              <a:defRPr sz="850">
-                <a:solidFill>
-                  <a:srgbClr val="5A6978"/>
+              <a:defRPr sz="750">
+                <a:solidFill>
+                  <a:srgbClr val="8090A0"/>
                 </a:solidFill>
               </a:defRPr>
             </a:pPr>
             <a:r>
-              <a:t>CA3 Machine Learning Mini-Project  |  Healthcare Facility Analytics  |  Candidate: Aditya09977  |  Submission: Oct 2026</a:t>
+              <a:t>CA3 Machine Learning Mini-Project  |  Healthcare Facility Analytics  |  Yesh Raheja (23070521174) &amp; Aditya Gurve (23070521231)  |  Oct 2026</a:t>
             </a:r>
           </a:p>
         </p:txBody>
@@ -7752,6 +7936,7 @@
           <a:lstStyle/>
           <a:p>
             <a:pPr algn="ctr"/>
+            <a:endParaRPr/>
           </a:p>
         </p:txBody>
       </p:sp>
@@ -7795,6 +7980,7 @@
           <a:lstStyle/>
           <a:p>
             <a:pPr algn="ctr"/>
+            <a:endParaRPr/>
           </a:p>
         </p:txBody>
       </p:sp>
@@ -7815,7 +8001,7 @@
           <a:noFill/>
         </p:spPr>
         <p:txBody>
-          <a:bodyPr wrap="square" tIns="0" bIns="0" lIns="0" rIns="0">
+          <a:bodyPr wrap="square" lIns="0" tIns="0" rIns="0" bIns="0">
             <a:spAutoFit/>
           </a:bodyPr>
           <a:lstStyle/>
@@ -7850,7 +8036,7 @@
           <a:noFill/>
         </p:spPr>
         <p:txBody>
-          <a:bodyPr wrap="square" tIns="0" bIns="0" lIns="0" rIns="0">
+          <a:bodyPr wrap="square" lIns="0" tIns="0" rIns="0" bIns="0">
             <a:spAutoFit/>
           </a:bodyPr>
           <a:lstStyle/>
@@ -7873,7 +8059,7 @@
               </a:spcBef>
             </a:pPr>
             <a:r>
-              <a:rPr b="1" i="0" sz="850">
+              <a:rPr sz="850" b="1" i="0">
                 <a:solidFill>
                   <a:srgbClr val="0A2540"/>
                 </a:solidFill>
@@ -7882,7 +8068,7 @@
               <a:t>• Avg Beds: 204  |  </a:t>
             </a:r>
             <a:r>
-              <a:rPr b="0" i="0" sz="850">
+              <a:rPr sz="850" b="0" i="0">
                 <a:solidFill>
                   <a:srgbClr val="192330"/>
                 </a:solidFill>
@@ -7898,7 +8084,7 @@
               </a:spcBef>
             </a:pPr>
             <a:r>
-              <a:rPr b="1" i="0" sz="850">
+              <a:rPr sz="850" b="1" i="0">
                 <a:solidFill>
                   <a:srgbClr val="0A2540"/>
                 </a:solidFill>
@@ -7907,7 +8093,7 @@
               <a:t>• Operating Margin: +0.93%  |  </a:t>
             </a:r>
             <a:r>
-              <a:rPr b="0" i="0" sz="850">
+              <a:rPr sz="850" b="0" i="0">
                 <a:solidFill>
                   <a:srgbClr val="192330"/>
                 </a:solidFill>
@@ -7923,7 +8109,7 @@
               </a:spcBef>
             </a:pPr>
             <a:r>
-              <a:rPr b="1" i="0" sz="850">
+              <a:rPr sz="850" b="1" i="0">
                 <a:solidFill>
                   <a:srgbClr val="0A2540"/>
                 </a:solidFill>
@@ -7932,7 +8118,7 @@
               <a:t>• Rev/Bed: $1.31M  |  </a:t>
             </a:r>
             <a:r>
-              <a:rPr b="0" i="0" sz="850">
+              <a:rPr sz="850" b="0" i="0">
                 <a:solidFill>
                   <a:srgbClr val="192330"/>
                 </a:solidFill>
@@ -7985,6 +8171,7 @@
           <a:lstStyle/>
           <a:p>
             <a:pPr algn="ctr"/>
+            <a:endParaRPr/>
           </a:p>
         </p:txBody>
       </p:sp>
@@ -8028,6 +8215,7 @@
           <a:lstStyle/>
           <a:p>
             <a:pPr algn="ctr"/>
+            <a:endParaRPr/>
           </a:p>
         </p:txBody>
       </p:sp>
@@ -8048,7 +8236,7 @@
           <a:noFill/>
         </p:spPr>
         <p:txBody>
-          <a:bodyPr wrap="square" tIns="0" bIns="0" lIns="0" rIns="0">
+          <a:bodyPr wrap="square" lIns="0" tIns="0" rIns="0" bIns="0">
             <a:spAutoFit/>
           </a:bodyPr>
           <a:lstStyle/>
@@ -8083,7 +8271,7 @@
           <a:noFill/>
         </p:spPr>
         <p:txBody>
-          <a:bodyPr wrap="square" tIns="0" bIns="0" lIns="0" rIns="0">
+          <a:bodyPr wrap="square" lIns="0" tIns="0" rIns="0" bIns="0">
             <a:spAutoFit/>
           </a:bodyPr>
           <a:lstStyle/>
@@ -8106,7 +8294,7 @@
               </a:spcBef>
             </a:pPr>
             <a:r>
-              <a:rPr b="1" i="0" sz="850">
+              <a:rPr sz="850" b="1" i="0">
                 <a:solidFill>
                   <a:srgbClr val="0A2540"/>
                 </a:solidFill>
@@ -8115,7 +8303,7 @@
               <a:t>• Avg Beds: 795  |  </a:t>
             </a:r>
             <a:r>
-              <a:rPr b="0" i="0" sz="850">
+              <a:rPr sz="850" b="0" i="0">
                 <a:solidFill>
                   <a:srgbClr val="192330"/>
                 </a:solidFill>
@@ -8131,7 +8319,7 @@
               </a:spcBef>
             </a:pPr>
             <a:r>
-              <a:rPr b="1" i="0" sz="850">
+              <a:rPr sz="850" b="1" i="0">
                 <a:solidFill>
                   <a:srgbClr val="0A2540"/>
                 </a:solidFill>
@@ -8140,7 +8328,7 @@
               <a:t>• Operating Margin: -48.20%  |  </a:t>
             </a:r>
             <a:r>
-              <a:rPr b="0" i="0" sz="850">
+              <a:rPr sz="850" b="0" i="0">
                 <a:solidFill>
                   <a:srgbClr val="192330"/>
                 </a:solidFill>
@@ -8156,7 +8344,7 @@
               </a:spcBef>
             </a:pPr>
             <a:r>
-              <a:rPr b="1" i="0" sz="850">
+              <a:rPr sz="850" b="1" i="0">
                 <a:solidFill>
                   <a:srgbClr val="0A2540"/>
                 </a:solidFill>
@@ -8165,7 +8353,7 @@
               <a:t>• Rev/Bed: $217k  |  </a:t>
             </a:r>
             <a:r>
-              <a:rPr b="0" i="0" sz="850">
+              <a:rPr sz="850" b="0" i="0">
                 <a:solidFill>
                   <a:srgbClr val="192330"/>
                 </a:solidFill>
@@ -8218,6 +8406,7 @@
           <a:lstStyle/>
           <a:p>
             <a:pPr algn="ctr"/>
+            <a:endParaRPr/>
           </a:p>
         </p:txBody>
       </p:sp>
@@ -8261,6 +8450,7 @@
           <a:lstStyle/>
           <a:p>
             <a:pPr algn="ctr"/>
+            <a:endParaRPr/>
           </a:p>
         </p:txBody>
       </p:sp>
@@ -8281,7 +8471,7 @@
           <a:noFill/>
         </p:spPr>
         <p:txBody>
-          <a:bodyPr wrap="square" tIns="0" bIns="0" lIns="0" rIns="0">
+          <a:bodyPr wrap="square" lIns="0" tIns="0" rIns="0" bIns="0">
             <a:spAutoFit/>
           </a:bodyPr>
           <a:lstStyle/>
@@ -8316,7 +8506,7 @@
           <a:noFill/>
         </p:spPr>
         <p:txBody>
-          <a:bodyPr wrap="square" tIns="0" bIns="0" lIns="0" rIns="0">
+          <a:bodyPr wrap="square" lIns="0" tIns="0" rIns="0" bIns="0">
             <a:spAutoFit/>
           </a:bodyPr>
           <a:lstStyle/>
@@ -8339,7 +8529,7 @@
               </a:spcBef>
             </a:pPr>
             <a:r>
-              <a:rPr b="1" i="0" sz="850">
+              <a:rPr sz="850" b="1" i="0">
                 <a:solidFill>
                   <a:srgbClr val="0A2540"/>
                 </a:solidFill>
@@ -8348,7 +8538,7 @@
               <a:t>• Avg Beds: 168  |  </a:t>
             </a:r>
             <a:r>
-              <a:rPr b="0" i="0" sz="850">
+              <a:rPr sz="850" b="0" i="0">
                 <a:solidFill>
                   <a:srgbClr val="192330"/>
                 </a:solidFill>
@@ -8364,7 +8554,7 @@
               </a:spcBef>
             </a:pPr>
             <a:r>
-              <a:rPr b="1" i="0" sz="850">
+              <a:rPr sz="850" b="1" i="0">
                 <a:solidFill>
                   <a:srgbClr val="0A2540"/>
                 </a:solidFill>
@@ -8373,7 +8563,7 @@
               <a:t>• Operating Margin: -9.46%  |  </a:t>
             </a:r>
             <a:r>
-              <a:rPr b="0" i="0" sz="850">
+              <a:rPr sz="850" b="0" i="0">
                 <a:solidFill>
                   <a:srgbClr val="192330"/>
                 </a:solidFill>
@@ -8389,7 +8579,7 @@
               </a:spcBef>
             </a:pPr>
             <a:r>
-              <a:rPr b="1" i="0" sz="850">
+              <a:rPr sz="850" b="1" i="0">
                 <a:solidFill>
                   <a:srgbClr val="0A2540"/>
                 </a:solidFill>
@@ -8398,7 +8588,7 @@
               <a:t>• Rev/Bed: $362k  |  </a:t>
             </a:r>
             <a:r>
-              <a:rPr b="0" i="0" sz="850">
+              <a:rPr sz="850" b="0" i="0">
                 <a:solidFill>
                   <a:srgbClr val="192330"/>
                 </a:solidFill>
@@ -8451,6 +8641,7 @@
           <a:lstStyle/>
           <a:p>
             <a:pPr algn="ctr"/>
+            <a:endParaRPr/>
           </a:p>
         </p:txBody>
       </p:sp>
@@ -8494,6 +8685,7 @@
           <a:lstStyle/>
           <a:p>
             <a:pPr algn="ctr"/>
+            <a:endParaRPr/>
           </a:p>
         </p:txBody>
       </p:sp>
@@ -8514,7 +8706,7 @@
           <a:noFill/>
         </p:spPr>
         <p:txBody>
-          <a:bodyPr wrap="square" tIns="0" bIns="0" lIns="0" rIns="0">
+          <a:bodyPr wrap="square" lIns="0" tIns="0" rIns="0" bIns="0">
             <a:spAutoFit/>
           </a:bodyPr>
           <a:lstStyle/>
@@ -8549,7 +8741,7 @@
           <a:noFill/>
         </p:spPr>
         <p:txBody>
-          <a:bodyPr wrap="square" tIns="0" bIns="0" lIns="0" rIns="0">
+          <a:bodyPr wrap="square" lIns="0" tIns="0" rIns="0" bIns="0">
             <a:spAutoFit/>
           </a:bodyPr>
           <a:lstStyle/>
@@ -8572,7 +8764,7 @@
               </a:spcBef>
             </a:pPr>
             <a:r>
-              <a:rPr b="1" i="0" sz="850">
+              <a:rPr sz="850" b="1" i="0">
                 <a:solidFill>
                   <a:srgbClr val="0A2540"/>
                 </a:solidFill>
@@ -8581,7 +8773,7 @@
               <a:t>• Avg Beds: 40  |  </a:t>
             </a:r>
             <a:r>
-              <a:rPr b="0" i="0" sz="850">
+              <a:rPr sz="850" b="0" i="0">
                 <a:solidFill>
                   <a:srgbClr val="192330"/>
                 </a:solidFill>
@@ -8597,7 +8789,7 @@
               </a:spcBef>
             </a:pPr>
             <a:r>
-              <a:rPr b="1" i="0" sz="850">
+              <a:rPr sz="850" b="1" i="0">
                 <a:solidFill>
                   <a:srgbClr val="0A2540"/>
                 </a:solidFill>
@@ -8606,7 +8798,7 @@
               <a:t>• Operating Margin: +3.12%  |  </a:t>
             </a:r>
             <a:r>
-              <a:rPr b="0" i="0" sz="850">
+              <a:rPr sz="850" b="0" i="0">
                 <a:solidFill>
                   <a:srgbClr val="192330"/>
                 </a:solidFill>
@@ -8622,7 +8814,7 @@
               </a:spcBef>
             </a:pPr>
             <a:r>
-              <a:rPr b="1" i="0" sz="850">
+              <a:rPr sz="850" b="1" i="0">
                 <a:solidFill>
                   <a:srgbClr val="0A2540"/>
                 </a:solidFill>
@@ -8631,7 +8823,7 @@
               <a:t>• Rev/Bed: $3.58M  |  </a:t>
             </a:r>
             <a:r>
-              <a:rPr b="0" i="0" sz="850">
+              <a:rPr sz="850" b="0" i="0">
                 <a:solidFill>
                   <a:srgbClr val="192330"/>
                 </a:solidFill>
@@ -8685,22 +8877,58 @@
                 <a:tableStyleId>{5C22544A-7EE6-4342-B048-85BDC9FD1C3A}</a:tableStyleId>
               </a:tblPr>
               <a:tblGrid>
-                <a:gridCol w="1325880"/>
-                <a:gridCol w="685800"/>
-                <a:gridCol w="822960"/>
-                <a:gridCol w="822960"/>
-                <a:gridCol w="822960"/>
-                <a:gridCol w="822960"/>
+                <a:gridCol w="1325880">
+                  <a:extLst>
+                    <a:ext uri="{9D8B030D-6E8A-4147-A177-3AD203B41FA5}">
+                      <a16:colId xmlns:a16="http://schemas.microsoft.com/office/drawing/2014/main" val="20000"/>
+                    </a:ext>
+                  </a:extLst>
+                </a:gridCol>
+                <a:gridCol w="685800">
+                  <a:extLst>
+                    <a:ext uri="{9D8B030D-6E8A-4147-A177-3AD203B41FA5}">
+                      <a16:colId xmlns:a16="http://schemas.microsoft.com/office/drawing/2014/main" val="20001"/>
+                    </a:ext>
+                  </a:extLst>
+                </a:gridCol>
+                <a:gridCol w="822960">
+                  <a:extLst>
+                    <a:ext uri="{9D8B030D-6E8A-4147-A177-3AD203B41FA5}">
+                      <a16:colId xmlns:a16="http://schemas.microsoft.com/office/drawing/2014/main" val="20002"/>
+                    </a:ext>
+                  </a:extLst>
+                </a:gridCol>
+                <a:gridCol w="822960">
+                  <a:extLst>
+                    <a:ext uri="{9D8B030D-6E8A-4147-A177-3AD203B41FA5}">
+                      <a16:colId xmlns:a16="http://schemas.microsoft.com/office/drawing/2014/main" val="20003"/>
+                    </a:ext>
+                  </a:extLst>
+                </a:gridCol>
+                <a:gridCol w="822960">
+                  <a:extLst>
+                    <a:ext uri="{9D8B030D-6E8A-4147-A177-3AD203B41FA5}">
+                      <a16:colId xmlns:a16="http://schemas.microsoft.com/office/drawing/2014/main" val="20004"/>
+                    </a:ext>
+                  </a:extLst>
+                </a:gridCol>
+                <a:gridCol w="822960">
+                  <a:extLst>
+                    <a:ext uri="{9D8B030D-6E8A-4147-A177-3AD203B41FA5}">
+                      <a16:colId xmlns:a16="http://schemas.microsoft.com/office/drawing/2014/main" val="20005"/>
+                    </a:ext>
+                  </a:extLst>
+                </a:gridCol>
               </a:tblGrid>
               <a:tr h="356616">
                 <a:tc>
                   <a:txBody>
-                    <a:bodyPr wrap="square" lIns="73152" rIns="73152" tIns="36576" bIns="36576"/>
+                    <a:bodyPr/>
                     <a:lstStyle/>
                     <a:p>
                       <a:pPr algn="l"/>
                       <a:r>
-                        <a:rPr b="1" i="0" sz="850">
+                        <a:rPr sz="850" b="1" i="0">
                           <a:solidFill>
                             <a:srgbClr val="FFFFFF"/>
                           </a:solidFill>
@@ -8718,12 +8946,12 @@
                 </a:tc>
                 <a:tc>
                   <a:txBody>
-                    <a:bodyPr wrap="square" lIns="73152" rIns="73152" tIns="36576" bIns="36576"/>
+                    <a:bodyPr/>
                     <a:lstStyle/>
                     <a:p>
                       <a:pPr algn="ctr"/>
                       <a:r>
-                        <a:rPr b="1" i="0" sz="850">
+                        <a:rPr sz="850" b="1" i="0">
                           <a:solidFill>
                             <a:srgbClr val="FFFFFF"/>
                           </a:solidFill>
@@ -8741,12 +8969,12 @@
                 </a:tc>
                 <a:tc>
                   <a:txBody>
-                    <a:bodyPr wrap="square" lIns="73152" rIns="73152" tIns="36576" bIns="36576"/>
+                    <a:bodyPr/>
                     <a:lstStyle/>
                     <a:p>
                       <a:pPr algn="ctr"/>
                       <a:r>
-                        <a:rPr b="1" i="0" sz="850">
+                        <a:rPr sz="850" b="1" i="0">
                           <a:solidFill>
                             <a:srgbClr val="FFFFFF"/>
                           </a:solidFill>
@@ -8764,12 +8992,12 @@
                 </a:tc>
                 <a:tc>
                   <a:txBody>
-                    <a:bodyPr wrap="square" lIns="73152" rIns="73152" tIns="36576" bIns="36576"/>
+                    <a:bodyPr/>
                     <a:lstStyle/>
                     <a:p>
                       <a:pPr algn="ctr"/>
                       <a:r>
-                        <a:rPr b="1" i="0" sz="850">
+                        <a:rPr sz="850" b="1" i="0">
                           <a:solidFill>
                             <a:srgbClr val="FFFFFF"/>
                           </a:solidFill>
@@ -8787,12 +9015,12 @@
                 </a:tc>
                 <a:tc>
                   <a:txBody>
-                    <a:bodyPr wrap="square" lIns="73152" rIns="73152" tIns="36576" bIns="36576"/>
+                    <a:bodyPr/>
                     <a:lstStyle/>
                     <a:p>
                       <a:pPr algn="ctr"/>
                       <a:r>
-                        <a:rPr b="1" i="0" sz="850">
+                        <a:rPr sz="850" b="1" i="0">
                           <a:solidFill>
                             <a:srgbClr val="FFFFFF"/>
                           </a:solidFill>
@@ -8810,12 +9038,12 @@
                 </a:tc>
                 <a:tc>
                   <a:txBody>
-                    <a:bodyPr wrap="square" lIns="73152" rIns="73152" tIns="36576" bIns="36576"/>
+                    <a:bodyPr/>
                     <a:lstStyle/>
                     <a:p>
                       <a:pPr algn="ctr"/>
                       <a:r>
-                        <a:rPr b="1" i="0" sz="850">
+                        <a:rPr sz="850" b="1" i="0">
                           <a:solidFill>
                             <a:srgbClr val="FFFFFF"/>
                           </a:solidFill>
@@ -8831,16 +9059,21 @@
                     </a:solidFill>
                   </a:tcPr>
                 </a:tc>
+                <a:extLst>
+                  <a:ext uri="{0D108BD9-81ED-4DB2-BD59-A6C34878D82A}">
+                    <a16:rowId xmlns:a16="http://schemas.microsoft.com/office/drawing/2014/main" val="10000"/>
+                  </a:ext>
+                </a:extLst>
               </a:tr>
               <a:tr h="356616">
                 <a:tc>
                   <a:txBody>
-                    <a:bodyPr wrap="square" lIns="73152" rIns="73152" tIns="36576" bIns="36576"/>
+                    <a:bodyPr/>
                     <a:lstStyle/>
                     <a:p>
                       <a:pPr algn="l"/>
                       <a:r>
-                        <a:rPr b="1" i="0" sz="850">
+                        <a:rPr sz="850" b="1" i="0">
                           <a:solidFill>
                             <a:srgbClr val="0A2540"/>
                           </a:solidFill>
@@ -8858,12 +9091,12 @@
                 </a:tc>
                 <a:tc>
                   <a:txBody>
-                    <a:bodyPr wrap="square" lIns="73152" rIns="73152" tIns="36576" bIns="36576"/>
+                    <a:bodyPr/>
                     <a:lstStyle/>
                     <a:p>
                       <a:pPr algn="ctr"/>
                       <a:r>
-                        <a:rPr b="0" i="0" sz="850">
+                        <a:rPr sz="850" b="0" i="0">
                           <a:solidFill>
                             <a:srgbClr val="192330"/>
                           </a:solidFill>
@@ -8881,12 +9114,12 @@
                 </a:tc>
                 <a:tc>
                   <a:txBody>
-                    <a:bodyPr wrap="square" lIns="73152" rIns="73152" tIns="36576" bIns="36576"/>
+                    <a:bodyPr/>
                     <a:lstStyle/>
                     <a:p>
                       <a:pPr algn="ctr"/>
                       <a:r>
-                        <a:rPr b="1" i="0" sz="850">
+                        <a:rPr sz="850" b="1" i="0">
                           <a:solidFill>
                             <a:srgbClr val="14733C"/>
                           </a:solidFill>
@@ -8904,12 +9137,12 @@
                 </a:tc>
                 <a:tc>
                   <a:txBody>
-                    <a:bodyPr wrap="square" lIns="73152" rIns="73152" tIns="36576" bIns="36576"/>
+                    <a:bodyPr/>
                     <a:lstStyle/>
                     <a:p>
                       <a:pPr algn="ctr"/>
                       <a:r>
-                        <a:rPr b="0" i="0" sz="850">
+                        <a:rPr sz="850" b="0" i="0">
                           <a:solidFill>
                             <a:srgbClr val="192330"/>
                           </a:solidFill>
@@ -8927,12 +9160,12 @@
                 </a:tc>
                 <a:tc>
                   <a:txBody>
-                    <a:bodyPr wrap="square" lIns="73152" rIns="73152" tIns="36576" bIns="36576"/>
+                    <a:bodyPr/>
                     <a:lstStyle/>
                     <a:p>
                       <a:pPr algn="ctr"/>
                       <a:r>
-                        <a:rPr b="0" i="0" sz="850">
+                        <a:rPr sz="850" b="0" i="0">
                           <a:solidFill>
                             <a:srgbClr val="192330"/>
                           </a:solidFill>
@@ -8950,12 +9183,12 @@
                 </a:tc>
                 <a:tc>
                   <a:txBody>
-                    <a:bodyPr wrap="square" lIns="73152" rIns="73152" tIns="36576" bIns="36576"/>
+                    <a:bodyPr/>
                     <a:lstStyle/>
                     <a:p>
                       <a:pPr algn="ctr"/>
                       <a:r>
-                        <a:rPr b="1" i="0" sz="850">
+                        <a:rPr sz="850" b="1" i="0">
                           <a:solidFill>
                             <a:srgbClr val="00555F"/>
                           </a:solidFill>
@@ -8971,16 +9204,21 @@
                     </a:solidFill>
                   </a:tcPr>
                 </a:tc>
+                <a:extLst>
+                  <a:ext uri="{0D108BD9-81ED-4DB2-BD59-A6C34878D82A}">
+                    <a16:rowId xmlns:a16="http://schemas.microsoft.com/office/drawing/2014/main" val="10001"/>
+                  </a:ext>
+                </a:extLst>
               </a:tr>
               <a:tr h="356616">
                 <a:tc>
                   <a:txBody>
-                    <a:bodyPr wrap="square" lIns="73152" rIns="73152" tIns="36576" bIns="36576"/>
+                    <a:bodyPr/>
                     <a:lstStyle/>
                     <a:p>
                       <a:pPr algn="l"/>
                       <a:r>
-                        <a:rPr b="1" i="0" sz="850">
+                        <a:rPr sz="850" b="1" i="0">
                           <a:solidFill>
                             <a:srgbClr val="0A2540"/>
                           </a:solidFill>
@@ -8998,12 +9236,12 @@
                 </a:tc>
                 <a:tc>
                   <a:txBody>
-                    <a:bodyPr wrap="square" lIns="73152" rIns="73152" tIns="36576" bIns="36576"/>
+                    <a:bodyPr/>
                     <a:lstStyle/>
                     <a:p>
                       <a:pPr algn="ctr"/>
                       <a:r>
-                        <a:rPr b="0" i="0" sz="850">
+                        <a:rPr sz="850" b="0" i="0">
                           <a:solidFill>
                             <a:srgbClr val="192330"/>
                           </a:solidFill>
@@ -9021,12 +9259,12 @@
                 </a:tc>
                 <a:tc>
                   <a:txBody>
-                    <a:bodyPr wrap="square" lIns="73152" rIns="73152" tIns="36576" bIns="36576"/>
+                    <a:bodyPr/>
                     <a:lstStyle/>
                     <a:p>
                       <a:pPr algn="ctr"/>
                       <a:r>
-                        <a:rPr b="1" i="0" sz="850">
+                        <a:rPr sz="850" b="1" i="0">
                           <a:solidFill>
                             <a:srgbClr val="B92319"/>
                           </a:solidFill>
@@ -9044,12 +9282,12 @@
                 </a:tc>
                 <a:tc>
                   <a:txBody>
-                    <a:bodyPr wrap="square" lIns="73152" rIns="73152" tIns="36576" bIns="36576"/>
+                    <a:bodyPr/>
                     <a:lstStyle/>
                     <a:p>
                       <a:pPr algn="ctr"/>
                       <a:r>
-                        <a:rPr b="0" i="0" sz="850">
+                        <a:rPr sz="850" b="0" i="0">
                           <a:solidFill>
                             <a:srgbClr val="192330"/>
                           </a:solidFill>
@@ -9067,12 +9305,12 @@
                 </a:tc>
                 <a:tc>
                   <a:txBody>
-                    <a:bodyPr wrap="square" lIns="73152" rIns="73152" tIns="36576" bIns="36576"/>
+                    <a:bodyPr/>
                     <a:lstStyle/>
                     <a:p>
                       <a:pPr algn="ctr"/>
                       <a:r>
-                        <a:rPr b="0" i="0" sz="850">
+                        <a:rPr sz="850" b="0" i="0">
                           <a:solidFill>
                             <a:srgbClr val="192330"/>
                           </a:solidFill>
@@ -9090,12 +9328,12 @@
                 </a:tc>
                 <a:tc>
                   <a:txBody>
-                    <a:bodyPr wrap="square" lIns="73152" rIns="73152" tIns="36576" bIns="36576"/>
+                    <a:bodyPr/>
                     <a:lstStyle/>
                     <a:p>
                       <a:pPr algn="ctr"/>
                       <a:r>
-                        <a:rPr b="1" i="0" sz="850">
+                        <a:rPr sz="850" b="1" i="0">
                           <a:solidFill>
                             <a:srgbClr val="00555F"/>
                           </a:solidFill>
@@ -9111,16 +9349,21 @@
                     </a:solidFill>
                   </a:tcPr>
                 </a:tc>
+                <a:extLst>
+                  <a:ext uri="{0D108BD9-81ED-4DB2-BD59-A6C34878D82A}">
+                    <a16:rowId xmlns:a16="http://schemas.microsoft.com/office/drawing/2014/main" val="10002"/>
+                  </a:ext>
+                </a:extLst>
               </a:tr>
               <a:tr h="356616">
                 <a:tc>
                   <a:txBody>
-                    <a:bodyPr wrap="square" lIns="73152" rIns="73152" tIns="36576" bIns="36576"/>
+                    <a:bodyPr/>
                     <a:lstStyle/>
                     <a:p>
                       <a:pPr algn="l"/>
                       <a:r>
-                        <a:rPr b="1" i="0" sz="850">
+                        <a:rPr sz="850" b="1" i="0">
                           <a:solidFill>
                             <a:srgbClr val="0A2540"/>
                           </a:solidFill>
@@ -9138,12 +9381,12 @@
                 </a:tc>
                 <a:tc>
                   <a:txBody>
-                    <a:bodyPr wrap="square" lIns="73152" rIns="73152" tIns="36576" bIns="36576"/>
+                    <a:bodyPr/>
                     <a:lstStyle/>
                     <a:p>
                       <a:pPr algn="ctr"/>
                       <a:r>
-                        <a:rPr b="0" i="0" sz="850">
+                        <a:rPr sz="850" b="0" i="0">
                           <a:solidFill>
                             <a:srgbClr val="192330"/>
                           </a:solidFill>
@@ -9161,12 +9404,12 @@
                 </a:tc>
                 <a:tc>
                   <a:txBody>
-                    <a:bodyPr wrap="square" lIns="73152" rIns="73152" tIns="36576" bIns="36576"/>
+                    <a:bodyPr/>
                     <a:lstStyle/>
                     <a:p>
                       <a:pPr algn="ctr"/>
                       <a:r>
-                        <a:rPr b="1" i="0" sz="850">
+                        <a:rPr sz="850" b="1" i="0">
                           <a:solidFill>
                             <a:srgbClr val="B92319"/>
                           </a:solidFill>
@@ -9184,12 +9427,12 @@
                 </a:tc>
                 <a:tc>
                   <a:txBody>
-                    <a:bodyPr wrap="square" lIns="73152" rIns="73152" tIns="36576" bIns="36576"/>
+                    <a:bodyPr/>
                     <a:lstStyle/>
                     <a:p>
                       <a:pPr algn="ctr"/>
                       <a:r>
-                        <a:rPr b="0" i="0" sz="850">
+                        <a:rPr sz="850" b="0" i="0">
                           <a:solidFill>
                             <a:srgbClr val="192330"/>
                           </a:solidFill>
@@ -9207,12 +9450,12 @@
                 </a:tc>
                 <a:tc>
                   <a:txBody>
-                    <a:bodyPr wrap="square" lIns="73152" rIns="73152" tIns="36576" bIns="36576"/>
+                    <a:bodyPr/>
                     <a:lstStyle/>
                     <a:p>
                       <a:pPr algn="ctr"/>
                       <a:r>
-                        <a:rPr b="0" i="0" sz="850">
+                        <a:rPr sz="850" b="0" i="0">
                           <a:solidFill>
                             <a:srgbClr val="192330"/>
                           </a:solidFill>
@@ -9230,12 +9473,12 @@
                 </a:tc>
                 <a:tc>
                   <a:txBody>
-                    <a:bodyPr wrap="square" lIns="73152" rIns="73152" tIns="36576" bIns="36576"/>
+                    <a:bodyPr/>
                     <a:lstStyle/>
                     <a:p>
                       <a:pPr algn="ctr"/>
                       <a:r>
-                        <a:rPr b="1" i="0" sz="850">
+                        <a:rPr sz="850" b="1" i="0">
                           <a:solidFill>
                             <a:srgbClr val="00555F"/>
                           </a:solidFill>
@@ -9251,16 +9494,21 @@
                     </a:solidFill>
                   </a:tcPr>
                 </a:tc>
+                <a:extLst>
+                  <a:ext uri="{0D108BD9-81ED-4DB2-BD59-A6C34878D82A}">
+                    <a16:rowId xmlns:a16="http://schemas.microsoft.com/office/drawing/2014/main" val="10003"/>
+                  </a:ext>
+                </a:extLst>
               </a:tr>
               <a:tr h="356616">
                 <a:tc>
                   <a:txBody>
-                    <a:bodyPr wrap="square" lIns="73152" rIns="73152" tIns="36576" bIns="36576"/>
+                    <a:bodyPr/>
                     <a:lstStyle/>
                     <a:p>
                       <a:pPr algn="l"/>
                       <a:r>
-                        <a:rPr b="1" i="0" sz="850">
+                        <a:rPr sz="850" b="1" i="0">
                           <a:solidFill>
                             <a:srgbClr val="0A2540"/>
                           </a:solidFill>
@@ -9278,12 +9526,12 @@
                 </a:tc>
                 <a:tc>
                   <a:txBody>
-                    <a:bodyPr wrap="square" lIns="73152" rIns="73152" tIns="36576" bIns="36576"/>
+                    <a:bodyPr/>
                     <a:lstStyle/>
                     <a:p>
                       <a:pPr algn="ctr"/>
                       <a:r>
-                        <a:rPr b="0" i="0" sz="850">
+                        <a:rPr sz="850" b="0" i="0">
                           <a:solidFill>
                             <a:srgbClr val="192330"/>
                           </a:solidFill>
@@ -9301,12 +9549,12 @@
                 </a:tc>
                 <a:tc>
                   <a:txBody>
-                    <a:bodyPr wrap="square" lIns="73152" rIns="73152" tIns="36576" bIns="36576"/>
+                    <a:bodyPr/>
                     <a:lstStyle/>
                     <a:p>
                       <a:pPr algn="ctr"/>
                       <a:r>
-                        <a:rPr b="1" i="0" sz="850">
+                        <a:rPr sz="850" b="1" i="0">
                           <a:solidFill>
                             <a:srgbClr val="14733C"/>
                           </a:solidFill>
@@ -9324,12 +9572,12 @@
                 </a:tc>
                 <a:tc>
                   <a:txBody>
-                    <a:bodyPr wrap="square" lIns="73152" rIns="73152" tIns="36576" bIns="36576"/>
+                    <a:bodyPr/>
                     <a:lstStyle/>
                     <a:p>
                       <a:pPr algn="ctr"/>
                       <a:r>
-                        <a:rPr b="0" i="0" sz="850">
+                        <a:rPr sz="850" b="0" i="0">
                           <a:solidFill>
                             <a:srgbClr val="192330"/>
                           </a:solidFill>
@@ -9347,12 +9595,12 @@
                 </a:tc>
                 <a:tc>
                   <a:txBody>
-                    <a:bodyPr wrap="square" lIns="73152" rIns="73152" tIns="36576" bIns="36576"/>
+                    <a:bodyPr/>
                     <a:lstStyle/>
                     <a:p>
                       <a:pPr algn="ctr"/>
                       <a:r>
-                        <a:rPr b="0" i="0" sz="850">
+                        <a:rPr sz="850" b="0" i="0">
                           <a:solidFill>
                             <a:srgbClr val="192330"/>
                           </a:solidFill>
@@ -9370,12 +9618,12 @@
                 </a:tc>
                 <a:tc>
                   <a:txBody>
-                    <a:bodyPr wrap="square" lIns="73152" rIns="73152" tIns="36576" bIns="36576"/>
+                    <a:bodyPr/>
                     <a:lstStyle/>
                     <a:p>
                       <a:pPr algn="ctr"/>
                       <a:r>
-                        <a:rPr b="1" i="0" sz="850">
+                        <a:rPr sz="850" b="1" i="0">
                           <a:solidFill>
                             <a:srgbClr val="00555F"/>
                           </a:solidFill>
@@ -9391,6 +9639,11 @@
                     </a:solidFill>
                   </a:tcPr>
                 </a:tc>
+                <a:extLst>
+                  <a:ext uri="{0D108BD9-81ED-4DB2-BD59-A6C34878D82A}">
+                    <a16:rowId xmlns:a16="http://schemas.microsoft.com/office/drawing/2014/main" val="10004"/>
+                  </a:ext>
+                </a:extLst>
               </a:tr>
             </a:tbl>
           </a:graphicData>
@@ -9438,6 +9691,7 @@
           <a:lstStyle/>
           <a:p>
             <a:pPr algn="ctr"/>
+            <a:endParaRPr/>
           </a:p>
         </p:txBody>
       </p:sp>
@@ -9481,6 +9735,7 @@
           <a:lstStyle/>
           <a:p>
             <a:pPr algn="ctr"/>
+            <a:endParaRPr/>
           </a:p>
         </p:txBody>
       </p:sp>
@@ -9501,7 +9756,7 @@
           <a:noFill/>
         </p:spPr>
         <p:txBody>
-          <a:bodyPr wrap="square" tIns="0" bIns="0" lIns="0" rIns="0">
+          <a:bodyPr wrap="square" lIns="0" tIns="0" rIns="0" bIns="0">
             <a:spAutoFit/>
           </a:bodyPr>
           <a:lstStyle/>
@@ -9536,13 +9791,13 @@
           <a:noFill/>
         </p:spPr>
         <p:txBody>
-          <a:bodyPr wrap="square" tIns="0" bIns="0" lIns="0" rIns="0">
+          <a:bodyPr wrap="square" lIns="0" tIns="0" rIns="0" bIns="0">
             <a:spAutoFit/>
           </a:bodyPr>
           <a:lstStyle/>
           <a:p>
             <a:r>
-              <a:rPr b="1" i="0" sz="900">
+              <a:rPr sz="900" b="1" i="0">
                 <a:solidFill>
                   <a:srgbClr val="007A87"/>
                 </a:solidFill>
@@ -9551,7 +9806,7 @@
               <a:t>• Acute Community Vulnerability (90.7%): </a:t>
             </a:r>
             <a:r>
-              <a:rPr b="0" i="0" sz="850">
+              <a:rPr sz="850" b="0" i="0">
                 <a:solidFill>
                   <a:srgbClr val="192330"/>
                 </a:solidFill>
@@ -9568,7 +9823,7 @@
               </a:spcBef>
             </a:pPr>
             <a:r>
-              <a:rPr b="1" i="0" sz="900">
+              <a:rPr sz="900" b="1" i="0">
                 <a:solidFill>
                   <a:srgbClr val="14733C"/>
                 </a:solidFill>
@@ -9577,7 +9832,7 @@
               <a:t>• High Capital Velocity in Specialty Centers: </a:t>
             </a:r>
             <a:r>
-              <a:rPr b="0" i="0" sz="850">
+              <a:rPr sz="850" b="0" i="0">
                 <a:solidFill>
                   <a:srgbClr val="192330"/>
                 </a:solidFill>
@@ -9597,7 +9852,7 @@
 </file>
 
 <file path=ppt/slides/slide13.xml><?xml version="1.0" encoding="utf-8"?>
-<p:sld xmlns:a="http://schemas.openxmlformats.org/drawingml/2006/main" xmlns:p="http://schemas.openxmlformats.org/presentationml/2006/main" xmlns:r="http://schemas.openxmlformats.org/officeDocument/2006/relationships">
+<p:sld xmlns:a="http://schemas.openxmlformats.org/drawingml/2006/main" xmlns:r="http://schemas.openxmlformats.org/officeDocument/2006/relationships" xmlns:p="http://schemas.openxmlformats.org/presentationml/2006/main">
   <p:cSld>
     <p:spTree>
       <p:nvGrpSpPr>
@@ -9605,7 +9860,14 @@
         <p:cNvGrpSpPr/>
         <p:nvPr/>
       </p:nvGrpSpPr>
-      <p:grpSpPr/>
+      <p:grpSpPr>
+        <a:xfrm>
+          <a:off x="0" y="0"/>
+          <a:ext cx="0" cy="0"/>
+          <a:chOff x="0" y="0"/>
+          <a:chExt cx="0" cy="0"/>
+        </a:xfrm>
+      </p:grpSpPr>
       <p:sp>
         <p:nvSpPr>
           <p:cNvPr id="2" name="Rectangle 1"/>
@@ -9646,6 +9908,7 @@
           <a:lstStyle/>
           <a:p>
             <a:pPr algn="ctr"/>
+            <a:endParaRPr/>
           </a:p>
         </p:txBody>
       </p:sp>
@@ -9689,6 +9952,7 @@
           <a:lstStyle/>
           <a:p>
             <a:pPr algn="ctr"/>
+            <a:endParaRPr/>
           </a:p>
         </p:txBody>
       </p:sp>
@@ -9732,6 +9996,7 @@
           <a:lstStyle/>
           <a:p>
             <a:pPr algn="ctr"/>
+            <a:endParaRPr/>
           </a:p>
         </p:txBody>
       </p:sp>
@@ -9752,7 +10017,7 @@
           <a:noFill/>
         </p:spPr>
         <p:txBody>
-          <a:bodyPr wrap="square" tIns="0" bIns="0" lIns="0" rIns="0">
+          <a:bodyPr wrap="square" lIns="0" tIns="0" rIns="0" bIns="0">
             <a:spAutoFit/>
           </a:bodyPr>
           <a:lstStyle/>
@@ -9834,20 +10099,20 @@
           <a:noFill/>
         </p:spPr>
         <p:txBody>
-          <a:bodyPr wrap="none" tIns="0" bIns="0" lIns="0" rIns="0">
+          <a:bodyPr wrap="none" lIns="0" tIns="0" rIns="0" bIns="0">
             <a:spAutoFit/>
           </a:bodyPr>
           <a:lstStyle/>
           <a:p>
             <a:pPr>
-              <a:defRPr sz="850">
-                <a:solidFill>
-                  <a:srgbClr val="5A6978"/>
+              <a:defRPr sz="750">
+                <a:solidFill>
+                  <a:srgbClr val="8090A0"/>
                 </a:solidFill>
               </a:defRPr>
             </a:pPr>
             <a:r>
-              <a:t>CA3 Machine Learning Mini-Project  |  Healthcare Facility Analytics  |  Candidate: Aditya09977  |  Submission: Oct 2026</a:t>
+              <a:t>CA3 Machine Learning Mini-Project  |  Healthcare Facility Analytics  |  Yesh Raheja (23070521174) &amp; Aditya Gurve (23070521231)  |  Oct 2026</a:t>
             </a:r>
           </a:p>
         </p:txBody>
@@ -9918,6 +10183,7 @@
           <a:lstStyle/>
           <a:p>
             <a:pPr algn="ctr"/>
+            <a:endParaRPr/>
           </a:p>
         </p:txBody>
       </p:sp>
@@ -9961,6 +10227,7 @@
           <a:lstStyle/>
           <a:p>
             <a:pPr algn="ctr"/>
+            <a:endParaRPr/>
           </a:p>
         </p:txBody>
       </p:sp>
@@ -9981,7 +10248,7 @@
           <a:noFill/>
         </p:spPr>
         <p:txBody>
-          <a:bodyPr wrap="square" tIns="0" bIns="0" lIns="0" rIns="0">
+          <a:bodyPr wrap="square" lIns="0" tIns="0" rIns="0" bIns="0">
             <a:spAutoFit/>
           </a:bodyPr>
           <a:lstStyle/>
@@ -10016,13 +10283,13 @@
           <a:noFill/>
         </p:spPr>
         <p:txBody>
-          <a:bodyPr wrap="square" tIns="0" bIns="0" lIns="0" rIns="0">
+          <a:bodyPr wrap="square" lIns="0" tIns="0" rIns="0" bIns="0">
             <a:spAutoFit/>
           </a:bodyPr>
           <a:lstStyle/>
           <a:p>
             <a:r>
-              <a:rPr b="1" i="0" sz="950">
+              <a:rPr sz="950" b="1" i="0">
                 <a:solidFill>
                   <a:srgbClr val="0A2540"/>
                 </a:solidFill>
@@ -10031,7 +10298,7 @@
               <a:t>Live CLI Command: </a:t>
             </a:r>
             <a:r>
-              <a:rPr b="1" i="0" sz="900">
+              <a:rPr sz="900" b="1" i="0">
                 <a:solidFill>
                   <a:srgbClr val="00555F"/>
                 </a:solidFill>
@@ -10048,7 +10315,7 @@
               </a:spcBef>
             </a:pPr>
             <a:r>
-              <a:rPr b="1" i="0" sz="950">
+              <a:rPr sz="950" b="1" i="0">
                 <a:solidFill>
                   <a:srgbClr val="0A2540"/>
                 </a:solidFill>
@@ -10057,7 +10324,7 @@
               <a:t>Deployment Architecture: </a:t>
             </a:r>
             <a:r>
-              <a:rPr b="0" i="0" sz="850">
+              <a:rPr sz="850" b="0" i="0">
                 <a:solidFill>
                   <a:srgbClr val="192330"/>
                 </a:solidFill>
@@ -10110,6 +10377,7 @@
           <a:lstStyle/>
           <a:p>
             <a:pPr algn="ctr"/>
+            <a:endParaRPr/>
           </a:p>
         </p:txBody>
       </p:sp>
@@ -10153,6 +10421,7 @@
           <a:lstStyle/>
           <a:p>
             <a:pPr algn="ctr"/>
+            <a:endParaRPr/>
           </a:p>
         </p:txBody>
       </p:sp>
@@ -10173,7 +10442,7 @@
           <a:noFill/>
         </p:spPr>
         <p:txBody>
-          <a:bodyPr wrap="square" tIns="0" bIns="0" lIns="0" rIns="0">
+          <a:bodyPr wrap="square" lIns="0" tIns="0" rIns="0" bIns="0">
             <a:spAutoFit/>
           </a:bodyPr>
           <a:lstStyle/>
@@ -10208,13 +10477,13 @@
           <a:noFill/>
         </p:spPr>
         <p:txBody>
-          <a:bodyPr wrap="square" tIns="0" bIns="0" lIns="0" rIns="0">
+          <a:bodyPr wrap="square" lIns="0" tIns="0" rIns="0" bIns="0">
             <a:spAutoFit/>
           </a:bodyPr>
           <a:lstStyle/>
           <a:p>
             <a:r>
-              <a:rPr b="1" i="0" sz="950">
+              <a:rPr sz="950" b="1" i="0">
                 <a:solidFill>
                   <a:srgbClr val="007A87"/>
                 </a:solidFill>
@@ -10224,7 +10493,7 @@
 </a:t>
             </a:r>
             <a:r>
-              <a:rPr b="0" i="0" sz="850">
+              <a:rPr sz="850" b="0" i="0">
                 <a:solidFill>
                   <a:srgbClr val="192330"/>
                 </a:solidFill>
@@ -10240,7 +10509,7 @@
               </a:spcBef>
             </a:pPr>
             <a:r>
-              <a:rPr b="1" i="0" sz="950">
+              <a:rPr sz="950" b="1" i="0">
                 <a:solidFill>
                   <a:srgbClr val="007A87"/>
                 </a:solidFill>
@@ -10250,7 +10519,7 @@
 </a:t>
             </a:r>
             <a:r>
-              <a:rPr b="0" i="0" sz="850">
+              <a:rPr sz="850" b="0" i="0">
                 <a:solidFill>
                   <a:srgbClr val="192330"/>
                 </a:solidFill>
@@ -10266,7 +10535,7 @@
               </a:spcBef>
             </a:pPr>
             <a:r>
-              <a:rPr b="1" i="0" sz="950">
+              <a:rPr sz="950" b="1" i="0">
                 <a:solidFill>
                   <a:srgbClr val="007A87"/>
                 </a:solidFill>
@@ -10276,7 +10545,7 @@
 </a:t>
             </a:r>
             <a:r>
-              <a:rPr b="0" i="0" sz="850">
+              <a:rPr sz="850" b="0" i="0">
                 <a:solidFill>
                   <a:srgbClr val="192330"/>
                 </a:solidFill>
@@ -10292,7 +10561,7 @@
               </a:spcBef>
             </a:pPr>
             <a:r>
-              <a:rPr b="1" i="0" sz="950">
+              <a:rPr sz="950" b="1" i="0">
                 <a:solidFill>
                   <a:srgbClr val="007A87"/>
                 </a:solidFill>
@@ -10302,7 +10571,7 @@
 </a:t>
             </a:r>
             <a:r>
-              <a:rPr b="0" i="0" sz="850">
+              <a:rPr sz="850" b="0" i="0">
                 <a:solidFill>
                   <a:srgbClr val="192330"/>
                 </a:solidFill>
@@ -10318,7 +10587,7 @@
               </a:spcBef>
             </a:pPr>
             <a:r>
-              <a:rPr b="1" i="0" sz="950">
+              <a:rPr sz="950" b="1" i="0">
                 <a:solidFill>
                   <a:srgbClr val="007A87"/>
                 </a:solidFill>
@@ -10328,7 +10597,7 @@
 </a:t>
             </a:r>
             <a:r>
-              <a:rPr b="0" i="0" sz="850">
+              <a:rPr sz="850" b="0" i="0">
                 <a:solidFill>
                   <a:srgbClr val="192330"/>
                 </a:solidFill>
@@ -10344,7 +10613,7 @@
               </a:spcBef>
             </a:pPr>
             <a:r>
-              <a:rPr b="1" i="0" sz="950">
+              <a:rPr sz="950" b="1" i="0">
                 <a:solidFill>
                   <a:srgbClr val="007A87"/>
                 </a:solidFill>
@@ -10354,7 +10623,7 @@
 </a:t>
             </a:r>
             <a:r>
-              <a:rPr b="0" i="0" sz="850">
+              <a:rPr sz="850" b="0" i="0">
                 <a:solidFill>
                   <a:srgbClr val="192330"/>
                 </a:solidFill>
@@ -10374,7 +10643,7 @@
 </file>
 
 <file path=ppt/slides/slide14.xml><?xml version="1.0" encoding="utf-8"?>
-<p:sld xmlns:a="http://schemas.openxmlformats.org/drawingml/2006/main" xmlns:p="http://schemas.openxmlformats.org/presentationml/2006/main" xmlns:r="http://schemas.openxmlformats.org/officeDocument/2006/relationships">
+<p:sld xmlns:a="http://schemas.openxmlformats.org/drawingml/2006/main" xmlns:r="http://schemas.openxmlformats.org/officeDocument/2006/relationships" xmlns:p="http://schemas.openxmlformats.org/presentationml/2006/main">
   <p:cSld>
     <p:spTree>
       <p:nvGrpSpPr>
@@ -10382,7 +10651,14 @@
         <p:cNvGrpSpPr/>
         <p:nvPr/>
       </p:nvGrpSpPr>
-      <p:grpSpPr/>
+      <p:grpSpPr>
+        <a:xfrm>
+          <a:off x="0" y="0"/>
+          <a:ext cx="0" cy="0"/>
+          <a:chOff x="0" y="0"/>
+          <a:chExt cx="0" cy="0"/>
+        </a:xfrm>
+      </p:grpSpPr>
       <p:sp>
         <p:nvSpPr>
           <p:cNvPr id="2" name="Rectangle 1"/>
@@ -10423,6 +10699,7 @@
           <a:lstStyle/>
           <a:p>
             <a:pPr algn="ctr"/>
+            <a:endParaRPr/>
           </a:p>
         </p:txBody>
       </p:sp>
@@ -10466,6 +10743,7 @@
           <a:lstStyle/>
           <a:p>
             <a:pPr algn="ctr"/>
+            <a:endParaRPr/>
           </a:p>
         </p:txBody>
       </p:sp>
@@ -10509,6 +10787,7 @@
           <a:lstStyle/>
           <a:p>
             <a:pPr algn="ctr"/>
+            <a:endParaRPr/>
           </a:p>
         </p:txBody>
       </p:sp>
@@ -10529,7 +10808,7 @@
           <a:noFill/>
         </p:spPr>
         <p:txBody>
-          <a:bodyPr wrap="square" tIns="0" bIns="0" lIns="0" rIns="0">
+          <a:bodyPr wrap="square" lIns="0" tIns="0" rIns="0" bIns="0">
             <a:spAutoFit/>
           </a:bodyPr>
           <a:lstStyle/>
@@ -10611,20 +10890,20 @@
           <a:noFill/>
         </p:spPr>
         <p:txBody>
-          <a:bodyPr wrap="none" tIns="0" bIns="0" lIns="0" rIns="0">
+          <a:bodyPr wrap="none" lIns="0" tIns="0" rIns="0" bIns="0">
             <a:spAutoFit/>
           </a:bodyPr>
           <a:lstStyle/>
           <a:p>
             <a:pPr>
-              <a:defRPr sz="850">
-                <a:solidFill>
-                  <a:srgbClr val="5A6978"/>
+              <a:defRPr sz="750">
+                <a:solidFill>
+                  <a:srgbClr val="8090A0"/>
                 </a:solidFill>
               </a:defRPr>
             </a:pPr>
             <a:r>
-              <a:t>CA3 Machine Learning Mini-Project  |  Healthcare Facility Analytics  |  Candidate: Aditya09977  |  Submission: Oct 2026</a:t>
+              <a:t>CA3 Machine Learning Mini-Project  |  Healthcare Facility Analytics  |  Yesh Raheja (23070521174) &amp; Aditya Gurve (23070521231)  |  Oct 2026</a:t>
             </a:r>
           </a:p>
         </p:txBody>
@@ -10671,6 +10950,7 @@
           <a:lstStyle/>
           <a:p>
             <a:pPr algn="ctr"/>
+            <a:endParaRPr/>
           </a:p>
         </p:txBody>
       </p:sp>
@@ -10714,6 +10994,7 @@
           <a:lstStyle/>
           <a:p>
             <a:pPr algn="ctr"/>
+            <a:endParaRPr/>
           </a:p>
         </p:txBody>
       </p:sp>
@@ -10734,7 +11015,7 @@
           <a:noFill/>
         </p:spPr>
         <p:txBody>
-          <a:bodyPr wrap="square" tIns="0" bIns="0" lIns="0" rIns="0">
+          <a:bodyPr wrap="square" lIns="0" tIns="0" rIns="0" bIns="0">
             <a:spAutoFit/>
           </a:bodyPr>
           <a:lstStyle/>
@@ -10769,13 +11050,13 @@
           <a:noFill/>
         </p:spPr>
         <p:txBody>
-          <a:bodyPr wrap="square" tIns="0" bIns="0" lIns="0" rIns="0">
+          <a:bodyPr wrap="square" lIns="0" tIns="0" rIns="0" bIns="0">
             <a:spAutoFit/>
           </a:bodyPr>
           <a:lstStyle/>
           <a:p>
             <a:r>
-              <a:rPr b="1" i="0" sz="900">
+              <a:rPr sz="900" b="1" i="0">
                 <a:solidFill>
                   <a:srgbClr val="007A87"/>
                 </a:solidFill>
@@ -10784,7 +11065,7 @@
               <a:t>• End-to-End Execution: </a:t>
             </a:r>
             <a:r>
-              <a:rPr b="0" i="0" sz="850">
+              <a:rPr sz="850" b="0" i="0">
                 <a:solidFill>
                   <a:srgbClr val="192330"/>
                 </a:solidFill>
@@ -10800,7 +11081,7 @@
               </a:spcBef>
             </a:pPr>
             <a:r>
-              <a:rPr b="1" i="0" sz="900">
+              <a:rPr sz="900" b="1" i="0">
                 <a:solidFill>
                   <a:srgbClr val="007A87"/>
                 </a:solidFill>
@@ -10809,7 +11090,7 @@
               <a:t>• Empirical Model Selection: </a:t>
             </a:r>
             <a:r>
-              <a:rPr b="0" i="0" sz="850">
+              <a:rPr sz="850" b="0" i="0">
                 <a:solidFill>
                   <a:srgbClr val="192330"/>
                 </a:solidFill>
@@ -10825,7 +11106,7 @@
               </a:spcBef>
             </a:pPr>
             <a:r>
-              <a:rPr b="1" i="0" sz="900">
+              <a:rPr sz="900" b="1" i="0">
                 <a:solidFill>
                   <a:srgbClr val="007A87"/>
                 </a:solidFill>
@@ -10834,7 +11115,7 @@
               <a:t>• Acute Care Vulnerability: </a:t>
             </a:r>
             <a:r>
-              <a:rPr b="0" i="0" sz="850">
+              <a:rPr sz="850" b="0" i="0">
                 <a:solidFill>
                   <a:srgbClr val="192330"/>
                 </a:solidFill>
@@ -10850,7 +11131,7 @@
               </a:spcBef>
             </a:pPr>
             <a:r>
-              <a:rPr b="1" i="0" sz="900">
+              <a:rPr sz="900" b="1" i="0">
                 <a:solidFill>
                   <a:srgbClr val="007A87"/>
                 </a:solidFill>
@@ -10859,7 +11140,7 @@
               <a:t>• Specialty Surgical Velocity: </a:t>
             </a:r>
             <a:r>
-              <a:rPr b="0" i="0" sz="850">
+              <a:rPr sz="850" b="0" i="0">
                 <a:solidFill>
                   <a:srgbClr val="192330"/>
                 </a:solidFill>
@@ -10875,7 +11156,7 @@
               </a:spcBef>
             </a:pPr>
             <a:r>
-              <a:rPr b="1" i="0" sz="900">
+              <a:rPr sz="900" b="1" i="0">
                 <a:solidFill>
                   <a:srgbClr val="007A87"/>
                 </a:solidFill>
@@ -10884,7 +11165,7 @@
               <a:t>• Academic Deliverables: </a:t>
             </a:r>
             <a:r>
-              <a:rPr b="0" i="0" sz="850">
+              <a:rPr sz="850" b="0" i="0">
                 <a:solidFill>
                   <a:srgbClr val="192330"/>
                 </a:solidFill>
@@ -10937,6 +11218,7 @@
           <a:lstStyle/>
           <a:p>
             <a:pPr algn="ctr"/>
+            <a:endParaRPr/>
           </a:p>
         </p:txBody>
       </p:sp>
@@ -10980,6 +11262,7 @@
           <a:lstStyle/>
           <a:p>
             <a:pPr algn="ctr"/>
+            <a:endParaRPr/>
           </a:p>
         </p:txBody>
       </p:sp>
@@ -11000,7 +11283,7 @@
           <a:noFill/>
         </p:spPr>
         <p:txBody>
-          <a:bodyPr wrap="square" tIns="0" bIns="0" lIns="0" rIns="0">
+          <a:bodyPr wrap="square" lIns="0" tIns="0" rIns="0" bIns="0">
             <a:spAutoFit/>
           </a:bodyPr>
           <a:lstStyle/>
@@ -11035,13 +11318,13 @@
           <a:noFill/>
         </p:spPr>
         <p:txBody>
-          <a:bodyPr wrap="square" tIns="0" bIns="0" lIns="0" rIns="0">
+          <a:bodyPr wrap="square" lIns="0" tIns="0" rIns="0" bIns="0">
             <a:spAutoFit/>
           </a:bodyPr>
           <a:lstStyle/>
           <a:p>
             <a:r>
-              <a:rPr b="1" i="0" sz="900">
+              <a:rPr sz="900" b="1" i="0">
                 <a:solidFill>
                   <a:srgbClr val="B92319"/>
                 </a:solidFill>
@@ -11050,7 +11333,7 @@
               <a:t>• Strict Non-Causal Scope: </a:t>
             </a:r>
             <a:r>
-              <a:rPr b="0" i="0" sz="850">
+              <a:rPr sz="850" b="0" i="0">
                 <a:solidFill>
                   <a:srgbClr val="192330"/>
                 </a:solidFill>
@@ -11066,7 +11349,7 @@
               </a:spcBef>
             </a:pPr>
             <a:r>
-              <a:rPr b="1" i="0" sz="900">
+              <a:rPr sz="900" b="1" i="0">
                 <a:solidFill>
                   <a:srgbClr val="B92319"/>
                 </a:solidFill>
@@ -11075,7 +11358,7 @@
               <a:t>• Public Accounting Heterogeneity: </a:t>
             </a:r>
             <a:r>
-              <a:rPr b="0" i="0" sz="850">
+              <a:rPr sz="850" b="0" i="0">
                 <a:solidFill>
                   <a:srgbClr val="192330"/>
                 </a:solidFill>
@@ -11091,7 +11374,7 @@
               </a:spcBef>
             </a:pPr>
             <a:r>
-              <a:rPr b="1" i="0" sz="900">
+              <a:rPr sz="900" b="1" i="0">
                 <a:solidFill>
                   <a:srgbClr val="B92319"/>
                 </a:solidFill>
@@ -11100,7 +11383,7 @@
               <a:t>• Omission of Patient Acuity: </a:t>
             </a:r>
             <a:r>
-              <a:rPr b="0" i="0" sz="850">
+              <a:rPr sz="850" b="0" i="0">
                 <a:solidFill>
                   <a:srgbClr val="192330"/>
                 </a:solidFill>
@@ -11116,7 +11399,7 @@
               </a:spcBef>
             </a:pPr>
             <a:r>
-              <a:rPr b="1" i="0" sz="900">
+              <a:rPr sz="900" b="1" i="0">
                 <a:solidFill>
                   <a:srgbClr val="B92319"/>
                 </a:solidFill>
@@ -11125,7 +11408,7 @@
               <a:t>• Single-State Regulatory Boundary: </a:t>
             </a:r>
             <a:r>
-              <a:rPr b="0" i="0" sz="850">
+              <a:rPr sz="850" b="0" i="0">
                 <a:solidFill>
                   <a:srgbClr val="192330"/>
                 </a:solidFill>
@@ -11178,6 +11461,7 @@
           <a:lstStyle/>
           <a:p>
             <a:pPr algn="ctr"/>
+            <a:endParaRPr/>
           </a:p>
         </p:txBody>
       </p:sp>
@@ -11221,6 +11505,7 @@
           <a:lstStyle/>
           <a:p>
             <a:pPr algn="ctr"/>
+            <a:endParaRPr/>
           </a:p>
         </p:txBody>
       </p:sp>
@@ -11241,7 +11526,7 @@
           <a:noFill/>
         </p:spPr>
         <p:txBody>
-          <a:bodyPr wrap="square" tIns="0" bIns="0" lIns="0" rIns="0">
+          <a:bodyPr wrap="square" lIns="0" tIns="0" rIns="0" bIns="0">
             <a:spAutoFit/>
           </a:bodyPr>
           <a:lstStyle/>
@@ -11276,13 +11561,13 @@
           <a:noFill/>
         </p:spPr>
         <p:txBody>
-          <a:bodyPr wrap="square" tIns="0" bIns="0" lIns="0" rIns="0">
+          <a:bodyPr wrap="square" lIns="0" tIns="0" rIns="0" bIns="0">
             <a:spAutoFit/>
           </a:bodyPr>
           <a:lstStyle/>
           <a:p>
             <a:r>
-              <a:rPr b="1" i="0" sz="900">
+              <a:rPr sz="900" b="1" i="0">
                 <a:solidFill>
                   <a:srgbClr val="1A446C"/>
                 </a:solidFill>
@@ -11291,7 +11576,7 @@
               <a:t>• Peer-Matched Benchmarks: </a:t>
             </a:r>
             <a:r>
-              <a:rPr b="0" i="0" sz="850">
+              <a:rPr sz="850" b="0" i="0">
                 <a:solidFill>
                   <a:srgbClr val="192330"/>
                 </a:solidFill>
@@ -11307,7 +11592,7 @@
               </a:spcBef>
             </a:pPr>
             <a:r>
-              <a:rPr b="1" i="0" sz="900">
+              <a:rPr sz="900" b="1" i="0">
                 <a:solidFill>
                   <a:srgbClr val="1A446C"/>
                 </a:solidFill>
@@ -11316,7 +11601,7 @@
               <a:t>• Buffer Capped-Rate Pressures: </a:t>
             </a:r>
             <a:r>
-              <a:rPr b="0" i="0" sz="850">
+              <a:rPr sz="850" b="0" i="0">
                 <a:solidFill>
                   <a:srgbClr val="192330"/>
                 </a:solidFill>
@@ -11332,7 +11617,7 @@
               </a:spcBef>
             </a:pPr>
             <a:r>
-              <a:rPr b="1" i="0" sz="900">
+              <a:rPr sz="900" b="1" i="0">
                 <a:solidFill>
                   <a:srgbClr val="1A446C"/>
                 </a:solidFill>
@@ -11341,7 +11626,7 @@
               <a:t>• Subacute Bed Redeployment: </a:t>
             </a:r>
             <a:r>
-              <a:rPr b="0" i="0" sz="850">
+              <a:rPr sz="850" b="0" i="0">
                 <a:solidFill>
                   <a:srgbClr val="192330"/>
                 </a:solidFill>
@@ -11357,7 +11642,7 @@
               </a:spcBef>
             </a:pPr>
             <a:r>
-              <a:rPr b="1" i="0" sz="900">
+              <a:rPr sz="900" b="1" i="0">
                 <a:solidFill>
                   <a:srgbClr val="1A446C"/>
                 </a:solidFill>
@@ -11366,7 +11651,7 @@
               <a:t>• Specialty Center Oversight: </a:t>
             </a:r>
             <a:r>
-              <a:rPr b="0" i="0" sz="850">
+              <a:rPr sz="850" b="0" i="0">
                 <a:solidFill>
                   <a:srgbClr val="192330"/>
                 </a:solidFill>
@@ -11419,6 +11704,7 @@
           <a:lstStyle/>
           <a:p>
             <a:pPr algn="ctr"/>
+            <a:endParaRPr/>
           </a:p>
         </p:txBody>
       </p:sp>
@@ -11462,6 +11748,7 @@
           <a:lstStyle/>
           <a:p>
             <a:pPr algn="ctr"/>
+            <a:endParaRPr/>
           </a:p>
         </p:txBody>
       </p:sp>
@@ -11482,7 +11769,7 @@
           <a:noFill/>
         </p:spPr>
         <p:txBody>
-          <a:bodyPr wrap="square" tIns="0" bIns="0" lIns="0" rIns="0">
+          <a:bodyPr wrap="square" lIns="0" tIns="0" rIns="0" bIns="0">
             <a:spAutoFit/>
           </a:bodyPr>
           <a:lstStyle/>
@@ -11517,13 +11804,13 @@
           <a:noFill/>
         </p:spPr>
         <p:txBody>
-          <a:bodyPr wrap="square" tIns="0" bIns="0" lIns="0" rIns="0">
+          <a:bodyPr wrap="square" lIns="0" tIns="0" rIns="0" bIns="0">
             <a:spAutoFit/>
           </a:bodyPr>
           <a:lstStyle/>
           <a:p>
             <a:r>
-              <a:rPr b="1" i="0" sz="900">
+              <a:rPr sz="900" b="1" i="0">
                 <a:solidFill>
                   <a:srgbClr val="00555F"/>
                 </a:solidFill>
@@ -11532,7 +11819,7 @@
               <a:t>• Multi-Period Markov Transitions: </a:t>
             </a:r>
             <a:r>
-              <a:rPr b="0" i="0" sz="850">
+              <a:rPr sz="850" b="0" i="0">
                 <a:solidFill>
                   <a:srgbClr val="192330"/>
                 </a:solidFill>
@@ -11548,7 +11835,7 @@
               </a:spcBef>
             </a:pPr>
             <a:r>
-              <a:rPr b="1" i="0" sz="900">
+              <a:rPr sz="900" b="1" i="0">
                 <a:solidFill>
                   <a:srgbClr val="00555F"/>
                 </a:solidFill>
@@ -11557,7 +11844,7 @@
               <a:t>• Clinical Quality Federation: </a:t>
             </a:r>
             <a:r>
-              <a:rPr b="0" i="0" sz="850">
+              <a:rPr sz="850" b="0" i="0">
                 <a:solidFill>
                   <a:srgbClr val="192330"/>
                 </a:solidFill>
@@ -11610,6 +11897,7 @@
           <a:lstStyle/>
           <a:p>
             <a:pPr algn="ctr"/>
+            <a:endParaRPr/>
           </a:p>
         </p:txBody>
       </p:sp>
@@ -11653,6 +11941,7 @@
           <a:lstStyle/>
           <a:p>
             <a:pPr algn="ctr"/>
+            <a:endParaRPr/>
           </a:p>
         </p:txBody>
       </p:sp>
@@ -11673,7 +11962,7 @@
           <a:noFill/>
         </p:spPr>
         <p:txBody>
-          <a:bodyPr wrap="square" tIns="0" bIns="0" lIns="0" rIns="0">
+          <a:bodyPr wrap="square" lIns="0" tIns="0" rIns="0" bIns="0">
             <a:spAutoFit/>
           </a:bodyPr>
           <a:lstStyle/>
@@ -11708,13 +11997,13 @@
           <a:noFill/>
         </p:spPr>
         <p:txBody>
-          <a:bodyPr wrap="square" tIns="0" bIns="0" lIns="0" rIns="0">
+          <a:bodyPr wrap="square" lIns="0" tIns="0" rIns="0" bIns="0">
             <a:spAutoFit/>
           </a:bodyPr>
           <a:lstStyle/>
           <a:p>
             <a:r>
-              <a:rPr b="1" i="0" sz="900">
+              <a:rPr sz="900" b="1" i="0">
                 <a:solidFill>
                   <a:srgbClr val="0A2540"/>
                 </a:solidFill>
@@ -11723,7 +12012,7 @@
               <a:t>• Predictive Fiscal Early Warning: </a:t>
             </a:r>
             <a:r>
-              <a:rPr b="0" i="0" sz="850">
+              <a:rPr sz="850" b="0" i="0">
                 <a:solidFill>
                   <a:srgbClr val="192330"/>
                 </a:solidFill>
@@ -11739,7 +12028,7 @@
               </a:spcBef>
             </a:pPr>
             <a:r>
-              <a:rPr b="1" i="0" sz="900">
+              <a:rPr sz="900" b="1" i="0">
                 <a:solidFill>
                   <a:srgbClr val="0A2540"/>
                 </a:solidFill>
@@ -11748,7 +12037,7 @@
               <a:t>• Multi-State Pipeline Scaling: </a:t>
             </a:r>
             <a:r>
-              <a:rPr b="0" i="0" sz="850">
+              <a:rPr sz="850" b="0" i="0">
                 <a:solidFill>
                   <a:srgbClr val="192330"/>
                 </a:solidFill>
@@ -11768,7 +12057,7 @@
 </file>
 
 <file path=ppt/slides/slide2.xml><?xml version="1.0" encoding="utf-8"?>
-<p:sld xmlns:a="http://schemas.openxmlformats.org/drawingml/2006/main" xmlns:p="http://schemas.openxmlformats.org/presentationml/2006/main" xmlns:r="http://schemas.openxmlformats.org/officeDocument/2006/relationships">
+<p:sld xmlns:a="http://schemas.openxmlformats.org/drawingml/2006/main" xmlns:r="http://schemas.openxmlformats.org/officeDocument/2006/relationships" xmlns:p="http://schemas.openxmlformats.org/presentationml/2006/main">
   <p:cSld>
     <p:spTree>
       <p:nvGrpSpPr>
@@ -11776,7 +12065,14 @@
         <p:cNvGrpSpPr/>
         <p:nvPr/>
       </p:nvGrpSpPr>
-      <p:grpSpPr/>
+      <p:grpSpPr>
+        <a:xfrm>
+          <a:off x="0" y="0"/>
+          <a:ext cx="0" cy="0"/>
+          <a:chOff x="0" y="0"/>
+          <a:chExt cx="0" cy="0"/>
+        </a:xfrm>
+      </p:grpSpPr>
       <p:sp>
         <p:nvSpPr>
           <p:cNvPr id="2" name="Rectangle 1"/>
@@ -11817,6 +12113,7 @@
           <a:lstStyle/>
           <a:p>
             <a:pPr algn="ctr"/>
+            <a:endParaRPr/>
           </a:p>
         </p:txBody>
       </p:sp>
@@ -11860,6 +12157,7 @@
           <a:lstStyle/>
           <a:p>
             <a:pPr algn="ctr"/>
+            <a:endParaRPr/>
           </a:p>
         </p:txBody>
       </p:sp>
@@ -11903,6 +12201,7 @@
           <a:lstStyle/>
           <a:p>
             <a:pPr algn="ctr"/>
+            <a:endParaRPr/>
           </a:p>
         </p:txBody>
       </p:sp>
@@ -11923,7 +12222,7 @@
           <a:noFill/>
         </p:spPr>
         <p:txBody>
-          <a:bodyPr wrap="square" tIns="0" bIns="0" lIns="0" rIns="0">
+          <a:bodyPr wrap="square" lIns="0" tIns="0" rIns="0" bIns="0">
             <a:spAutoFit/>
           </a:bodyPr>
           <a:lstStyle/>
@@ -12005,20 +12304,20 @@
           <a:noFill/>
         </p:spPr>
         <p:txBody>
-          <a:bodyPr wrap="none" tIns="0" bIns="0" lIns="0" rIns="0">
+          <a:bodyPr wrap="none" lIns="0" tIns="0" rIns="0" bIns="0">
             <a:spAutoFit/>
           </a:bodyPr>
           <a:lstStyle/>
           <a:p>
             <a:pPr>
-              <a:defRPr sz="850">
-                <a:solidFill>
-                  <a:srgbClr val="5A6978"/>
+              <a:defRPr sz="750">
+                <a:solidFill>
+                  <a:srgbClr val="8090A0"/>
                 </a:solidFill>
               </a:defRPr>
             </a:pPr>
             <a:r>
-              <a:t>CA3 Machine Learning Mini-Project  |  Healthcare Facility Analytics  |  Candidate: Aditya09977  |  Submission: Oct 2026</a:t>
+              <a:t>CA3 Machine Learning Mini-Project  |  Healthcare Facility Analytics  |  Yesh Raheja (23070521174) &amp; Aditya Gurve (23070521231)  |  Oct 2026</a:t>
             </a:r>
           </a:p>
         </p:txBody>
@@ -12065,6 +12364,7 @@
           <a:lstStyle/>
           <a:p>
             <a:pPr algn="ctr"/>
+            <a:endParaRPr/>
           </a:p>
         </p:txBody>
       </p:sp>
@@ -12108,6 +12408,7 @@
           <a:lstStyle/>
           <a:p>
             <a:pPr algn="ctr"/>
+            <a:endParaRPr/>
           </a:p>
         </p:txBody>
       </p:sp>
@@ -12128,7 +12429,7 @@
           <a:noFill/>
         </p:spPr>
         <p:txBody>
-          <a:bodyPr wrap="square" tIns="0" bIns="0" lIns="0" rIns="0">
+          <a:bodyPr wrap="square" lIns="0" tIns="0" rIns="0" bIns="0">
             <a:spAutoFit/>
           </a:bodyPr>
           <a:lstStyle/>
@@ -12163,13 +12464,13 @@
           <a:noFill/>
         </p:spPr>
         <p:txBody>
-          <a:bodyPr wrap="square" tIns="0" bIns="0" lIns="0" rIns="0">
+          <a:bodyPr wrap="square" lIns="0" tIns="0" rIns="0" bIns="0">
             <a:spAutoFit/>
           </a:bodyPr>
           <a:lstStyle/>
           <a:p>
             <a:r>
-              <a:rPr b="1" i="0" sz="1000">
+              <a:rPr sz="1000" b="1" i="0">
                 <a:solidFill>
                   <a:srgbClr val="0A2540"/>
                 </a:solidFill>
@@ -12178,7 +12479,7 @@
               <a:t>• Acute Labor Shortages &amp; Wage Inflation: </a:t>
             </a:r>
             <a:r>
-              <a:rPr b="0" i="0" sz="950">
+              <a:rPr sz="950" b="0" i="0">
                 <a:solidFill>
                   <a:srgbClr val="192330"/>
                 </a:solidFill>
@@ -12195,7 +12496,7 @@
               </a:spcBef>
             </a:pPr>
             <a:r>
-              <a:rPr b="1" i="0" sz="1000">
+              <a:rPr sz="1000" b="1" i="0">
                 <a:solidFill>
                   <a:srgbClr val="0A2540"/>
                 </a:solidFill>
@@ -12204,7 +12505,7 @@
               <a:t>• Reimbursement Margin Compression: </a:t>
             </a:r>
             <a:r>
-              <a:rPr b="0" i="0" sz="950">
+              <a:rPr sz="950" b="0" i="0">
                 <a:solidFill>
                   <a:srgbClr val="192330"/>
                 </a:solidFill>
@@ -12221,7 +12522,7 @@
               </a:spcBef>
             </a:pPr>
             <a:r>
-              <a:rPr b="1" i="0" sz="1000">
+              <a:rPr sz="1000" b="1" i="0">
                 <a:solidFill>
                   <a:srgbClr val="0A2540"/>
                 </a:solidFill>
@@ -12230,7 +12531,7 @@
               <a:t>• Fixed Capital Underutilization: </a:t>
             </a:r>
             <a:r>
-              <a:rPr b="0" i="0" sz="950">
+              <a:rPr sz="950" b="0" i="0">
                 <a:solidFill>
                   <a:srgbClr val="192330"/>
                 </a:solidFill>
@@ -12283,6 +12584,7 @@
           <a:lstStyle/>
           <a:p>
             <a:pPr algn="ctr"/>
+            <a:endParaRPr/>
           </a:p>
         </p:txBody>
       </p:sp>
@@ -12326,6 +12628,7 @@
           <a:lstStyle/>
           <a:p>
             <a:pPr algn="ctr"/>
+            <a:endParaRPr/>
           </a:p>
         </p:txBody>
       </p:sp>
@@ -12346,7 +12649,7 @@
           <a:noFill/>
         </p:spPr>
         <p:txBody>
-          <a:bodyPr wrap="square" tIns="0" bIns="0" lIns="0" rIns="0">
+          <a:bodyPr wrap="square" lIns="0" tIns="0" rIns="0" bIns="0">
             <a:spAutoFit/>
           </a:bodyPr>
           <a:lstStyle/>
@@ -12381,13 +12684,13 @@
           <a:noFill/>
         </p:spPr>
         <p:txBody>
-          <a:bodyPr wrap="square" tIns="0" bIns="0" lIns="0" rIns="0">
+          <a:bodyPr wrap="square" lIns="0" tIns="0" rIns="0" bIns="0">
             <a:spAutoFit/>
           </a:bodyPr>
           <a:lstStyle/>
           <a:p>
             <a:r>
-              <a:rPr b="1" i="0" sz="1000">
+              <a:rPr sz="1000" b="1" i="0">
                 <a:solidFill>
                   <a:srgbClr val="B92319"/>
                 </a:solidFill>
@@ -12396,7 +12699,7 @@
               <a:t>• The 'One-Size-Fits-All' Administrative Trap: </a:t>
             </a:r>
             <a:r>
-              <a:rPr b="0" i="0" sz="950">
+              <a:rPr sz="950" b="0" i="0">
                 <a:solidFill>
                   <a:srgbClr val="192330"/>
                 </a:solidFill>
@@ -12413,7 +12716,7 @@
               </a:spcBef>
             </a:pPr>
             <a:r>
-              <a:rPr b="1" i="0" sz="1000">
+              <a:rPr sz="1000" b="1" i="0">
                 <a:solidFill>
                   <a:srgbClr val="B92319"/>
                 </a:solidFill>
@@ -12422,7 +12725,7 @@
               <a:t>• Extreme Scale &amp; Mission Disparities: </a:t>
             </a:r>
             <a:r>
-              <a:rPr b="0" i="0" sz="950">
+              <a:rPr sz="950" b="0" i="0">
                 <a:solidFill>
                   <a:srgbClr val="192330"/>
                 </a:solidFill>
@@ -12439,7 +12742,7 @@
               </a:spcBef>
             </a:pPr>
             <a:r>
-              <a:rPr b="1" i="0" sz="1000">
+              <a:rPr sz="1000" b="1" i="0">
                 <a:solidFill>
                   <a:srgbClr val="B92319"/>
                 </a:solidFill>
@@ -12448,7 +12751,7 @@
               <a:t>• Necessity for Latent Peer Grouping: </a:t>
             </a:r>
             <a:r>
-              <a:rPr b="0" i="0" sz="950">
+              <a:rPr sz="950" b="0" i="0">
                 <a:solidFill>
                   <a:srgbClr val="192330"/>
                 </a:solidFill>
@@ -12501,6 +12804,7 @@
           <a:lstStyle/>
           <a:p>
             <a:pPr algn="ctr"/>
+            <a:endParaRPr/>
           </a:p>
         </p:txBody>
       </p:sp>
@@ -12544,6 +12848,7 @@
           <a:lstStyle/>
           <a:p>
             <a:pPr algn="ctr"/>
+            <a:endParaRPr/>
           </a:p>
         </p:txBody>
       </p:sp>
@@ -12564,7 +12869,7 @@
           <a:noFill/>
         </p:spPr>
         <p:txBody>
-          <a:bodyPr wrap="square" tIns="0" bIns="0" lIns="0" rIns="0">
+          <a:bodyPr wrap="square" lIns="0" tIns="0" rIns="0" bIns="0">
             <a:spAutoFit/>
           </a:bodyPr>
           <a:lstStyle/>
@@ -12599,13 +12904,13 @@
           <a:noFill/>
         </p:spPr>
         <p:txBody>
-          <a:bodyPr wrap="square" tIns="0" bIns="0" lIns="0" rIns="0">
+          <a:bodyPr wrap="square" lIns="0" tIns="0" rIns="0" bIns="0">
             <a:spAutoFit/>
           </a:bodyPr>
           <a:lstStyle/>
           <a:p>
             <a:r>
-              <a:rPr b="1" i="0" sz="1000">
+              <a:rPr sz="1000" b="1" i="0">
                 <a:solidFill>
                   <a:srgbClr val="007A87"/>
                 </a:solidFill>
@@ -12614,7 +12919,7 @@
               <a:t>• Absence of Pre-Labeled Ground Truth: </a:t>
             </a:r>
             <a:r>
-              <a:rPr b="0" i="0" sz="950">
+              <a:rPr sz="950" b="0" i="0">
                 <a:solidFill>
                   <a:srgbClr val="192330"/>
                 </a:solidFill>
@@ -12631,7 +12936,7 @@
               </a:spcBef>
             </a:pPr>
             <a:r>
-              <a:rPr b="1" i="0" sz="1000">
+              <a:rPr sz="1000" b="1" i="0">
                 <a:solidFill>
                   <a:srgbClr val="007A87"/>
                 </a:solidFill>
@@ -12640,7 +12945,7 @@
               <a:t>• Simultaneous Multivariate Synthesis: </a:t>
             </a:r>
             <a:r>
-              <a:rPr b="0" i="0" sz="950">
+              <a:rPr sz="950" b="0" i="0">
                 <a:solidFill>
                   <a:srgbClr val="192330"/>
                 </a:solidFill>
@@ -12657,7 +12962,7 @@
               </a:spcBef>
             </a:pPr>
             <a:r>
-              <a:rPr b="1" i="0" sz="1000">
+              <a:rPr sz="1000" b="1" i="0">
                 <a:solidFill>
                   <a:srgbClr val="007A87"/>
                 </a:solidFill>
@@ -12666,7 +12971,7 @@
               <a:t>• Data-Driven Health Administration: </a:t>
             </a:r>
             <a:r>
-              <a:rPr b="0" i="0" sz="950">
+              <a:rPr sz="950" b="0" i="0">
                 <a:solidFill>
                   <a:srgbClr val="192330"/>
                 </a:solidFill>
@@ -12719,6 +13024,7 @@
           <a:lstStyle/>
           <a:p>
             <a:pPr algn="ctr"/>
+            <a:endParaRPr/>
           </a:p>
         </p:txBody>
       </p:sp>
@@ -12762,6 +13068,7 @@
           <a:lstStyle/>
           <a:p>
             <a:pPr algn="ctr"/>
+            <a:endParaRPr/>
           </a:p>
         </p:txBody>
       </p:sp>
@@ -12782,7 +13089,7 @@
           <a:noFill/>
         </p:spPr>
         <p:txBody>
-          <a:bodyPr wrap="square" tIns="0" bIns="0" lIns="0" rIns="0">
+          <a:bodyPr wrap="square" lIns="0" tIns="0" rIns="0" bIns="0">
             <a:spAutoFit/>
           </a:bodyPr>
           <a:lstStyle/>
@@ -12817,13 +13124,13 @@
           <a:noFill/>
         </p:spPr>
         <p:txBody>
-          <a:bodyPr wrap="square" tIns="0" bIns="0" lIns="0" rIns="0">
+          <a:bodyPr wrap="square" lIns="0" tIns="0" rIns="0" bIns="0">
             <a:spAutoFit/>
           </a:bodyPr>
           <a:lstStyle/>
           <a:p>
             <a:r>
-              <a:rPr b="1" i="0" sz="1000">
+              <a:rPr sz="1000" b="1" i="0">
                 <a:solidFill>
                   <a:srgbClr val="1A446C"/>
                 </a:solidFill>
@@ -12832,7 +13139,7 @@
               <a:t>• Purely Administrative &amp; Financial Scope: </a:t>
             </a:r>
             <a:r>
-              <a:rPr b="0" i="0" sz="950">
+              <a:rPr sz="950" b="0" i="0">
                 <a:solidFill>
                   <a:srgbClr val="192330"/>
                 </a:solidFill>
@@ -12849,7 +13156,7 @@
               </a:spcBef>
             </a:pPr>
             <a:r>
-              <a:rPr b="1" i="0" sz="1000">
+              <a:rPr sz="1000" b="1" i="0">
                 <a:solidFill>
                   <a:srgbClr val="1A446C"/>
                 </a:solidFill>
@@ -12858,7 +13165,7 @@
               <a:t>• Strict Non-Causal Research Stance: </a:t>
             </a:r>
             <a:r>
-              <a:rPr b="0" i="0" sz="950">
+              <a:rPr sz="950" b="0" i="0">
                 <a:solidFill>
                   <a:srgbClr val="192330"/>
                 </a:solidFill>
@@ -12875,7 +13182,7 @@
               </a:spcBef>
             </a:pPr>
             <a:r>
-              <a:rPr b="1" i="0" sz="1000">
+              <a:rPr sz="1000" b="1" i="0">
                 <a:solidFill>
                   <a:srgbClr val="1A446C"/>
                 </a:solidFill>
@@ -12884,7 +13191,7 @@
               <a:t>• Academic Integrity Verification: </a:t>
             </a:r>
             <a:r>
-              <a:rPr b="0" i="0" sz="950">
+              <a:rPr sz="950" b="0" i="0">
                 <a:solidFill>
                   <a:srgbClr val="192330"/>
                 </a:solidFill>
@@ -12904,7 +13211,7 @@
 </file>
 
 <file path=ppt/slides/slide3.xml><?xml version="1.0" encoding="utf-8"?>
-<p:sld xmlns:a="http://schemas.openxmlformats.org/drawingml/2006/main" xmlns:p="http://schemas.openxmlformats.org/presentationml/2006/main" xmlns:r="http://schemas.openxmlformats.org/officeDocument/2006/relationships">
+<p:sld xmlns:a="http://schemas.openxmlformats.org/drawingml/2006/main" xmlns:r="http://schemas.openxmlformats.org/officeDocument/2006/relationships" xmlns:p="http://schemas.openxmlformats.org/presentationml/2006/main">
   <p:cSld>
     <p:spTree>
       <p:nvGrpSpPr>
@@ -12912,7 +13219,14 @@
         <p:cNvGrpSpPr/>
         <p:nvPr/>
       </p:nvGrpSpPr>
-      <p:grpSpPr/>
+      <p:grpSpPr>
+        <a:xfrm>
+          <a:off x="0" y="0"/>
+          <a:ext cx="0" cy="0"/>
+          <a:chOff x="0" y="0"/>
+          <a:chExt cx="0" cy="0"/>
+        </a:xfrm>
+      </p:grpSpPr>
       <p:sp>
         <p:nvSpPr>
           <p:cNvPr id="2" name="Rectangle 1"/>
@@ -12953,6 +13267,7 @@
           <a:lstStyle/>
           <a:p>
             <a:pPr algn="ctr"/>
+            <a:endParaRPr/>
           </a:p>
         </p:txBody>
       </p:sp>
@@ -12996,6 +13311,7 @@
           <a:lstStyle/>
           <a:p>
             <a:pPr algn="ctr"/>
+            <a:endParaRPr/>
           </a:p>
         </p:txBody>
       </p:sp>
@@ -13039,6 +13355,7 @@
           <a:lstStyle/>
           <a:p>
             <a:pPr algn="ctr"/>
+            <a:endParaRPr/>
           </a:p>
         </p:txBody>
       </p:sp>
@@ -13059,7 +13376,7 @@
           <a:noFill/>
         </p:spPr>
         <p:txBody>
-          <a:bodyPr wrap="square" tIns="0" bIns="0" lIns="0" rIns="0">
+          <a:bodyPr wrap="square" lIns="0" tIns="0" rIns="0" bIns="0">
             <a:spAutoFit/>
           </a:bodyPr>
           <a:lstStyle/>
@@ -13141,20 +13458,20 @@
           <a:noFill/>
         </p:spPr>
         <p:txBody>
-          <a:bodyPr wrap="none" tIns="0" bIns="0" lIns="0" rIns="0">
+          <a:bodyPr wrap="none" lIns="0" tIns="0" rIns="0" bIns="0">
             <a:spAutoFit/>
           </a:bodyPr>
           <a:lstStyle/>
           <a:p>
             <a:pPr>
-              <a:defRPr sz="850">
-                <a:solidFill>
-                  <a:srgbClr val="5A6978"/>
+              <a:defRPr sz="750">
+                <a:solidFill>
+                  <a:srgbClr val="8090A0"/>
                 </a:solidFill>
               </a:defRPr>
             </a:pPr>
             <a:r>
-              <a:t>CA3 Machine Learning Mini-Project  |  Healthcare Facility Analytics  |  Candidate: Aditya09977  |  Submission: Oct 2026</a:t>
+              <a:t>CA3 Machine Learning Mini-Project  |  Healthcare Facility Analytics  |  Yesh Raheja (23070521174) &amp; Aditya Gurve (23070521231)  |  Oct 2026</a:t>
             </a:r>
           </a:p>
         </p:txBody>
@@ -13201,6 +13518,7 @@
           <a:lstStyle/>
           <a:p>
             <a:pPr algn="ctr"/>
+            <a:endParaRPr/>
           </a:p>
         </p:txBody>
       </p:sp>
@@ -13244,6 +13562,7 @@
           <a:lstStyle/>
           <a:p>
             <a:pPr algn="ctr"/>
+            <a:endParaRPr/>
           </a:p>
         </p:txBody>
       </p:sp>
@@ -13264,7 +13583,7 @@
           <a:noFill/>
         </p:spPr>
         <p:txBody>
-          <a:bodyPr wrap="square" tIns="0" bIns="0" lIns="0" rIns="0">
+          <a:bodyPr wrap="square" lIns="0" tIns="0" rIns="0" bIns="0">
             <a:spAutoFit/>
           </a:bodyPr>
           <a:lstStyle/>
@@ -13299,13 +13618,13 @@
           <a:noFill/>
         </p:spPr>
         <p:txBody>
-          <a:bodyPr wrap="square" tIns="0" bIns="0" lIns="0" rIns="0">
+          <a:bodyPr wrap="square" lIns="0" tIns="0" rIns="0" bIns="0">
             <a:spAutoFit/>
           </a:bodyPr>
           <a:lstStyle/>
           <a:p>
             <a:r>
-              <a:rPr b="1" i="0" sz="950">
+              <a:rPr sz="950" b="1" i="0">
                 <a:solidFill>
                   <a:srgbClr val="007A87"/>
                 </a:solidFill>
@@ -13314,7 +13633,7 @@
               <a:t>• California HCAI Data Pipeline: </a:t>
             </a:r>
             <a:r>
-              <a:rPr b="0" i="0" sz="900">
+              <a:rPr sz="900" b="0" i="0">
                 <a:solidFill>
                   <a:srgbClr val="192330"/>
                 </a:solidFill>
@@ -13330,7 +13649,7 @@
               </a:spcBef>
             </a:pPr>
             <a:r>
-              <a:rPr b="1" i="0" sz="950">
+              <a:rPr sz="950" b="1" i="0">
                 <a:solidFill>
                   <a:srgbClr val="007A87"/>
                 </a:solidFill>
@@ -13339,7 +13658,7 @@
               <a:t>• Rigorous Entity Filtering: </a:t>
             </a:r>
             <a:r>
-              <a:rPr b="0" i="0" sz="900">
+              <a:rPr sz="900" b="0" i="0">
                 <a:solidFill>
                   <a:srgbClr val="192330"/>
                 </a:solidFill>
@@ -13355,7 +13674,7 @@
               </a:spcBef>
             </a:pPr>
             <a:r>
-              <a:rPr b="1" i="0" sz="950">
+              <a:rPr sz="950" b="1" i="0">
                 <a:solidFill>
                   <a:srgbClr val="007A87"/>
                 </a:solidFill>
@@ -13364,7 +13683,7 @@
               <a:t>• Annualized Calendar Normalization: </a:t>
             </a:r>
             <a:r>
-              <a:rPr b="0" i="0" sz="900">
+              <a:rPr sz="900" b="0" i="0">
                 <a:solidFill>
                   <a:srgbClr val="192330"/>
                 </a:solidFill>
@@ -13380,7 +13699,7 @@
               </a:spcBef>
             </a:pPr>
             <a:r>
-              <a:rPr b="1" i="0" sz="950">
+              <a:rPr sz="950" b="1" i="0">
                 <a:solidFill>
                   <a:srgbClr val="007A87"/>
                 </a:solidFill>
@@ -13389,7 +13708,7 @@
               <a:t>• Zero Missingness Audit: </a:t>
             </a:r>
             <a:r>
-              <a:rPr b="0" i="0" sz="900">
+              <a:rPr sz="900" b="0" i="0">
                 <a:solidFill>
                   <a:srgbClr val="192330"/>
                 </a:solidFill>
@@ -13442,6 +13761,7 @@
           <a:lstStyle/>
           <a:p>
             <a:pPr algn="ctr"/>
+            <a:endParaRPr/>
           </a:p>
         </p:txBody>
       </p:sp>
@@ -13485,6 +13805,7 @@
           <a:lstStyle/>
           <a:p>
             <a:pPr algn="ctr"/>
+            <a:endParaRPr/>
           </a:p>
         </p:txBody>
       </p:sp>
@@ -13505,7 +13826,7 @@
           <a:noFill/>
         </p:spPr>
         <p:txBody>
-          <a:bodyPr wrap="square" tIns="0" bIns="0" lIns="0" rIns="0">
+          <a:bodyPr wrap="square" lIns="0" tIns="0" rIns="0" bIns="0">
             <a:spAutoFit/>
           </a:bodyPr>
           <a:lstStyle/>
@@ -13540,13 +13861,13 @@
           <a:noFill/>
         </p:spPr>
         <p:txBody>
-          <a:bodyPr wrap="square" tIns="0" bIns="0" lIns="0" rIns="0">
+          <a:bodyPr wrap="square" lIns="0" tIns="0" rIns="0" bIns="0">
             <a:spAutoFit/>
           </a:bodyPr>
           <a:lstStyle/>
           <a:p>
             <a:r>
-              <a:rPr b="1" i="0" sz="950">
+              <a:rPr sz="950" b="1" i="0">
                 <a:solidFill>
                   <a:srgbClr val="0A2540"/>
                 </a:solidFill>
@@ -13555,7 +13876,7 @@
               <a:t>• 8 Multi-Dimensional Indicators: </a:t>
             </a:r>
             <a:r>
-              <a:rPr b="0" i="0" sz="900">
+              <a:rPr sz="900" b="0" i="0">
                 <a:solidFill>
                   <a:srgbClr val="192330"/>
                 </a:solidFill>
@@ -13571,7 +13892,7 @@
               </a:spcBef>
             </a:pPr>
             <a:r>
-              <a:rPr b="1" i="0" sz="950">
+              <a:rPr sz="950" b="1" i="0">
                 <a:solidFill>
                   <a:srgbClr val="0A2540"/>
                 </a:solidFill>
@@ -13580,7 +13901,7 @@
               <a:t>• Administrative Matrix Decoupling: </a:t>
             </a:r>
             <a:r>
-              <a:rPr b="0" i="0" sz="900">
+              <a:rPr sz="900" b="0" i="0">
                 <a:solidFill>
                   <a:srgbClr val="192330"/>
                 </a:solidFill>
@@ -13596,7 +13917,7 @@
               </a:spcBef>
             </a:pPr>
             <a:r>
-              <a:rPr b="1" i="0" sz="950">
+              <a:rPr sz="950" b="1" i="0">
                 <a:solidFill>
                   <a:srgbClr val="0A2540"/>
                 </a:solidFill>
@@ -13605,7 +13926,7 @@
               <a:t>• Mathematical Division Safety: </a:t>
             </a:r>
             <a:r>
-              <a:rPr b="0" i="0" sz="900">
+              <a:rPr sz="900" b="0" i="0">
                 <a:solidFill>
                   <a:srgbClr val="192330"/>
                 </a:solidFill>
@@ -13621,7 +13942,7 @@
               </a:spcBef>
             </a:pPr>
             <a:r>
-              <a:rPr b="1" i="0" sz="950">
+              <a:rPr sz="950" b="1" i="0">
                 <a:solidFill>
                   <a:srgbClr val="0A2540"/>
                 </a:solidFill>
@@ -13630,7 +13951,7 @@
               <a:t>• Robust Scaling &amp; Winsorization: </a:t>
             </a:r>
             <a:r>
-              <a:rPr b="0" i="0" sz="900">
+              <a:rPr sz="900" b="0" i="0">
                 <a:solidFill>
                   <a:srgbClr val="192330"/>
                 </a:solidFill>
@@ -13683,6 +14004,7 @@
           <a:lstStyle/>
           <a:p>
             <a:pPr algn="ctr"/>
+            <a:endParaRPr/>
           </a:p>
         </p:txBody>
       </p:sp>
@@ -13726,6 +14048,7 @@
           <a:lstStyle/>
           <a:p>
             <a:pPr algn="ctr"/>
+            <a:endParaRPr/>
           </a:p>
         </p:txBody>
       </p:sp>
@@ -13746,7 +14069,7 @@
           <a:noFill/>
         </p:spPr>
         <p:txBody>
-          <a:bodyPr wrap="square" tIns="0" bIns="0" lIns="0" rIns="0">
+          <a:bodyPr wrap="square" lIns="0" tIns="0" rIns="0" bIns="0">
             <a:spAutoFit/>
           </a:bodyPr>
           <a:lstStyle/>
@@ -13781,13 +14104,13 @@
           <a:noFill/>
         </p:spPr>
         <p:txBody>
-          <a:bodyPr wrap="square" tIns="0" bIns="0" lIns="0" rIns="0">
+          <a:bodyPr wrap="square" lIns="0" tIns="0" rIns="0" bIns="0">
             <a:spAutoFit/>
           </a:bodyPr>
           <a:lstStyle/>
           <a:p>
             <a:r>
-              <a:rPr b="1" i="0" sz="950">
+              <a:rPr sz="950" b="1" i="0">
                 <a:solidFill>
                   <a:srgbClr val="0A2540"/>
                 </a:solidFill>
@@ -13796,7 +14119,7 @@
               <a:t>• Partitioning Benchmark: </a:t>
             </a:r>
             <a:r>
-              <a:rPr b="0" i="0" sz="900">
+              <a:rPr sz="900" b="0" i="0">
                 <a:solidFill>
                   <a:srgbClr val="192330"/>
                 </a:solidFill>
@@ -13812,7 +14135,7 @@
               </a:spcBef>
             </a:pPr>
             <a:r>
-              <a:rPr b="1" i="0" sz="950">
+              <a:rPr sz="950" b="1" i="0">
                 <a:solidFill>
                   <a:srgbClr val="0A2540"/>
                 </a:solidFill>
@@ -13821,7 +14144,7 @@
               <a:t>• Hierarchical Exploration: </a:t>
             </a:r>
             <a:r>
-              <a:rPr b="0" i="0" sz="900">
+              <a:rPr sz="900" b="0" i="0">
                 <a:solidFill>
                   <a:srgbClr val="192330"/>
                 </a:solidFill>
@@ -13837,7 +14160,7 @@
               </a:spcBef>
             </a:pPr>
             <a:r>
-              <a:rPr b="1" i="0" sz="950">
+              <a:rPr sz="950" b="1" i="0">
                 <a:solidFill>
                   <a:srgbClr val="0A2540"/>
                 </a:solidFill>
@@ -13846,7 +14169,7 @@
               <a:t>• Density &amp; Anomaly Modeling: </a:t>
             </a:r>
             <a:r>
-              <a:rPr b="0" i="0" sz="900">
+              <a:rPr sz="900" b="0" i="0">
                 <a:solidFill>
                   <a:srgbClr val="192330"/>
                 </a:solidFill>
@@ -13862,7 +14185,7 @@
               </a:spcBef>
             </a:pPr>
             <a:r>
-              <a:rPr b="1" i="0" sz="950">
+              <a:rPr sz="950" b="1" i="0">
                 <a:solidFill>
                   <a:srgbClr val="0A2540"/>
                 </a:solidFill>
@@ -13871,7 +14194,7 @@
               <a:t>• Mathematical Validation: </a:t>
             </a:r>
             <a:r>
-              <a:rPr b="0" i="0" sz="900">
+              <a:rPr sz="900" b="0" i="0">
                 <a:solidFill>
                   <a:srgbClr val="192330"/>
                 </a:solidFill>
@@ -13924,6 +14247,7 @@
           <a:lstStyle/>
           <a:p>
             <a:pPr algn="ctr"/>
+            <a:endParaRPr/>
           </a:p>
         </p:txBody>
       </p:sp>
@@ -13967,6 +14291,7 @@
           <a:lstStyle/>
           <a:p>
             <a:pPr algn="ctr"/>
+            <a:endParaRPr/>
           </a:p>
         </p:txBody>
       </p:sp>
@@ -13987,7 +14312,7 @@
           <a:noFill/>
         </p:spPr>
         <p:txBody>
-          <a:bodyPr wrap="square" tIns="0" bIns="0" lIns="0" rIns="0">
+          <a:bodyPr wrap="square" lIns="0" tIns="0" rIns="0" bIns="0">
             <a:spAutoFit/>
           </a:bodyPr>
           <a:lstStyle/>
@@ -14022,13 +14347,13 @@
           <a:noFill/>
         </p:spPr>
         <p:txBody>
-          <a:bodyPr wrap="square" tIns="0" bIns="0" lIns="0" rIns="0">
+          <a:bodyPr wrap="square" lIns="0" tIns="0" rIns="0" bIns="0">
             <a:spAutoFit/>
           </a:bodyPr>
           <a:lstStyle/>
           <a:p>
             <a:r>
-              <a:rPr b="1" i="0" sz="950">
+              <a:rPr sz="950" b="1" i="0">
                 <a:solidFill>
                   <a:srgbClr val="007A87"/>
                 </a:solidFill>
@@ -14037,7 +14362,7 @@
               <a:t>• Quantitative Archetype Profiles: </a:t>
             </a:r>
             <a:r>
-              <a:rPr b="0" i="0" sz="900">
+              <a:rPr sz="900" b="0" i="0">
                 <a:solidFill>
                   <a:srgbClr val="192330"/>
                 </a:solidFill>
@@ -14053,7 +14378,7 @@
               </a:spcBef>
             </a:pPr>
             <a:r>
-              <a:rPr b="1" i="0" sz="950">
+              <a:rPr sz="950" b="1" i="0">
                 <a:solidFill>
                   <a:srgbClr val="007A87"/>
                 </a:solidFill>
@@ -14062,7 +14387,7 @@
               <a:t>• Interactive Streamlit Application: </a:t>
             </a:r>
             <a:r>
-              <a:rPr b="0" i="0" sz="900">
+              <a:rPr sz="900" b="0" i="0">
                 <a:solidFill>
                   <a:srgbClr val="192330"/>
                 </a:solidFill>
@@ -14078,7 +14403,7 @@
               </a:spcBef>
             </a:pPr>
             <a:r>
-              <a:rPr b="1" i="0" sz="950">
+              <a:rPr sz="950" b="1" i="0">
                 <a:solidFill>
                   <a:srgbClr val="007A87"/>
                 </a:solidFill>
@@ -14087,7 +14412,7 @@
               <a:t>• Academic Research Deliverables: </a:t>
             </a:r>
             <a:r>
-              <a:rPr b="0" i="0" sz="900">
+              <a:rPr sz="900" b="0" i="0">
                 <a:solidFill>
                   <a:srgbClr val="192330"/>
                 </a:solidFill>
@@ -14103,7 +14428,7 @@
               </a:spcBef>
             </a:pPr>
             <a:r>
-              <a:rPr b="1" i="0" sz="950">
+              <a:rPr sz="950" b="1" i="0">
                 <a:solidFill>
                   <a:srgbClr val="007A87"/>
                 </a:solidFill>
@@ -14112,7 +14437,7 @@
               <a:t>• Reproducible Open-Source Repository: </a:t>
             </a:r>
             <a:r>
-              <a:rPr b="0" i="0" sz="900">
+              <a:rPr sz="900" b="0" i="0">
                 <a:solidFill>
                   <a:srgbClr val="192330"/>
                 </a:solidFill>
@@ -14165,6 +14490,7 @@
           <a:lstStyle/>
           <a:p>
             <a:pPr algn="ctr"/>
+            <a:endParaRPr/>
           </a:p>
         </p:txBody>
       </p:sp>
@@ -14191,7 +14517,7 @@
           <a:lstStyle/>
           <a:p>
             <a:r>
-              <a:rPr b="1" i="0" sz="1000">
+              <a:rPr sz="1000" b="1" i="0">
                 <a:solidFill>
                   <a:srgbClr val="00555F"/>
                 </a:solidFill>
@@ -14200,7 +14526,7 @@
               <a:t>Key Academic Deliverables: </a:t>
             </a:r>
             <a:r>
-              <a:rPr b="0" i="0" sz="950">
+              <a:rPr sz="950" b="0" i="0">
                 <a:solidFill>
                   <a:srgbClr val="192330"/>
                 </a:solidFill>
@@ -14220,7 +14546,7 @@
 </file>
 
 <file path=ppt/slides/slide4.xml><?xml version="1.0" encoding="utf-8"?>
-<p:sld xmlns:a="http://schemas.openxmlformats.org/drawingml/2006/main" xmlns:p="http://schemas.openxmlformats.org/presentationml/2006/main" xmlns:r="http://schemas.openxmlformats.org/officeDocument/2006/relationships">
+<p:sld xmlns:a="http://schemas.openxmlformats.org/drawingml/2006/main" xmlns:r="http://schemas.openxmlformats.org/officeDocument/2006/relationships" xmlns:p="http://schemas.openxmlformats.org/presentationml/2006/main">
   <p:cSld>
     <p:spTree>
       <p:nvGrpSpPr>
@@ -14228,7 +14554,14 @@
         <p:cNvGrpSpPr/>
         <p:nvPr/>
       </p:nvGrpSpPr>
-      <p:grpSpPr/>
+      <p:grpSpPr>
+        <a:xfrm>
+          <a:off x="0" y="0"/>
+          <a:ext cx="0" cy="0"/>
+          <a:chOff x="0" y="0"/>
+          <a:chExt cx="0" cy="0"/>
+        </a:xfrm>
+      </p:grpSpPr>
       <p:sp>
         <p:nvSpPr>
           <p:cNvPr id="2" name="Rectangle 1"/>
@@ -14269,6 +14602,7 @@
           <a:lstStyle/>
           <a:p>
             <a:pPr algn="ctr"/>
+            <a:endParaRPr/>
           </a:p>
         </p:txBody>
       </p:sp>
@@ -14312,6 +14646,7 @@
           <a:lstStyle/>
           <a:p>
             <a:pPr algn="ctr"/>
+            <a:endParaRPr/>
           </a:p>
         </p:txBody>
       </p:sp>
@@ -14355,6 +14690,7 @@
           <a:lstStyle/>
           <a:p>
             <a:pPr algn="ctr"/>
+            <a:endParaRPr/>
           </a:p>
         </p:txBody>
       </p:sp>
@@ -14375,7 +14711,7 @@
           <a:noFill/>
         </p:spPr>
         <p:txBody>
-          <a:bodyPr wrap="square" tIns="0" bIns="0" lIns="0" rIns="0">
+          <a:bodyPr wrap="square" lIns="0" tIns="0" rIns="0" bIns="0">
             <a:spAutoFit/>
           </a:bodyPr>
           <a:lstStyle/>
@@ -14457,20 +14793,20 @@
           <a:noFill/>
         </p:spPr>
         <p:txBody>
-          <a:bodyPr wrap="none" tIns="0" bIns="0" lIns="0" rIns="0">
+          <a:bodyPr wrap="none" lIns="0" tIns="0" rIns="0" bIns="0">
             <a:spAutoFit/>
           </a:bodyPr>
           <a:lstStyle/>
           <a:p>
             <a:pPr>
-              <a:defRPr sz="850">
-                <a:solidFill>
-                  <a:srgbClr val="5A6978"/>
+              <a:defRPr sz="750">
+                <a:solidFill>
+                  <a:srgbClr val="8090A0"/>
                 </a:solidFill>
               </a:defRPr>
             </a:pPr>
             <a:r>
-              <a:t>CA3 Machine Learning Mini-Project  |  Healthcare Facility Analytics  |  Candidate: Aditya09977  |  Submission: Oct 2026</a:t>
+              <a:t>CA3 Machine Learning Mini-Project  |  Healthcare Facility Analytics  |  Yesh Raheja (23070521174) &amp; Aditya Gurve (23070521231)  |  Oct 2026</a:t>
             </a:r>
           </a:p>
         </p:txBody>
@@ -14517,6 +14853,7 @@
           <a:lstStyle/>
           <a:p>
             <a:pPr algn="ctr"/>
+            <a:endParaRPr/>
           </a:p>
         </p:txBody>
       </p:sp>
@@ -14560,6 +14897,7 @@
           <a:lstStyle/>
           <a:p>
             <a:pPr algn="ctr"/>
+            <a:endParaRPr/>
           </a:p>
         </p:txBody>
       </p:sp>
@@ -14580,7 +14918,7 @@
           <a:noFill/>
         </p:spPr>
         <p:txBody>
-          <a:bodyPr wrap="square" tIns="0" bIns="0" lIns="0" rIns="0">
+          <a:bodyPr wrap="square" lIns="0" tIns="0" rIns="0" bIns="0">
             <a:spAutoFit/>
           </a:bodyPr>
           <a:lstStyle/>
@@ -14615,13 +14953,13 @@
           <a:noFill/>
         </p:spPr>
         <p:txBody>
-          <a:bodyPr wrap="square" tIns="0" bIns="0" lIns="0" rIns="0">
+          <a:bodyPr wrap="square" lIns="0" tIns="0" rIns="0" bIns="0">
             <a:spAutoFit/>
           </a:bodyPr>
           <a:lstStyle/>
           <a:p>
             <a:r>
-              <a:rPr b="1" i="0" sz="900">
+              <a:rPr sz="900" b="1" i="0">
                 <a:solidFill>
                   <a:srgbClr val="0A2540"/>
                 </a:solidFill>
@@ -14630,7 +14968,7 @@
               <a:t>[1] Zarrin et al. (2022) </a:t>
             </a:r>
             <a:r>
-              <a:rPr b="0" i="1" sz="850">
+              <a:rPr sz="850" b="0" i="1">
                 <a:solidFill>
                   <a:srgbClr val="5A6978"/>
                 </a:solidFill>
@@ -14639,7 +14977,7 @@
               <a:t>[Health Care Manag. Sci.]: </a:t>
             </a:r>
             <a:r>
-              <a:rPr b="0" i="0" sz="850">
+              <a:rPr sz="850" b="0" i="0">
                 <a:solidFill>
                   <a:srgbClr val="192330"/>
                 </a:solidFill>
@@ -14655,7 +14993,7 @@
               </a:spcBef>
             </a:pPr>
             <a:r>
-              <a:rPr b="1" i="0" sz="900">
+              <a:rPr sz="900" b="1" i="0">
                 <a:solidFill>
                   <a:srgbClr val="0A2540"/>
                 </a:solidFill>
@@ -14664,7 +15002,7 @@
               <a:t>[2] Yousefi et al. (2024) </a:t>
             </a:r>
             <a:r>
-              <a:rPr b="0" i="1" sz="850">
+              <a:rPr sz="850" b="0" i="1">
                 <a:solidFill>
                   <a:srgbClr val="5A6978"/>
                 </a:solidFill>
@@ -14673,7 +15011,7 @@
               <a:t>[Socio-Econ. Plan. Sci.]: </a:t>
             </a:r>
             <a:r>
-              <a:rPr b="0" i="0" sz="850">
+              <a:rPr sz="850" b="0" i="0">
                 <a:solidFill>
                   <a:srgbClr val="192330"/>
                 </a:solidFill>
@@ -14689,7 +15027,7 @@
               </a:spcBef>
             </a:pPr>
             <a:r>
-              <a:rPr b="1" i="0" sz="900">
+              <a:rPr sz="900" b="1" i="0">
                 <a:solidFill>
                   <a:srgbClr val="0A2540"/>
                 </a:solidFill>
@@ -14698,7 +15036,7 @@
               <a:t>[3] Hao et al. (2023) </a:t>
             </a:r>
             <a:r>
-              <a:rPr b="0" i="1" sz="850">
+              <a:rPr sz="850" b="0" i="1">
                 <a:solidFill>
                   <a:srgbClr val="5A6978"/>
                 </a:solidFill>
@@ -14707,7 +15045,7 @@
               <a:t>[BMC Health Serv. Res.]: </a:t>
             </a:r>
             <a:r>
-              <a:rPr b="0" i="0" sz="850">
+              <a:rPr sz="850" b="0" i="0">
                 <a:solidFill>
                   <a:srgbClr val="192330"/>
                 </a:solidFill>
@@ -14723,7 +15061,7 @@
               </a:spcBef>
             </a:pPr>
             <a:r>
-              <a:rPr b="1" i="0" sz="900">
+              <a:rPr sz="900" b="1" i="0">
                 <a:solidFill>
                   <a:srgbClr val="0A2540"/>
                 </a:solidFill>
@@ -14732,7 +15070,7 @@
               <a:t>[8] Joynt Maddox et al. (2022) </a:t>
             </a:r>
             <a:r>
-              <a:rPr b="0" i="1" sz="850">
+              <a:rPr sz="850" b="0" i="1">
                 <a:solidFill>
                   <a:srgbClr val="5A6978"/>
                 </a:solidFill>
@@ -14741,7 +15079,7 @@
               <a:t>[PLOS ONE]: </a:t>
             </a:r>
             <a:r>
-              <a:rPr b="0" i="0" sz="850">
+              <a:rPr sz="850" b="0" i="0">
                 <a:solidFill>
                   <a:srgbClr val="192330"/>
                 </a:solidFill>
@@ -14757,7 +15095,7 @@
               </a:spcBef>
             </a:pPr>
             <a:r>
-              <a:rPr b="1" i="0" sz="900">
+              <a:rPr sz="900" b="1" i="0">
                 <a:solidFill>
                   <a:srgbClr val="0A2540"/>
                 </a:solidFill>
@@ -14766,7 +15104,7 @@
               <a:t>[9] Qin et al. (2025) </a:t>
             </a:r>
             <a:r>
-              <a:rPr b="0" i="1" sz="850">
+              <a:rPr sz="850" b="0" i="1">
                 <a:solidFill>
                   <a:srgbClr val="5A6978"/>
                 </a:solidFill>
@@ -14775,7 +15113,7 @@
               <a:t>[Frontiers Public Health]: </a:t>
             </a:r>
             <a:r>
-              <a:rPr b="0" i="0" sz="850">
+              <a:rPr sz="850" b="0" i="0">
                 <a:solidFill>
                   <a:srgbClr val="192330"/>
                 </a:solidFill>
@@ -14828,6 +15166,7 @@
           <a:lstStyle/>
           <a:p>
             <a:pPr algn="ctr"/>
+            <a:endParaRPr/>
           </a:p>
         </p:txBody>
       </p:sp>
@@ -14871,6 +15210,7 @@
           <a:lstStyle/>
           <a:p>
             <a:pPr algn="ctr"/>
+            <a:endParaRPr/>
           </a:p>
         </p:txBody>
       </p:sp>
@@ -14891,7 +15231,7 @@
           <a:noFill/>
         </p:spPr>
         <p:txBody>
-          <a:bodyPr wrap="square" tIns="0" bIns="0" lIns="0" rIns="0">
+          <a:bodyPr wrap="square" lIns="0" tIns="0" rIns="0" bIns="0">
             <a:spAutoFit/>
           </a:bodyPr>
           <a:lstStyle/>
@@ -14926,13 +15266,13 @@
           <a:noFill/>
         </p:spPr>
         <p:txBody>
-          <a:bodyPr wrap="square" tIns="0" bIns="0" lIns="0" rIns="0">
+          <a:bodyPr wrap="square" lIns="0" tIns="0" rIns="0" bIns="0">
             <a:spAutoFit/>
           </a:bodyPr>
           <a:lstStyle/>
           <a:p>
             <a:r>
-              <a:rPr b="1" i="0" sz="900">
+              <a:rPr sz="900" b="1" i="0">
                 <a:solidFill>
                   <a:srgbClr val="007A87"/>
                 </a:solidFill>
@@ -14941,7 +15281,7 @@
               <a:t>[4] Benmoussa et al. (2024) </a:t>
             </a:r>
             <a:r>
-              <a:rPr b="0" i="1" sz="850">
+              <a:rPr sz="850" b="0" i="1">
                 <a:solidFill>
                   <a:srgbClr val="5A6978"/>
                 </a:solidFill>
@@ -14950,7 +15290,7 @@
               <a:t>[BMC Health Serv. Res.]: </a:t>
             </a:r>
             <a:r>
-              <a:rPr b="0" i="0" sz="850">
+              <a:rPr sz="850" b="0" i="0">
                 <a:solidFill>
                   <a:srgbClr val="192330"/>
                 </a:solidFill>
@@ -14966,7 +15306,7 @@
               </a:spcBef>
             </a:pPr>
             <a:r>
-              <a:rPr b="1" i="0" sz="900">
+              <a:rPr sz="900" b="1" i="0">
                 <a:solidFill>
                   <a:srgbClr val="007A87"/>
                 </a:solidFill>
@@ -14975,7 +15315,7 @@
               <a:t>[5] Desai et al. (2023) </a:t>
             </a:r>
             <a:r>
-              <a:rPr b="0" i="1" sz="850">
+              <a:rPr sz="850" b="0" i="1">
                 <a:solidFill>
                   <a:srgbClr val="5A6978"/>
                 </a:solidFill>
@@ -14984,7 +15324,7 @@
               <a:t>[IEEE Access]: </a:t>
             </a:r>
             <a:r>
-              <a:rPr b="0" i="0" sz="850">
+              <a:rPr sz="850" b="0" i="0">
                 <a:solidFill>
                   <a:srgbClr val="192330"/>
                 </a:solidFill>
@@ -15000,7 +15340,7 @@
               </a:spcBef>
             </a:pPr>
             <a:r>
-              <a:rPr b="1" i="0" sz="900">
+              <a:rPr sz="900" b="1" i="0">
                 <a:solidFill>
                   <a:srgbClr val="007A87"/>
                 </a:solidFill>
@@ -15009,7 +15349,7 @@
               <a:t>[6] Vosoughi et al. (2024) </a:t>
             </a:r>
             <a:r>
-              <a:rPr b="0" i="1" sz="850">
+              <a:rPr sz="850" b="0" i="1">
                 <a:solidFill>
                   <a:srgbClr val="5A6978"/>
                 </a:solidFill>
@@ -15018,7 +15358,7 @@
               <a:t>[PLOS ONE]: </a:t>
             </a:r>
             <a:r>
-              <a:rPr b="0" i="0" sz="850">
+              <a:rPr sz="850" b="0" i="0">
                 <a:solidFill>
                   <a:srgbClr val="192330"/>
                 </a:solidFill>
@@ -15034,7 +15374,7 @@
               </a:spcBef>
             </a:pPr>
             <a:r>
-              <a:rPr b="1" i="0" sz="900">
+              <a:rPr sz="900" b="1" i="0">
                 <a:solidFill>
                   <a:srgbClr val="007A87"/>
                 </a:solidFill>
@@ -15043,7 +15383,7 @@
               <a:t>[10] Vluggen et al. (2023) </a:t>
             </a:r>
             <a:r>
-              <a:rPr b="0" i="1" sz="850">
+              <a:rPr sz="850" b="0" i="1">
                 <a:solidFill>
                   <a:srgbClr val="5A6978"/>
                 </a:solidFill>
@@ -15052,7 +15392,7 @@
               <a:t>[BMC Health Serv. Res.]: </a:t>
             </a:r>
             <a:r>
-              <a:rPr b="0" i="0" sz="850">
+              <a:rPr sz="850" b="0" i="0">
                 <a:solidFill>
                   <a:srgbClr val="192330"/>
                 </a:solidFill>
@@ -15068,7 +15408,7 @@
               </a:spcBef>
             </a:pPr>
             <a:r>
-              <a:rPr b="1" i="0" sz="900">
+              <a:rPr sz="900" b="1" i="0">
                 <a:solidFill>
                   <a:srgbClr val="007A87"/>
                 </a:solidFill>
@@ -15077,7 +15417,7 @@
               <a:t>[16] Khuntia et al. (2022) </a:t>
             </a:r>
             <a:r>
-              <a:rPr b="0" i="1" sz="850">
+              <a:rPr sz="850" b="0" i="1">
                 <a:solidFill>
                   <a:srgbClr val="5A6978"/>
                 </a:solidFill>
@@ -15086,7 +15426,7 @@
               <a:t>[J. Med. Internet Res.]: </a:t>
             </a:r>
             <a:r>
-              <a:rPr b="0" i="0" sz="850">
+              <a:rPr sz="850" b="0" i="0">
                 <a:solidFill>
                   <a:srgbClr val="192330"/>
                 </a:solidFill>
@@ -15139,6 +15479,7 @@
           <a:lstStyle/>
           <a:p>
             <a:pPr algn="ctr"/>
+            <a:endParaRPr/>
           </a:p>
         </p:txBody>
       </p:sp>
@@ -15182,6 +15523,7 @@
           <a:lstStyle/>
           <a:p>
             <a:pPr algn="ctr"/>
+            <a:endParaRPr/>
           </a:p>
         </p:txBody>
       </p:sp>
@@ -15202,7 +15544,7 @@
           <a:noFill/>
         </p:spPr>
         <p:txBody>
-          <a:bodyPr wrap="square" tIns="0" bIns="0" lIns="0" rIns="0">
+          <a:bodyPr wrap="square" lIns="0" tIns="0" rIns="0" bIns="0">
             <a:spAutoFit/>
           </a:bodyPr>
           <a:lstStyle/>
@@ -15237,13 +15579,13 @@
           <a:noFill/>
         </p:spPr>
         <p:txBody>
-          <a:bodyPr wrap="square" tIns="0" bIns="0" lIns="0" rIns="0">
+          <a:bodyPr wrap="square" lIns="0" tIns="0" rIns="0" bIns="0">
             <a:spAutoFit/>
           </a:bodyPr>
           <a:lstStyle/>
           <a:p>
             <a:r>
-              <a:rPr b="1" i="0" sz="900">
+              <a:rPr sz="900" b="1" i="0">
                 <a:solidFill>
                   <a:srgbClr val="1A446C"/>
                 </a:solidFill>
@@ -15252,7 +15594,7 @@
               <a:t>[11] Jousilahti et al. (2023) </a:t>
             </a:r>
             <a:r>
-              <a:rPr b="0" i="1" sz="850">
+              <a:rPr sz="850" b="0" i="1">
                 <a:solidFill>
                   <a:srgbClr val="5A6978"/>
                 </a:solidFill>
@@ -15261,7 +15603,7 @@
               <a:t>[BMC Health Serv. Res.]: </a:t>
             </a:r>
             <a:r>
-              <a:rPr b="0" i="0" sz="850">
+              <a:rPr sz="850" b="0" i="0">
                 <a:solidFill>
                   <a:srgbClr val="192330"/>
                 </a:solidFill>
@@ -15277,7 +15619,7 @@
               </a:spcBef>
             </a:pPr>
             <a:r>
-              <a:rPr b="1" i="0" sz="900">
+              <a:rPr sz="900" b="1" i="0">
                 <a:solidFill>
                   <a:srgbClr val="1A446C"/>
                 </a:solidFill>
@@ -15286,7 +15628,7 @@
               <a:t>[12] Al-Makhadmeh et al. (2023) </a:t>
             </a:r>
             <a:r>
-              <a:rPr b="0" i="1" sz="850">
+              <a:rPr sz="850" b="0" i="1">
                 <a:solidFill>
                   <a:srgbClr val="5A6978"/>
                 </a:solidFill>
@@ -15295,7 +15637,7 @@
               <a:t>[Healthcare (MDPI)]: </a:t>
             </a:r>
             <a:r>
-              <a:rPr b="0" i="0" sz="850">
+              <a:rPr sz="850" b="0" i="0">
                 <a:solidFill>
                   <a:srgbClr val="192330"/>
                 </a:solidFill>
@@ -15311,7 +15653,7 @@
               </a:spcBef>
             </a:pPr>
             <a:r>
-              <a:rPr b="1" i="0" sz="900">
+              <a:rPr sz="900" b="1" i="0">
                 <a:solidFill>
                   <a:srgbClr val="1A446C"/>
                 </a:solidFill>
@@ -15320,7 +15662,7 @@
               <a:t>[13] Jiang et al. (2024) </a:t>
             </a:r>
             <a:r>
-              <a:rPr b="0" i="1" sz="850">
+              <a:rPr sz="850" b="0" i="1">
                 <a:solidFill>
                   <a:srgbClr val="5A6978"/>
                 </a:solidFill>
@@ -15329,7 +15671,7 @@
               <a:t>[Comput. Biol. Med.]: </a:t>
             </a:r>
             <a:r>
-              <a:rPr b="0" i="0" sz="850">
+              <a:rPr sz="850" b="0" i="0">
                 <a:solidFill>
                   <a:srgbClr val="192330"/>
                 </a:solidFill>
@@ -15345,7 +15687,7 @@
               </a:spcBef>
             </a:pPr>
             <a:r>
-              <a:rPr b="1" i="0" sz="900">
+              <a:rPr sz="900" b="1" i="0">
                 <a:solidFill>
                   <a:srgbClr val="1A446C"/>
                 </a:solidFill>
@@ -15354,7 +15696,7 @@
               <a:t>[14] Piccialli et al. (2021) </a:t>
             </a:r>
             <a:r>
-              <a:rPr b="0" i="1" sz="850">
+              <a:rPr sz="850" b="0" i="1">
                 <a:solidFill>
                   <a:srgbClr val="5A6978"/>
                 </a:solidFill>
@@ -15363,7 +15705,7 @@
               <a:t>[Scientific Reports]: </a:t>
             </a:r>
             <a:r>
-              <a:rPr b="0" i="0" sz="850">
+              <a:rPr sz="850" b="0" i="0">
                 <a:solidFill>
                   <a:srgbClr val="192330"/>
                 </a:solidFill>
@@ -15379,7 +15721,7 @@
               </a:spcBef>
             </a:pPr>
             <a:r>
-              <a:rPr b="1" i="0" sz="900">
+              <a:rPr sz="900" b="1" i="0">
                 <a:solidFill>
                   <a:srgbClr val="1A446C"/>
                 </a:solidFill>
@@ -15388,7 +15730,7 @@
               <a:t>[15] Schreyögg et al. (2023) </a:t>
             </a:r>
             <a:r>
-              <a:rPr b="0" i="1" sz="850">
+              <a:rPr sz="850" b="0" i="1">
                 <a:solidFill>
                   <a:srgbClr val="5A6978"/>
                 </a:solidFill>
@@ -15397,7 +15739,7 @@
               <a:t>[Health Economics]: </a:t>
             </a:r>
             <a:r>
-              <a:rPr b="0" i="0" sz="850">
+              <a:rPr sz="850" b="0" i="0">
                 <a:solidFill>
                   <a:srgbClr val="192330"/>
                 </a:solidFill>
@@ -15450,6 +15792,7 @@
           <a:lstStyle/>
           <a:p>
             <a:pPr algn="ctr"/>
+            <a:endParaRPr/>
           </a:p>
         </p:txBody>
       </p:sp>
@@ -15493,6 +15836,7 @@
           <a:lstStyle/>
           <a:p>
             <a:pPr algn="ctr"/>
+            <a:endParaRPr/>
           </a:p>
         </p:txBody>
       </p:sp>
@@ -15513,7 +15857,7 @@
           <a:noFill/>
         </p:spPr>
         <p:txBody>
-          <a:bodyPr wrap="square" tIns="0" bIns="0" lIns="0" rIns="0">
+          <a:bodyPr wrap="square" lIns="0" tIns="0" rIns="0" bIns="0">
             <a:spAutoFit/>
           </a:bodyPr>
           <a:lstStyle/>
@@ -15548,13 +15892,13 @@
           <a:noFill/>
         </p:spPr>
         <p:txBody>
-          <a:bodyPr wrap="square" tIns="0" bIns="0" lIns="0" rIns="0">
+          <a:bodyPr wrap="square" lIns="0" tIns="0" rIns="0" bIns="0">
             <a:spAutoFit/>
           </a:bodyPr>
           <a:lstStyle/>
           <a:p>
             <a:r>
-              <a:rPr b="1" i="0" sz="1000">
+              <a:rPr sz="1000" b="1" i="0">
                 <a:solidFill>
                   <a:srgbClr val="B92319"/>
                 </a:solidFill>
@@ -15563,7 +15907,7 @@
               <a:t>Prior Literature Gap: </a:t>
             </a:r>
             <a:r>
-              <a:rPr b="0" i="0" sz="950">
+              <a:rPr sz="950" b="0" i="0">
                 <a:solidFill>
                   <a:srgbClr val="192330"/>
                 </a:solidFill>
@@ -15580,7 +15924,7 @@
               </a:spcBef>
             </a:pPr>
             <a:r>
-              <a:rPr b="1" i="0" sz="1000">
+              <a:rPr sz="1000" b="1" i="0">
                 <a:solidFill>
                   <a:srgbClr val="00555F"/>
                 </a:solidFill>
@@ -15589,7 +15933,7 @@
               <a:t>Our Contribution: </a:t>
             </a:r>
             <a:r>
-              <a:rPr b="0" i="0" sz="950">
+              <a:rPr sz="950" b="0" i="0">
                 <a:solidFill>
                   <a:srgbClr val="192330"/>
                 </a:solidFill>
@@ -15609,7 +15953,7 @@
 </file>
 
 <file path=ppt/slides/slide5.xml><?xml version="1.0" encoding="utf-8"?>
-<p:sld xmlns:a="http://schemas.openxmlformats.org/drawingml/2006/main" xmlns:p="http://schemas.openxmlformats.org/presentationml/2006/main" xmlns:r="http://schemas.openxmlformats.org/officeDocument/2006/relationships">
+<p:sld xmlns:a="http://schemas.openxmlformats.org/drawingml/2006/main" xmlns:r="http://schemas.openxmlformats.org/officeDocument/2006/relationships" xmlns:p="http://schemas.openxmlformats.org/presentationml/2006/main">
   <p:cSld>
     <p:spTree>
       <p:nvGrpSpPr>
@@ -15617,7 +15961,14 @@
         <p:cNvGrpSpPr/>
         <p:nvPr/>
       </p:nvGrpSpPr>
-      <p:grpSpPr/>
+      <p:grpSpPr>
+        <a:xfrm>
+          <a:off x="0" y="0"/>
+          <a:ext cx="0" cy="0"/>
+          <a:chOff x="0" y="0"/>
+          <a:chExt cx="0" cy="0"/>
+        </a:xfrm>
+      </p:grpSpPr>
       <p:sp>
         <p:nvSpPr>
           <p:cNvPr id="2" name="Rectangle 1"/>
@@ -15658,6 +16009,7 @@
           <a:lstStyle/>
           <a:p>
             <a:pPr algn="ctr"/>
+            <a:endParaRPr/>
           </a:p>
         </p:txBody>
       </p:sp>
@@ -15701,6 +16053,7 @@
           <a:lstStyle/>
           <a:p>
             <a:pPr algn="ctr"/>
+            <a:endParaRPr/>
           </a:p>
         </p:txBody>
       </p:sp>
@@ -15744,6 +16097,7 @@
           <a:lstStyle/>
           <a:p>
             <a:pPr algn="ctr"/>
+            <a:endParaRPr/>
           </a:p>
         </p:txBody>
       </p:sp>
@@ -15764,7 +16118,7 @@
           <a:noFill/>
         </p:spPr>
         <p:txBody>
-          <a:bodyPr wrap="square" tIns="0" bIns="0" lIns="0" rIns="0">
+          <a:bodyPr wrap="square" lIns="0" tIns="0" rIns="0" bIns="0">
             <a:spAutoFit/>
           </a:bodyPr>
           <a:lstStyle/>
@@ -15846,20 +16200,20 @@
           <a:noFill/>
         </p:spPr>
         <p:txBody>
-          <a:bodyPr wrap="none" tIns="0" bIns="0" lIns="0" rIns="0">
+          <a:bodyPr wrap="none" lIns="0" tIns="0" rIns="0" bIns="0">
             <a:spAutoFit/>
           </a:bodyPr>
           <a:lstStyle/>
           <a:p>
             <a:pPr>
-              <a:defRPr sz="850">
-                <a:solidFill>
-                  <a:srgbClr val="5A6978"/>
+              <a:defRPr sz="750">
+                <a:solidFill>
+                  <a:srgbClr val="8090A0"/>
                 </a:solidFill>
               </a:defRPr>
             </a:pPr>
             <a:r>
-              <a:t>CA3 Machine Learning Mini-Project  |  Healthcare Facility Analytics  |  Candidate: Aditya09977  |  Submission: Oct 2026</a:t>
+              <a:t>CA3 Machine Learning Mini-Project  |  Healthcare Facility Analytics  |  Yesh Raheja (23070521174) &amp; Aditya Gurve (23070521231)  |  Oct 2026</a:t>
             </a:r>
           </a:p>
         </p:txBody>
@@ -15906,6 +16260,7 @@
           <a:lstStyle/>
           <a:p>
             <a:pPr algn="ctr"/>
+            <a:endParaRPr/>
           </a:p>
         </p:txBody>
       </p:sp>
@@ -15949,6 +16304,7 @@
           <a:lstStyle/>
           <a:p>
             <a:pPr algn="ctr"/>
+            <a:endParaRPr/>
           </a:p>
         </p:txBody>
       </p:sp>
@@ -15969,7 +16325,7 @@
           <a:noFill/>
         </p:spPr>
         <p:txBody>
-          <a:bodyPr wrap="square" tIns="0" bIns="0" lIns="0" rIns="0">
+          <a:bodyPr wrap="square" lIns="0" tIns="0" rIns="0" bIns="0">
             <a:spAutoFit/>
           </a:bodyPr>
           <a:lstStyle/>
@@ -16004,13 +16360,13 @@
           <a:noFill/>
         </p:spPr>
         <p:txBody>
-          <a:bodyPr wrap="square" tIns="0" bIns="0" lIns="0" rIns="0">
+          <a:bodyPr wrap="square" lIns="0" tIns="0" rIns="0" bIns="0">
             <a:spAutoFit/>
           </a:bodyPr>
           <a:lstStyle/>
           <a:p>
             <a:r>
-              <a:rPr b="1" i="0" sz="900">
+              <a:rPr sz="900" b="1" i="0">
                 <a:solidFill>
                   <a:srgbClr val="007A87"/>
                 </a:solidFill>
@@ -16019,7 +16375,7 @@
               <a:t>Source Authority: </a:t>
             </a:r>
             <a:r>
-              <a:rPr b="0" i="0" sz="850">
+              <a:rPr sz="850" b="0" i="0">
                 <a:solidFill>
                   <a:srgbClr val="192330"/>
                 </a:solidFill>
@@ -16035,7 +16391,7 @@
               </a:spcBef>
             </a:pPr>
             <a:r>
-              <a:rPr b="1" i="0" sz="900">
+              <a:rPr sz="900" b="1" i="0">
                 <a:solidFill>
                   <a:srgbClr val="007A87"/>
                 </a:solidFill>
@@ -16044,7 +16400,7 @@
               <a:t>Filings Audited: </a:t>
             </a:r>
             <a:r>
-              <a:rPr b="0" i="0" sz="850">
+              <a:rPr sz="850" b="0" i="0">
                 <a:solidFill>
                   <a:srgbClr val="192330"/>
                 </a:solidFill>
@@ -16060,7 +16416,7 @@
               </a:spcBef>
             </a:pPr>
             <a:r>
-              <a:rPr b="1" i="0" sz="900">
+              <a:rPr sz="900" b="1" i="0">
                 <a:solidFill>
                   <a:srgbClr val="007A87"/>
                 </a:solidFill>
@@ -16069,7 +16425,7 @@
               <a:t>Analytical Cohort: </a:t>
             </a:r>
             <a:r>
-              <a:rPr b="0" i="0" sz="850">
+              <a:rPr sz="850" b="0" i="0">
                 <a:solidFill>
                   <a:srgbClr val="192330"/>
                 </a:solidFill>
@@ -16085,7 +16441,7 @@
               </a:spcBef>
             </a:pPr>
             <a:r>
-              <a:rPr b="1" i="0" sz="900">
+              <a:rPr sz="900" b="1" i="0">
                 <a:solidFill>
                   <a:srgbClr val="007A87"/>
                 </a:solidFill>
@@ -16094,7 +16450,7 @@
               <a:t>Pruned Exclusions: </a:t>
             </a:r>
             <a:r>
-              <a:rPr b="0" i="0" sz="850">
+              <a:rPr sz="850" b="0" i="0">
                 <a:solidFill>
                   <a:srgbClr val="192330"/>
                 </a:solidFill>
@@ -16110,7 +16466,7 @@
               </a:spcBef>
             </a:pPr>
             <a:r>
-              <a:rPr b="1" i="0" sz="900">
+              <a:rPr sz="900" b="1" i="0">
                 <a:solidFill>
                   <a:srgbClr val="007A87"/>
                 </a:solidFill>
@@ -16119,7 +16475,7 @@
               <a:t>Feature Missingness: </a:t>
             </a:r>
             <a:r>
-              <a:rPr b="0" i="0" sz="850">
+              <a:rPr sz="850" b="0" i="0">
                 <a:solidFill>
                   <a:srgbClr val="192330"/>
                 </a:solidFill>
@@ -16135,7 +16491,7 @@
               </a:spcBef>
             </a:pPr>
             <a:r>
-              <a:rPr b="1" i="0" sz="900">
+              <a:rPr sz="900" b="1" i="0">
                 <a:solidFill>
                   <a:srgbClr val="007A87"/>
                 </a:solidFill>
@@ -16144,7 +16500,7 @@
               <a:t>Reporting Framework: </a:t>
             </a:r>
             <a:r>
-              <a:rPr b="0" i="0" sz="850">
+              <a:rPr sz="850" b="0" i="0">
                 <a:solidFill>
                   <a:srgbClr val="192330"/>
                 </a:solidFill>
@@ -16197,6 +16553,7 @@
           <a:lstStyle/>
           <a:p>
             <a:pPr algn="ctr"/>
+            <a:endParaRPr/>
           </a:p>
         </p:txBody>
       </p:sp>
@@ -16240,6 +16597,7 @@
           <a:lstStyle/>
           <a:p>
             <a:pPr algn="ctr"/>
+            <a:endParaRPr/>
           </a:p>
         </p:txBody>
       </p:sp>
@@ -16260,7 +16618,7 @@
           <a:noFill/>
         </p:spPr>
         <p:txBody>
-          <a:bodyPr wrap="square" tIns="0" bIns="0" lIns="0" rIns="0">
+          <a:bodyPr wrap="square" lIns="0" tIns="0" rIns="0" bIns="0">
             <a:spAutoFit/>
           </a:bodyPr>
           <a:lstStyle/>
@@ -16295,13 +16653,13 @@
           <a:noFill/>
         </p:spPr>
         <p:txBody>
-          <a:bodyPr wrap="square" tIns="0" bIns="0" lIns="0" rIns="0">
+          <a:bodyPr wrap="square" lIns="0" tIns="0" rIns="0" bIns="0">
             <a:spAutoFit/>
           </a:bodyPr>
           <a:lstStyle/>
           <a:p>
             <a:r>
-              <a:rPr b="1" i="0" sz="950">
+              <a:rPr sz="950" b="1" i="0">
                 <a:solidFill>
                   <a:srgbClr val="0A2540"/>
                 </a:solidFill>
@@ -16310,7 +16668,7 @@
               <a:t>• Calendar Year Aggregation: </a:t>
             </a:r>
             <a:r>
-              <a:rPr b="0" i="0" sz="850">
+              <a:rPr sz="850" b="0" i="0">
                 <a:solidFill>
                   <a:srgbClr val="192330"/>
                 </a:solidFill>
@@ -16326,7 +16684,7 @@
               </a:spcBef>
             </a:pPr>
             <a:r>
-              <a:rPr b="1" i="0" sz="950">
+              <a:rPr sz="950" b="1" i="0">
                 <a:solidFill>
                   <a:srgbClr val="0A2540"/>
                 </a:solidFill>
@@ -16335,7 +16693,7 @@
               <a:t>• Zero-Division Protection: </a:t>
             </a:r>
             <a:r>
-              <a:rPr b="0" i="0" sz="850">
+              <a:rPr sz="850" b="0" i="0">
                 <a:solidFill>
                   <a:srgbClr val="192330"/>
                 </a:solidFill>
@@ -16351,7 +16709,7 @@
               </a:spcBef>
             </a:pPr>
             <a:r>
-              <a:rPr b="1" i="0" sz="950">
+              <a:rPr sz="950" b="1" i="0">
                 <a:solidFill>
                   <a:srgbClr val="0A2540"/>
                 </a:solidFill>
@@ -16360,7 +16718,7 @@
               <a:t>• Extreme Ratio Winsorization: </a:t>
             </a:r>
             <a:r>
-              <a:rPr b="0" i="0" sz="850">
+              <a:rPr sz="850" b="0" i="0">
                 <a:solidFill>
                   <a:srgbClr val="192330"/>
                 </a:solidFill>
@@ -16376,7 +16734,7 @@
               </a:spcBef>
             </a:pPr>
             <a:r>
-              <a:rPr b="1" i="0" sz="950">
+              <a:rPr sz="950" b="1" i="0">
                 <a:solidFill>
                   <a:srgbClr val="0A2540"/>
                 </a:solidFill>
@@ -16385,7 +16743,7 @@
               <a:t>• Matrix Decoupling: </a:t>
             </a:r>
             <a:r>
-              <a:rPr b="0" i="0" sz="850">
+              <a:rPr sz="850" b="0" i="0">
                 <a:solidFill>
                   <a:srgbClr val="192330"/>
                 </a:solidFill>
@@ -16415,20 +16773,44 @@
                 <a:tableStyleId>{5C22544A-7EE6-4342-B048-85BDC9FD1C3A}</a:tableStyleId>
               </a:tblPr>
               <a:tblGrid>
-                <a:gridCol w="1371600"/>
-                <a:gridCol w="1508760"/>
-                <a:gridCol w="2697480"/>
-                <a:gridCol w="914400"/>
+                <a:gridCol w="1371600">
+                  <a:extLst>
+                    <a:ext uri="{9D8B030D-6E8A-4147-A177-3AD203B41FA5}">
+                      <a16:colId xmlns:a16="http://schemas.microsoft.com/office/drawing/2014/main" val="20000"/>
+                    </a:ext>
+                  </a:extLst>
+                </a:gridCol>
+                <a:gridCol w="1508760">
+                  <a:extLst>
+                    <a:ext uri="{9D8B030D-6E8A-4147-A177-3AD203B41FA5}">
+                      <a16:colId xmlns:a16="http://schemas.microsoft.com/office/drawing/2014/main" val="20001"/>
+                    </a:ext>
+                  </a:extLst>
+                </a:gridCol>
+                <a:gridCol w="2697480">
+                  <a:extLst>
+                    <a:ext uri="{9D8B030D-6E8A-4147-A177-3AD203B41FA5}">
+                      <a16:colId xmlns:a16="http://schemas.microsoft.com/office/drawing/2014/main" val="20002"/>
+                    </a:ext>
+                  </a:extLst>
+                </a:gridCol>
+                <a:gridCol w="914400">
+                  <a:extLst>
+                    <a:ext uri="{9D8B030D-6E8A-4147-A177-3AD203B41FA5}">
+                      <a16:colId xmlns:a16="http://schemas.microsoft.com/office/drawing/2014/main" val="20003"/>
+                    </a:ext>
+                  </a:extLst>
+                </a:gridCol>
               </a:tblGrid>
               <a:tr h="584200">
                 <a:tc>
                   <a:txBody>
-                    <a:bodyPr wrap="square" lIns="73152" rIns="73152" tIns="36576" bIns="36576"/>
+                    <a:bodyPr/>
                     <a:lstStyle/>
                     <a:p>
                       <a:pPr algn="l"/>
                       <a:r>
-                        <a:rPr b="1" i="0" sz="950">
+                        <a:rPr sz="950" b="1" i="0">
                           <a:solidFill>
                             <a:srgbClr val="FFFFFF"/>
                           </a:solidFill>
@@ -16446,12 +16828,12 @@
                 </a:tc>
                 <a:tc>
                   <a:txBody>
-                    <a:bodyPr wrap="square" lIns="73152" rIns="73152" tIns="36576" bIns="36576"/>
+                    <a:bodyPr/>
                     <a:lstStyle/>
                     <a:p>
                       <a:pPr algn="l"/>
                       <a:r>
-                        <a:rPr b="1" i="0" sz="950">
+                        <a:rPr sz="950" b="1" i="0">
                           <a:solidFill>
                             <a:srgbClr val="FFFFFF"/>
                           </a:solidFill>
@@ -16469,12 +16851,12 @@
                 </a:tc>
                 <a:tc>
                   <a:txBody>
-                    <a:bodyPr wrap="square" lIns="73152" rIns="73152" tIns="36576" bIns="36576"/>
+                    <a:bodyPr/>
                     <a:lstStyle/>
                     <a:p>
                       <a:pPr algn="l"/>
                       <a:r>
-                        <a:rPr b="1" i="0" sz="950">
+                        <a:rPr sz="950" b="1" i="0">
                           <a:solidFill>
                             <a:srgbClr val="FFFFFF"/>
                           </a:solidFill>
@@ -16492,12 +16874,12 @@
                 </a:tc>
                 <a:tc>
                   <a:txBody>
-                    <a:bodyPr wrap="square" lIns="73152" rIns="73152" tIns="36576" bIns="36576"/>
+                    <a:bodyPr/>
                     <a:lstStyle/>
                     <a:p>
                       <a:pPr algn="ctr"/>
                       <a:r>
-                        <a:rPr b="1" i="0" sz="950">
+                        <a:rPr sz="950" b="1" i="0">
                           <a:solidFill>
                             <a:srgbClr val="FFFFFF"/>
                           </a:solidFill>
@@ -16513,16 +16895,21 @@
                     </a:solidFill>
                   </a:tcPr>
                 </a:tc>
+                <a:extLst>
+                  <a:ext uri="{0D108BD9-81ED-4DB2-BD59-A6C34878D82A}">
+                    <a16:rowId xmlns:a16="http://schemas.microsoft.com/office/drawing/2014/main" val="10000"/>
+                  </a:ext>
+                </a:extLst>
               </a:tr>
               <a:tr h="584200">
                 <a:tc>
                   <a:txBody>
-                    <a:bodyPr wrap="square" lIns="73152" rIns="73152" tIns="36576" bIns="36576"/>
+                    <a:bodyPr/>
                     <a:lstStyle/>
                     <a:p>
                       <a:pPr algn="l"/>
                       <a:r>
-                        <a:rPr b="1" i="0" sz="900">
+                        <a:rPr sz="900" b="1" i="0">
                           <a:solidFill>
                             <a:srgbClr val="0A2540"/>
                           </a:solidFill>
@@ -16540,12 +16927,12 @@
                 </a:tc>
                 <a:tc>
                   <a:txBody>
-                    <a:bodyPr wrap="square" lIns="73152" rIns="73152" tIns="36576" bIns="36576"/>
+                    <a:bodyPr/>
                     <a:lstStyle/>
                     <a:p>
                       <a:pPr algn="l"/>
                       <a:r>
-                        <a:rPr b="0" i="0" sz="900">
+                        <a:rPr sz="900" b="0" i="0">
                           <a:solidFill>
                             <a:srgbClr val="00555F"/>
                           </a:solidFill>
@@ -16563,12 +16950,12 @@
                 </a:tc>
                 <a:tc>
                   <a:txBody>
-                    <a:bodyPr wrap="square" lIns="73152" rIns="73152" tIns="36576" bIns="36576"/>
+                    <a:bodyPr/>
                     <a:lstStyle/>
                     <a:p>
                       <a:pPr algn="l"/>
                       <a:r>
-                        <a:rPr b="0" i="0" sz="850">
+                        <a:rPr sz="850" b="0" i="0">
                           <a:solidFill>
                             <a:srgbClr val="192330"/>
                           </a:solidFill>
@@ -16586,12 +16973,12 @@
                 </a:tc>
                 <a:tc>
                   <a:txBody>
-                    <a:bodyPr wrap="square" lIns="73152" rIns="73152" tIns="36576" bIns="36576"/>
+                    <a:bodyPr/>
                     <a:lstStyle/>
                     <a:p>
                       <a:pPr algn="ctr"/>
                       <a:r>
-                        <a:rPr b="1" i="0" sz="850">
+                        <a:rPr sz="850" b="1" i="0">
                           <a:solidFill>
                             <a:srgbClr val="0A2540"/>
                           </a:solidFill>
@@ -16607,16 +16994,21 @@
                     </a:solidFill>
                   </a:tcPr>
                 </a:tc>
+                <a:extLst>
+                  <a:ext uri="{0D108BD9-81ED-4DB2-BD59-A6C34878D82A}">
+                    <a16:rowId xmlns:a16="http://schemas.microsoft.com/office/drawing/2014/main" val="10001"/>
+                  </a:ext>
+                </a:extLst>
               </a:tr>
               <a:tr h="584200">
                 <a:tc>
                   <a:txBody>
-                    <a:bodyPr wrap="square" lIns="73152" rIns="73152" tIns="36576" bIns="36576"/>
+                    <a:bodyPr/>
                     <a:lstStyle/>
                     <a:p>
                       <a:pPr algn="l"/>
                       <a:r>
-                        <a:rPr b="1" i="0" sz="900">
+                        <a:rPr sz="900" b="1" i="0">
                           <a:solidFill>
                             <a:srgbClr val="0A2540"/>
                           </a:solidFill>
@@ -16634,12 +17026,12 @@
                 </a:tc>
                 <a:tc>
                   <a:txBody>
-                    <a:bodyPr wrap="square" lIns="73152" rIns="73152" tIns="36576" bIns="36576"/>
+                    <a:bodyPr/>
                     <a:lstStyle/>
                     <a:p>
                       <a:pPr algn="l"/>
                       <a:r>
-                        <a:rPr b="0" i="0" sz="900">
+                        <a:rPr sz="900" b="0" i="0">
                           <a:solidFill>
                             <a:srgbClr val="00555F"/>
                           </a:solidFill>
@@ -16657,12 +17049,12 @@
                 </a:tc>
                 <a:tc>
                   <a:txBody>
-                    <a:bodyPr wrap="square" lIns="73152" rIns="73152" tIns="36576" bIns="36576"/>
+                    <a:bodyPr/>
                     <a:lstStyle/>
                     <a:p>
                       <a:pPr algn="l"/>
                       <a:r>
-                        <a:rPr b="0" i="0" sz="850">
+                        <a:rPr sz="850" b="0" i="0">
                           <a:solidFill>
                             <a:srgbClr val="192330"/>
                           </a:solidFill>
@@ -16680,12 +17072,12 @@
                 </a:tc>
                 <a:tc>
                   <a:txBody>
-                    <a:bodyPr wrap="square" lIns="73152" rIns="73152" tIns="36576" bIns="36576"/>
+                    <a:bodyPr/>
                     <a:lstStyle/>
                     <a:p>
                       <a:pPr algn="ctr"/>
                       <a:r>
-                        <a:rPr b="1" i="0" sz="850">
+                        <a:rPr sz="850" b="1" i="0">
                           <a:solidFill>
                             <a:srgbClr val="0A2540"/>
                           </a:solidFill>
@@ -16701,16 +17093,21 @@
                     </a:solidFill>
                   </a:tcPr>
                 </a:tc>
+                <a:extLst>
+                  <a:ext uri="{0D108BD9-81ED-4DB2-BD59-A6C34878D82A}">
+                    <a16:rowId xmlns:a16="http://schemas.microsoft.com/office/drawing/2014/main" val="10002"/>
+                  </a:ext>
+                </a:extLst>
               </a:tr>
               <a:tr h="584200">
                 <a:tc>
                   <a:txBody>
-                    <a:bodyPr wrap="square" lIns="73152" rIns="73152" tIns="36576" bIns="36576"/>
+                    <a:bodyPr/>
                     <a:lstStyle/>
                     <a:p>
                       <a:pPr algn="l"/>
                       <a:r>
-                        <a:rPr b="1" i="0" sz="900">
+                        <a:rPr sz="900" b="1" i="0">
                           <a:solidFill>
                             <a:srgbClr val="0A2540"/>
                           </a:solidFill>
@@ -16728,12 +17125,12 @@
                 </a:tc>
                 <a:tc>
                   <a:txBody>
-                    <a:bodyPr wrap="square" lIns="73152" rIns="73152" tIns="36576" bIns="36576"/>
+                    <a:bodyPr/>
                     <a:lstStyle/>
                     <a:p>
                       <a:pPr algn="l"/>
                       <a:r>
-                        <a:rPr b="0" i="0" sz="900">
+                        <a:rPr sz="900" b="0" i="0">
                           <a:solidFill>
                             <a:srgbClr val="00555F"/>
                           </a:solidFill>
@@ -16751,12 +17148,12 @@
                 </a:tc>
                 <a:tc>
                   <a:txBody>
-                    <a:bodyPr wrap="square" lIns="73152" rIns="73152" tIns="36576" bIns="36576"/>
+                    <a:bodyPr/>
                     <a:lstStyle/>
                     <a:p>
                       <a:pPr algn="l"/>
                       <a:r>
-                        <a:rPr b="0" i="0" sz="850">
+                        <a:rPr sz="850" b="0" i="0">
                           <a:solidFill>
                             <a:srgbClr val="192330"/>
                           </a:solidFill>
@@ -16774,12 +17171,12 @@
                 </a:tc>
                 <a:tc>
                   <a:txBody>
-                    <a:bodyPr wrap="square" lIns="73152" rIns="73152" tIns="36576" bIns="36576"/>
+                    <a:bodyPr/>
                     <a:lstStyle/>
                     <a:p>
                       <a:pPr algn="ctr"/>
                       <a:r>
-                        <a:rPr b="1" i="0" sz="850">
+                        <a:rPr sz="850" b="1" i="0">
                           <a:solidFill>
                             <a:srgbClr val="0A2540"/>
                           </a:solidFill>
@@ -16795,16 +17192,21 @@
                     </a:solidFill>
                   </a:tcPr>
                 </a:tc>
+                <a:extLst>
+                  <a:ext uri="{0D108BD9-81ED-4DB2-BD59-A6C34878D82A}">
+                    <a16:rowId xmlns:a16="http://schemas.microsoft.com/office/drawing/2014/main" val="10003"/>
+                  </a:ext>
+                </a:extLst>
               </a:tr>
               <a:tr h="584200">
                 <a:tc>
                   <a:txBody>
-                    <a:bodyPr wrap="square" lIns="73152" rIns="73152" tIns="36576" bIns="36576"/>
+                    <a:bodyPr/>
                     <a:lstStyle/>
                     <a:p>
                       <a:pPr algn="l"/>
                       <a:r>
-                        <a:rPr b="1" i="0" sz="900">
+                        <a:rPr sz="900" b="1" i="0">
                           <a:solidFill>
                             <a:srgbClr val="0A2540"/>
                           </a:solidFill>
@@ -16822,12 +17224,12 @@
                 </a:tc>
                 <a:tc>
                   <a:txBody>
-                    <a:bodyPr wrap="square" lIns="73152" rIns="73152" tIns="36576" bIns="36576"/>
+                    <a:bodyPr/>
                     <a:lstStyle/>
                     <a:p>
                       <a:pPr algn="l"/>
                       <a:r>
-                        <a:rPr b="0" i="0" sz="900">
+                        <a:rPr sz="900" b="0" i="0">
                           <a:solidFill>
                             <a:srgbClr val="00555F"/>
                           </a:solidFill>
@@ -16845,12 +17247,12 @@
                 </a:tc>
                 <a:tc>
                   <a:txBody>
-                    <a:bodyPr wrap="square" lIns="73152" rIns="73152" tIns="36576" bIns="36576"/>
+                    <a:bodyPr/>
                     <a:lstStyle/>
                     <a:p>
                       <a:pPr algn="l"/>
                       <a:r>
-                        <a:rPr b="0" i="0" sz="850">
+                        <a:rPr sz="850" b="0" i="0">
                           <a:solidFill>
                             <a:srgbClr val="192330"/>
                           </a:solidFill>
@@ -16868,12 +17270,12 @@
                 </a:tc>
                 <a:tc>
                   <a:txBody>
-                    <a:bodyPr wrap="square" lIns="73152" rIns="73152" tIns="36576" bIns="36576"/>
+                    <a:bodyPr/>
                     <a:lstStyle/>
                     <a:p>
                       <a:pPr algn="ctr"/>
                       <a:r>
-                        <a:rPr b="1" i="0" sz="850">
+                        <a:rPr sz="850" b="1" i="0">
                           <a:solidFill>
                             <a:srgbClr val="0A2540"/>
                           </a:solidFill>
@@ -16889,16 +17291,21 @@
                     </a:solidFill>
                   </a:tcPr>
                 </a:tc>
+                <a:extLst>
+                  <a:ext uri="{0D108BD9-81ED-4DB2-BD59-A6C34878D82A}">
+                    <a16:rowId xmlns:a16="http://schemas.microsoft.com/office/drawing/2014/main" val="10004"/>
+                  </a:ext>
+                </a:extLst>
               </a:tr>
               <a:tr h="584200">
                 <a:tc>
                   <a:txBody>
-                    <a:bodyPr wrap="square" lIns="73152" rIns="73152" tIns="36576" bIns="36576"/>
+                    <a:bodyPr/>
                     <a:lstStyle/>
                     <a:p>
                       <a:pPr algn="l"/>
                       <a:r>
-                        <a:rPr b="1" i="0" sz="900">
+                        <a:rPr sz="900" b="1" i="0">
                           <a:solidFill>
                             <a:srgbClr val="0A2540"/>
                           </a:solidFill>
@@ -16916,12 +17323,12 @@
                 </a:tc>
                 <a:tc>
                   <a:txBody>
-                    <a:bodyPr wrap="square" lIns="73152" rIns="73152" tIns="36576" bIns="36576"/>
+                    <a:bodyPr/>
                     <a:lstStyle/>
                     <a:p>
                       <a:pPr algn="l"/>
                       <a:r>
-                        <a:rPr b="0" i="0" sz="900">
+                        <a:rPr sz="900" b="0" i="0">
                           <a:solidFill>
                             <a:srgbClr val="00555F"/>
                           </a:solidFill>
@@ -16939,12 +17346,12 @@
                 </a:tc>
                 <a:tc>
                   <a:txBody>
-                    <a:bodyPr wrap="square" lIns="73152" rIns="73152" tIns="36576" bIns="36576"/>
+                    <a:bodyPr/>
                     <a:lstStyle/>
                     <a:p>
                       <a:pPr algn="l"/>
                       <a:r>
-                        <a:rPr b="0" i="0" sz="850">
+                        <a:rPr sz="850" b="0" i="0">
                           <a:solidFill>
                             <a:srgbClr val="192330"/>
                           </a:solidFill>
@@ -16962,12 +17369,12 @@
                 </a:tc>
                 <a:tc>
                   <a:txBody>
-                    <a:bodyPr wrap="square" lIns="73152" rIns="73152" tIns="36576" bIns="36576"/>
+                    <a:bodyPr/>
                     <a:lstStyle/>
                     <a:p>
                       <a:pPr algn="ctr"/>
                       <a:r>
-                        <a:rPr b="1" i="0" sz="850">
+                        <a:rPr sz="850" b="1" i="0">
                           <a:solidFill>
                             <a:srgbClr val="0A2540"/>
                           </a:solidFill>
@@ -16983,16 +17390,21 @@
                     </a:solidFill>
                   </a:tcPr>
                 </a:tc>
+                <a:extLst>
+                  <a:ext uri="{0D108BD9-81ED-4DB2-BD59-A6C34878D82A}">
+                    <a16:rowId xmlns:a16="http://schemas.microsoft.com/office/drawing/2014/main" val="10005"/>
+                  </a:ext>
+                </a:extLst>
               </a:tr>
               <a:tr h="584200">
                 <a:tc>
                   <a:txBody>
-                    <a:bodyPr wrap="square" lIns="73152" rIns="73152" tIns="36576" bIns="36576"/>
+                    <a:bodyPr/>
                     <a:lstStyle/>
                     <a:p>
                       <a:pPr algn="l"/>
                       <a:r>
-                        <a:rPr b="1" i="0" sz="900">
+                        <a:rPr sz="900" b="1" i="0">
                           <a:solidFill>
                             <a:srgbClr val="0A2540"/>
                           </a:solidFill>
@@ -17010,12 +17422,12 @@
                 </a:tc>
                 <a:tc>
                   <a:txBody>
-                    <a:bodyPr wrap="square" lIns="73152" rIns="73152" tIns="36576" bIns="36576"/>
+                    <a:bodyPr/>
                     <a:lstStyle/>
                     <a:p>
                       <a:pPr algn="l"/>
                       <a:r>
-                        <a:rPr b="0" i="0" sz="900">
+                        <a:rPr sz="900" b="0" i="0">
                           <a:solidFill>
                             <a:srgbClr val="00555F"/>
                           </a:solidFill>
@@ -17033,12 +17445,12 @@
                 </a:tc>
                 <a:tc>
                   <a:txBody>
-                    <a:bodyPr wrap="square" lIns="73152" rIns="73152" tIns="36576" bIns="36576"/>
+                    <a:bodyPr/>
                     <a:lstStyle/>
                     <a:p>
                       <a:pPr algn="l"/>
                       <a:r>
-                        <a:rPr b="0" i="0" sz="850">
+                        <a:rPr sz="850" b="0" i="0">
                           <a:solidFill>
                             <a:srgbClr val="192330"/>
                           </a:solidFill>
@@ -17056,12 +17468,12 @@
                 </a:tc>
                 <a:tc>
                   <a:txBody>
-                    <a:bodyPr wrap="square" lIns="73152" rIns="73152" tIns="36576" bIns="36576"/>
+                    <a:bodyPr/>
                     <a:lstStyle/>
                     <a:p>
                       <a:pPr algn="ctr"/>
                       <a:r>
-                        <a:rPr b="1" i="0" sz="850">
+                        <a:rPr sz="850" b="1" i="0">
                           <a:solidFill>
                             <a:srgbClr val="0A2540"/>
                           </a:solidFill>
@@ -17077,16 +17489,21 @@
                     </a:solidFill>
                   </a:tcPr>
                 </a:tc>
+                <a:extLst>
+                  <a:ext uri="{0D108BD9-81ED-4DB2-BD59-A6C34878D82A}">
+                    <a16:rowId xmlns:a16="http://schemas.microsoft.com/office/drawing/2014/main" val="10006"/>
+                  </a:ext>
+                </a:extLst>
               </a:tr>
               <a:tr h="584200">
                 <a:tc>
                   <a:txBody>
-                    <a:bodyPr wrap="square" lIns="73152" rIns="73152" tIns="36576" bIns="36576"/>
+                    <a:bodyPr/>
                     <a:lstStyle/>
                     <a:p>
                       <a:pPr algn="l"/>
                       <a:r>
-                        <a:rPr b="1" i="0" sz="900">
+                        <a:rPr sz="900" b="1" i="0">
                           <a:solidFill>
                             <a:srgbClr val="0A2540"/>
                           </a:solidFill>
@@ -17104,12 +17521,12 @@
                 </a:tc>
                 <a:tc>
                   <a:txBody>
-                    <a:bodyPr wrap="square" lIns="73152" rIns="73152" tIns="36576" bIns="36576"/>
+                    <a:bodyPr/>
                     <a:lstStyle/>
                     <a:p>
                       <a:pPr algn="l"/>
                       <a:r>
-                        <a:rPr b="0" i="0" sz="900">
+                        <a:rPr sz="900" b="0" i="0">
                           <a:solidFill>
                             <a:srgbClr val="00555F"/>
                           </a:solidFill>
@@ -17127,12 +17544,12 @@
                 </a:tc>
                 <a:tc>
                   <a:txBody>
-                    <a:bodyPr wrap="square" lIns="73152" rIns="73152" tIns="36576" bIns="36576"/>
+                    <a:bodyPr/>
                     <a:lstStyle/>
                     <a:p>
                       <a:pPr algn="l"/>
                       <a:r>
-                        <a:rPr b="0" i="0" sz="850">
+                        <a:rPr sz="850" b="0" i="0">
                           <a:solidFill>
                             <a:srgbClr val="192330"/>
                           </a:solidFill>
@@ -17150,12 +17567,12 @@
                 </a:tc>
                 <a:tc>
                   <a:txBody>
-                    <a:bodyPr wrap="square" lIns="73152" rIns="73152" tIns="36576" bIns="36576"/>
+                    <a:bodyPr/>
                     <a:lstStyle/>
                     <a:p>
                       <a:pPr algn="ctr"/>
                       <a:r>
-                        <a:rPr b="1" i="0" sz="850">
+                        <a:rPr sz="850" b="1" i="0">
                           <a:solidFill>
                             <a:srgbClr val="0A2540"/>
                           </a:solidFill>
@@ -17171,16 +17588,21 @@
                     </a:solidFill>
                   </a:tcPr>
                 </a:tc>
+                <a:extLst>
+                  <a:ext uri="{0D108BD9-81ED-4DB2-BD59-A6C34878D82A}">
+                    <a16:rowId xmlns:a16="http://schemas.microsoft.com/office/drawing/2014/main" val="10007"/>
+                  </a:ext>
+                </a:extLst>
               </a:tr>
               <a:tr h="584200">
                 <a:tc>
                   <a:txBody>
-                    <a:bodyPr wrap="square" lIns="73152" rIns="73152" tIns="36576" bIns="36576"/>
+                    <a:bodyPr/>
                     <a:lstStyle/>
                     <a:p>
                       <a:pPr algn="l"/>
                       <a:r>
-                        <a:rPr b="1" i="0" sz="900">
+                        <a:rPr sz="900" b="1" i="0">
                           <a:solidFill>
                             <a:srgbClr val="0A2540"/>
                           </a:solidFill>
@@ -17198,12 +17620,12 @@
                 </a:tc>
                 <a:tc>
                   <a:txBody>
-                    <a:bodyPr wrap="square" lIns="73152" rIns="73152" tIns="36576" bIns="36576"/>
+                    <a:bodyPr/>
                     <a:lstStyle/>
                     <a:p>
                       <a:pPr algn="l"/>
                       <a:r>
-                        <a:rPr b="0" i="0" sz="900">
+                        <a:rPr sz="900" b="0" i="0">
                           <a:solidFill>
                             <a:srgbClr val="00555F"/>
                           </a:solidFill>
@@ -17221,12 +17643,12 @@
                 </a:tc>
                 <a:tc>
                   <a:txBody>
-                    <a:bodyPr wrap="square" lIns="73152" rIns="73152" tIns="36576" bIns="36576"/>
+                    <a:bodyPr/>
                     <a:lstStyle/>
                     <a:p>
                       <a:pPr algn="l"/>
                       <a:r>
-                        <a:rPr b="0" i="0" sz="850">
+                        <a:rPr sz="850" b="0" i="0">
                           <a:solidFill>
                             <a:srgbClr val="192330"/>
                           </a:solidFill>
@@ -17244,12 +17666,12 @@
                 </a:tc>
                 <a:tc>
                   <a:txBody>
-                    <a:bodyPr wrap="square" lIns="73152" rIns="73152" tIns="36576" bIns="36576"/>
+                    <a:bodyPr/>
                     <a:lstStyle/>
                     <a:p>
                       <a:pPr algn="ctr"/>
                       <a:r>
-                        <a:rPr b="1" i="0" sz="850">
+                        <a:rPr sz="850" b="1" i="0">
                           <a:solidFill>
                             <a:srgbClr val="0A2540"/>
                           </a:solidFill>
@@ -17265,6 +17687,11 @@
                     </a:solidFill>
                   </a:tcPr>
                 </a:tc>
+                <a:extLst>
+                  <a:ext uri="{0D108BD9-81ED-4DB2-BD59-A6C34878D82A}">
+                    <a16:rowId xmlns:a16="http://schemas.microsoft.com/office/drawing/2014/main" val="10008"/>
+                  </a:ext>
+                </a:extLst>
               </a:tr>
             </a:tbl>
           </a:graphicData>
@@ -17279,7 +17706,7 @@
 </file>
 
 <file path=ppt/slides/slide6.xml><?xml version="1.0" encoding="utf-8"?>
-<p:sld xmlns:a="http://schemas.openxmlformats.org/drawingml/2006/main" xmlns:p="http://schemas.openxmlformats.org/presentationml/2006/main" xmlns:r="http://schemas.openxmlformats.org/officeDocument/2006/relationships">
+<p:sld xmlns:a="http://schemas.openxmlformats.org/drawingml/2006/main" xmlns:r="http://schemas.openxmlformats.org/officeDocument/2006/relationships" xmlns:p="http://schemas.openxmlformats.org/presentationml/2006/main">
   <p:cSld>
     <p:spTree>
       <p:nvGrpSpPr>
@@ -17287,7 +17714,14 @@
         <p:cNvGrpSpPr/>
         <p:nvPr/>
       </p:nvGrpSpPr>
-      <p:grpSpPr/>
+      <p:grpSpPr>
+        <a:xfrm>
+          <a:off x="0" y="0"/>
+          <a:ext cx="0" cy="0"/>
+          <a:chOff x="0" y="0"/>
+          <a:chExt cx="0" cy="0"/>
+        </a:xfrm>
+      </p:grpSpPr>
       <p:sp>
         <p:nvSpPr>
           <p:cNvPr id="2" name="Rectangle 1"/>
@@ -17328,6 +17762,7 @@
           <a:lstStyle/>
           <a:p>
             <a:pPr algn="ctr"/>
+            <a:endParaRPr/>
           </a:p>
         </p:txBody>
       </p:sp>
@@ -17371,6 +17806,7 @@
           <a:lstStyle/>
           <a:p>
             <a:pPr algn="ctr"/>
+            <a:endParaRPr/>
           </a:p>
         </p:txBody>
       </p:sp>
@@ -17414,6 +17850,7 @@
           <a:lstStyle/>
           <a:p>
             <a:pPr algn="ctr"/>
+            <a:endParaRPr/>
           </a:p>
         </p:txBody>
       </p:sp>
@@ -17434,7 +17871,7 @@
           <a:noFill/>
         </p:spPr>
         <p:txBody>
-          <a:bodyPr wrap="square" tIns="0" bIns="0" lIns="0" rIns="0">
+          <a:bodyPr wrap="square" lIns="0" tIns="0" rIns="0" bIns="0">
             <a:spAutoFit/>
           </a:bodyPr>
           <a:lstStyle/>
@@ -17516,20 +17953,20 @@
           <a:noFill/>
         </p:spPr>
         <p:txBody>
-          <a:bodyPr wrap="none" tIns="0" bIns="0" lIns="0" rIns="0">
+          <a:bodyPr wrap="none" lIns="0" tIns="0" rIns="0" bIns="0">
             <a:spAutoFit/>
           </a:bodyPr>
           <a:lstStyle/>
           <a:p>
             <a:pPr>
-              <a:defRPr sz="850">
-                <a:solidFill>
-                  <a:srgbClr val="5A6978"/>
+              <a:defRPr sz="750">
+                <a:solidFill>
+                  <a:srgbClr val="8090A0"/>
                 </a:solidFill>
               </a:defRPr>
             </a:pPr>
             <a:r>
-              <a:t>CA3 Machine Learning Mini-Project  |  Healthcare Facility Analytics  |  Candidate: Aditya09977  |  Submission: Oct 2026</a:t>
+              <a:t>CA3 Machine Learning Mini-Project  |  Healthcare Facility Analytics  |  Yesh Raheja (23070521174) &amp; Aditya Gurve (23070521231)  |  Oct 2026</a:t>
             </a:r>
           </a:p>
         </p:txBody>
@@ -17600,6 +18037,7 @@
           <a:lstStyle/>
           <a:p>
             <a:pPr algn="ctr"/>
+            <a:endParaRPr/>
           </a:p>
         </p:txBody>
       </p:sp>
@@ -17643,6 +18081,7 @@
           <a:lstStyle/>
           <a:p>
             <a:pPr algn="ctr"/>
+            <a:endParaRPr/>
           </a:p>
         </p:txBody>
       </p:sp>
@@ -17663,7 +18102,7 @@
           <a:noFill/>
         </p:spPr>
         <p:txBody>
-          <a:bodyPr wrap="square" tIns="0" bIns="0" lIns="0" rIns="0">
+          <a:bodyPr wrap="square" lIns="0" tIns="0" rIns="0" bIns="0">
             <a:spAutoFit/>
           </a:bodyPr>
           <a:lstStyle/>
@@ -17698,13 +18137,13 @@
           <a:noFill/>
         </p:spPr>
         <p:txBody>
-          <a:bodyPr wrap="square" tIns="0" bIns="0" lIns="0" rIns="0">
+          <a:bodyPr wrap="square" lIns="0" tIns="0" rIns="0" bIns="0">
             <a:spAutoFit/>
           </a:bodyPr>
           <a:lstStyle/>
           <a:p>
             <a:r>
-              <a:rPr b="1" i="0" sz="900">
+              <a:rPr sz="900" b="1" i="0">
                 <a:solidFill>
                   <a:srgbClr val="007A87"/>
                 </a:solidFill>
@@ -17713,7 +18152,7 @@
               <a:t>• Automated Extraction: </a:t>
             </a:r>
             <a:r>
-              <a:rPr b="0" i="0" sz="850">
+              <a:rPr sz="850" b="0" i="0">
                 <a:solidFill>
                   <a:srgbClr val="192330"/>
                 </a:solidFill>
@@ -17729,7 +18168,7 @@
               </a:spcBef>
             </a:pPr>
             <a:r>
-              <a:rPr b="1" i="0" sz="900">
+              <a:rPr sz="900" b="1" i="0">
                 <a:solidFill>
                   <a:srgbClr val="007A87"/>
                 </a:solidFill>
@@ -17738,7 +18177,7 @@
               <a:t>• Sanitization: </a:t>
             </a:r>
             <a:r>
-              <a:rPr b="0" i="0" sz="850">
+              <a:rPr sz="850" b="0" i="0">
                 <a:solidFill>
                   <a:srgbClr val="192330"/>
                 </a:solidFill>
@@ -17754,7 +18193,7 @@
               </a:spcBef>
             </a:pPr>
             <a:r>
-              <a:rPr b="1" i="0" sz="900">
+              <a:rPr sz="900" b="1" i="0">
                 <a:solidFill>
                   <a:srgbClr val="007A87"/>
                 </a:solidFill>
@@ -17763,7 +18202,7 @@
               <a:t>• Winsorization: </a:t>
             </a:r>
             <a:r>
-              <a:rPr b="0" i="0" sz="850">
+              <a:rPr sz="850" b="0" i="0">
                 <a:solidFill>
                   <a:srgbClr val="192330"/>
                 </a:solidFill>
@@ -17816,6 +18255,7 @@
           <a:lstStyle/>
           <a:p>
             <a:pPr algn="ctr"/>
+            <a:endParaRPr/>
           </a:p>
         </p:txBody>
       </p:sp>
@@ -17859,6 +18299,7 @@
           <a:lstStyle/>
           <a:p>
             <a:pPr algn="ctr"/>
+            <a:endParaRPr/>
           </a:p>
         </p:txBody>
       </p:sp>
@@ -17879,7 +18320,7 @@
           <a:noFill/>
         </p:spPr>
         <p:txBody>
-          <a:bodyPr wrap="square" tIns="0" bIns="0" lIns="0" rIns="0">
+          <a:bodyPr wrap="square" lIns="0" tIns="0" rIns="0" bIns="0">
             <a:spAutoFit/>
           </a:bodyPr>
           <a:lstStyle/>
@@ -17914,13 +18355,13 @@
           <a:noFill/>
         </p:spPr>
         <p:txBody>
-          <a:bodyPr wrap="square" tIns="0" bIns="0" lIns="0" rIns="0">
+          <a:bodyPr wrap="square" lIns="0" tIns="0" rIns="0" bIns="0">
             <a:spAutoFit/>
           </a:bodyPr>
           <a:lstStyle/>
           <a:p>
             <a:r>
-              <a:rPr b="1" i="0" sz="900">
+              <a:rPr sz="900" b="1" i="0">
                 <a:solidFill>
                   <a:srgbClr val="0A2540"/>
                 </a:solidFill>
@@ -17929,7 +18370,7 @@
               <a:t>• Model Execution: </a:t>
             </a:r>
             <a:r>
-              <a:rPr b="0" i="0" sz="850">
+              <a:rPr sz="850" b="0" i="0">
                 <a:solidFill>
                   <a:srgbClr val="192330"/>
                 </a:solidFill>
@@ -17945,7 +18386,7 @@
               </a:spcBef>
             </a:pPr>
             <a:r>
-              <a:rPr b="1" i="0" sz="900">
+              <a:rPr sz="900" b="1" i="0">
                 <a:solidFill>
                   <a:srgbClr val="0A2540"/>
                 </a:solidFill>
@@ -17954,7 +18395,7 @@
               <a:t>• Parameter Grid: </a:t>
             </a:r>
             <a:r>
-              <a:rPr b="0" i="0" sz="850">
+              <a:rPr sz="850" b="0" i="0">
                 <a:solidFill>
                   <a:srgbClr val="192330"/>
                 </a:solidFill>
@@ -17970,7 +18411,7 @@
               </a:spcBef>
             </a:pPr>
             <a:r>
-              <a:rPr b="1" i="0" sz="900">
+              <a:rPr sz="900" b="1" i="0">
                 <a:solidFill>
                   <a:srgbClr val="0A2540"/>
                 </a:solidFill>
@@ -17979,7 +18420,7 @@
               <a:t>• Metric Triangulation: </a:t>
             </a:r>
             <a:r>
-              <a:rPr b="0" i="0" sz="850">
+              <a:rPr sz="850" b="0" i="0">
                 <a:solidFill>
                   <a:srgbClr val="192330"/>
                 </a:solidFill>
@@ -18032,6 +18473,7 @@
           <a:lstStyle/>
           <a:p>
             <a:pPr algn="ctr"/>
+            <a:endParaRPr/>
           </a:p>
         </p:txBody>
       </p:sp>
@@ -18075,6 +18517,7 @@
           <a:lstStyle/>
           <a:p>
             <a:pPr algn="ctr"/>
+            <a:endParaRPr/>
           </a:p>
         </p:txBody>
       </p:sp>
@@ -18095,7 +18538,7 @@
           <a:noFill/>
         </p:spPr>
         <p:txBody>
-          <a:bodyPr wrap="square" tIns="0" bIns="0" lIns="0" rIns="0">
+          <a:bodyPr wrap="square" lIns="0" tIns="0" rIns="0" bIns="0">
             <a:spAutoFit/>
           </a:bodyPr>
           <a:lstStyle/>
@@ -18130,13 +18573,13 @@
           <a:noFill/>
         </p:spPr>
         <p:txBody>
-          <a:bodyPr wrap="square" tIns="0" bIns="0" lIns="0" rIns="0">
+          <a:bodyPr wrap="square" lIns="0" tIns="0" rIns="0" bIns="0">
             <a:spAutoFit/>
           </a:bodyPr>
           <a:lstStyle/>
           <a:p>
             <a:r>
-              <a:rPr b="1" i="0" sz="900">
+              <a:rPr sz="900" b="1" i="0">
                 <a:solidFill>
                   <a:srgbClr val="1A446C"/>
                 </a:solidFill>
@@ -18145,7 +18588,7 @@
               <a:t>• Streamlit UI: </a:t>
             </a:r>
             <a:r>
-              <a:rPr b="0" i="0" sz="850">
+              <a:rPr sz="850" b="0" i="0">
                 <a:solidFill>
                   <a:srgbClr val="192330"/>
                 </a:solidFill>
@@ -18161,7 +18604,7 @@
               </a:spcBef>
             </a:pPr>
             <a:r>
-              <a:rPr b="1" i="0" sz="900">
+              <a:rPr sz="900" b="1" i="0">
                 <a:solidFill>
                   <a:srgbClr val="1A446C"/>
                 </a:solidFill>
@@ -18170,7 +18613,7 @@
               <a:t>• PCA Visualizer: </a:t>
             </a:r>
             <a:r>
-              <a:rPr b="0" i="0" sz="850">
+              <a:rPr sz="850" b="0" i="0">
                 <a:solidFill>
                   <a:srgbClr val="192330"/>
                 </a:solidFill>
@@ -18186,7 +18629,7 @@
               </a:spcBef>
             </a:pPr>
             <a:r>
-              <a:rPr b="1" i="0" sz="900">
+              <a:rPr sz="900" b="1" i="0">
                 <a:solidFill>
                   <a:srgbClr val="1A446C"/>
                 </a:solidFill>
@@ -18195,7 +18638,7 @@
               <a:t>• Open Source: </a:t>
             </a:r>
             <a:r>
-              <a:rPr b="0" i="0" sz="850">
+              <a:rPr sz="850" b="0" i="0">
                 <a:solidFill>
                   <a:srgbClr val="192330"/>
                 </a:solidFill>
@@ -18215,7 +18658,7 @@
 </file>
 
 <file path=ppt/slides/slide7.xml><?xml version="1.0" encoding="utf-8"?>
-<p:sld xmlns:a="http://schemas.openxmlformats.org/drawingml/2006/main" xmlns:p="http://schemas.openxmlformats.org/presentationml/2006/main" xmlns:r="http://schemas.openxmlformats.org/officeDocument/2006/relationships">
+<p:sld xmlns:a="http://schemas.openxmlformats.org/drawingml/2006/main" xmlns:r="http://schemas.openxmlformats.org/officeDocument/2006/relationships" xmlns:p="http://schemas.openxmlformats.org/presentationml/2006/main">
   <p:cSld>
     <p:spTree>
       <p:nvGrpSpPr>
@@ -18223,7 +18666,14 @@
         <p:cNvGrpSpPr/>
         <p:nvPr/>
       </p:nvGrpSpPr>
-      <p:grpSpPr/>
+      <p:grpSpPr>
+        <a:xfrm>
+          <a:off x="0" y="0"/>
+          <a:ext cx="0" cy="0"/>
+          <a:chOff x="0" y="0"/>
+          <a:chExt cx="0" cy="0"/>
+        </a:xfrm>
+      </p:grpSpPr>
       <p:sp>
         <p:nvSpPr>
           <p:cNvPr id="2" name="Rectangle 1"/>
@@ -18264,6 +18714,7 @@
           <a:lstStyle/>
           <a:p>
             <a:pPr algn="ctr"/>
+            <a:endParaRPr/>
           </a:p>
         </p:txBody>
       </p:sp>
@@ -18307,6 +18758,7 @@
           <a:lstStyle/>
           <a:p>
             <a:pPr algn="ctr"/>
+            <a:endParaRPr/>
           </a:p>
         </p:txBody>
       </p:sp>
@@ -18350,6 +18802,7 @@
           <a:lstStyle/>
           <a:p>
             <a:pPr algn="ctr"/>
+            <a:endParaRPr/>
           </a:p>
         </p:txBody>
       </p:sp>
@@ -18370,7 +18823,7 @@
           <a:noFill/>
         </p:spPr>
         <p:txBody>
-          <a:bodyPr wrap="square" tIns="0" bIns="0" lIns="0" rIns="0">
+          <a:bodyPr wrap="square" lIns="0" tIns="0" rIns="0" bIns="0">
             <a:spAutoFit/>
           </a:bodyPr>
           <a:lstStyle/>
@@ -18452,20 +18905,20 @@
           <a:noFill/>
         </p:spPr>
         <p:txBody>
-          <a:bodyPr wrap="none" tIns="0" bIns="0" lIns="0" rIns="0">
+          <a:bodyPr wrap="none" lIns="0" tIns="0" rIns="0" bIns="0">
             <a:spAutoFit/>
           </a:bodyPr>
           <a:lstStyle/>
           <a:p>
             <a:pPr>
-              <a:defRPr sz="850">
-                <a:solidFill>
-                  <a:srgbClr val="5A6978"/>
+              <a:defRPr sz="750">
+                <a:solidFill>
+                  <a:srgbClr val="8090A0"/>
                 </a:solidFill>
               </a:defRPr>
             </a:pPr>
             <a:r>
-              <a:t>CA3 Machine Learning Mini-Project  |  Healthcare Facility Analytics  |  Candidate: Aditya09977  |  Submission: Oct 2026</a:t>
+              <a:t>CA3 Machine Learning Mini-Project  |  Healthcare Facility Analytics  |  Yesh Raheja (23070521174) &amp; Aditya Gurve (23070521231)  |  Oct 2026</a:t>
             </a:r>
           </a:p>
         </p:txBody>
@@ -18536,6 +18989,7 @@
           <a:lstStyle/>
           <a:p>
             <a:pPr algn="ctr"/>
+            <a:endParaRPr/>
           </a:p>
         </p:txBody>
       </p:sp>
@@ -18579,6 +19033,7 @@
           <a:lstStyle/>
           <a:p>
             <a:pPr algn="ctr"/>
+            <a:endParaRPr/>
           </a:p>
         </p:txBody>
       </p:sp>
@@ -18599,7 +19054,7 @@
           <a:noFill/>
         </p:spPr>
         <p:txBody>
-          <a:bodyPr wrap="square" tIns="0" bIns="0" lIns="0" rIns="0">
+          <a:bodyPr wrap="square" lIns="0" tIns="0" rIns="0" bIns="0">
             <a:spAutoFit/>
           </a:bodyPr>
           <a:lstStyle/>
@@ -18634,13 +19089,13 @@
           <a:noFill/>
         </p:spPr>
         <p:txBody>
-          <a:bodyPr wrap="square" tIns="0" bIns="0" lIns="0" rIns="0">
+          <a:bodyPr wrap="square" lIns="0" tIns="0" rIns="0" bIns="0">
             <a:spAutoFit/>
           </a:bodyPr>
           <a:lstStyle/>
           <a:p>
             <a:r>
-              <a:rPr b="1" i="0" sz="950">
+              <a:rPr sz="950" b="1" i="0">
                 <a:solidFill>
                   <a:srgbClr val="00555F"/>
                 </a:solidFill>
@@ -18649,7 +19104,7 @@
               <a:t>• 2,192 Raw Hospital-Quarters -&gt; 428 Annual Facilities: </a:t>
             </a:r>
             <a:r>
-              <a:rPr b="0" i="0" sz="900">
+              <a:rPr sz="900" b="0" i="0">
                 <a:solidFill>
                   <a:srgbClr val="192330"/>
                 </a:solidFill>
@@ -18666,7 +19121,7 @@
               </a:spcBef>
             </a:pPr>
             <a:r>
-              <a:rPr b="1" i="0" sz="950">
+              <a:rPr sz="950" b="1" i="0">
                 <a:solidFill>
                   <a:srgbClr val="00555F"/>
                 </a:solidFill>
@@ -18675,7 +19130,7 @@
               <a:t>• Complete Indicator Integrity: </a:t>
             </a:r>
             <a:r>
-              <a:rPr b="0" i="0" sz="900">
+              <a:rPr sz="900" b="0" i="0">
                 <a:solidFill>
                   <a:srgbClr val="192330"/>
                 </a:solidFill>
@@ -18728,6 +19183,7 @@
           <a:lstStyle/>
           <a:p>
             <a:pPr algn="ctr"/>
+            <a:endParaRPr/>
           </a:p>
         </p:txBody>
       </p:sp>
@@ -18771,6 +19227,7 @@
           <a:lstStyle/>
           <a:p>
             <a:pPr algn="ctr"/>
+            <a:endParaRPr/>
           </a:p>
         </p:txBody>
       </p:sp>
@@ -18791,7 +19248,7 @@
           <a:noFill/>
         </p:spPr>
         <p:txBody>
-          <a:bodyPr wrap="square" tIns="0" bIns="0" lIns="0" rIns="0">
+          <a:bodyPr wrap="square" lIns="0" tIns="0" rIns="0" bIns="0">
             <a:spAutoFit/>
           </a:bodyPr>
           <a:lstStyle/>
@@ -18826,13 +19283,13 @@
           <a:noFill/>
         </p:spPr>
         <p:txBody>
-          <a:bodyPr wrap="square" tIns="0" bIns="0" lIns="0" rIns="0">
+          <a:bodyPr wrap="square" lIns="0" tIns="0" rIns="0" bIns="0">
             <a:spAutoFit/>
           </a:bodyPr>
           <a:lstStyle/>
           <a:p>
             <a:r>
-              <a:rPr b="1" i="0" sz="950">
+              <a:rPr sz="950" b="1" i="0">
                 <a:solidFill>
                   <a:srgbClr val="0A2540"/>
                 </a:solidFill>
@@ -18841,7 +19298,7 @@
               <a:t>• Record Exclusions: </a:t>
             </a:r>
             <a:r>
-              <a:rPr b="0" i="0" sz="900">
+              <a:rPr sz="900" b="0" i="0">
                 <a:solidFill>
                   <a:srgbClr val="192330"/>
                 </a:solidFill>
@@ -18857,7 +19314,7 @@
               </a:spcBef>
             </a:pPr>
             <a:r>
-              <a:rPr b="1" i="0" sz="950">
+              <a:rPr sz="950" b="1" i="0">
                 <a:solidFill>
                   <a:srgbClr val="0A2540"/>
                 </a:solidFill>
@@ -18866,7 +19323,7 @@
               <a:t>• Safe Division Formulation: </a:t>
             </a:r>
             <a:r>
-              <a:rPr b="0" i="0" sz="900">
+              <a:rPr sz="900" b="0" i="0">
                 <a:solidFill>
                   <a:srgbClr val="192330"/>
                 </a:solidFill>
@@ -18882,7 +19339,7 @@
               </a:spcBef>
             </a:pPr>
             <a:r>
-              <a:rPr b="1" i="0" sz="950">
+              <a:rPr sz="950" b="1" i="0">
                 <a:solidFill>
                   <a:srgbClr val="0A2540"/>
                 </a:solidFill>
@@ -18891,7 +19348,7 @@
               <a:t>• 1st–99th Percentile Winsorization: </a:t>
             </a:r>
             <a:r>
-              <a:rPr b="0" i="0" sz="900">
+              <a:rPr sz="900" b="0" i="0">
                 <a:solidFill>
                   <a:srgbClr val="192330"/>
                 </a:solidFill>
@@ -18907,7 +19364,7 @@
               </a:spcBef>
             </a:pPr>
             <a:r>
-              <a:rPr b="1" i="0" sz="950">
+              <a:rPr sz="950" b="1" i="0">
                 <a:solidFill>
                   <a:srgbClr val="0A2540"/>
                 </a:solidFill>
@@ -18916,7 +19373,7 @@
               <a:t>• Formula: </a:t>
             </a:r>
             <a:r>
-              <a:rPr b="0" i="0" sz="900">
+              <a:rPr sz="900" b="0" i="0">
                 <a:solidFill>
                   <a:srgbClr val="192330"/>
                 </a:solidFill>
@@ -18969,6 +19426,7 @@
           <a:lstStyle/>
           <a:p>
             <a:pPr algn="ctr"/>
+            <a:endParaRPr/>
           </a:p>
         </p:txBody>
       </p:sp>
@@ -19012,6 +19470,7 @@
           <a:lstStyle/>
           <a:p>
             <a:pPr algn="ctr"/>
+            <a:endParaRPr/>
           </a:p>
         </p:txBody>
       </p:sp>
@@ -19032,7 +19491,7 @@
           <a:noFill/>
         </p:spPr>
         <p:txBody>
-          <a:bodyPr wrap="square" tIns="0" bIns="0" lIns="0" rIns="0">
+          <a:bodyPr wrap="square" lIns="0" tIns="0" rIns="0" bIns="0">
             <a:spAutoFit/>
           </a:bodyPr>
           <a:lstStyle/>
@@ -19067,13 +19526,13 @@
           <a:noFill/>
         </p:spPr>
         <p:txBody>
-          <a:bodyPr wrap="square" tIns="0" bIns="0" lIns="0" rIns="0">
+          <a:bodyPr wrap="square" lIns="0" tIns="0" rIns="0" bIns="0">
             <a:spAutoFit/>
           </a:bodyPr>
           <a:lstStyle/>
           <a:p>
             <a:r>
-              <a:rPr b="1" i="0" sz="950">
+              <a:rPr sz="950" b="1" i="0">
                 <a:solidFill>
                   <a:srgbClr val="00555F"/>
                 </a:solidFill>
@@ -19082,7 +19541,7 @@
               <a:t>• The Limitation of StandardScaler: </a:t>
             </a:r>
             <a:r>
-              <a:rPr b="0" i="0" sz="900">
+              <a:rPr sz="900" b="0" i="0">
                 <a:solidFill>
                   <a:srgbClr val="192330"/>
                 </a:solidFill>
@@ -19098,7 +19557,7 @@
               </a:spcBef>
             </a:pPr>
             <a:r>
-              <a:rPr b="1" i="0" sz="950">
+              <a:rPr sz="950" b="1" i="0">
                 <a:solidFill>
                   <a:srgbClr val="00555F"/>
                 </a:solidFill>
@@ -19107,7 +19566,7 @@
               <a:t>• RobustScaler Formulation: </a:t>
             </a:r>
             <a:r>
-              <a:rPr b="0" i="0" sz="900">
+              <a:rPr sz="900" b="0" i="0">
                 <a:solidFill>
                   <a:srgbClr val="192330"/>
                 </a:solidFill>
@@ -19123,7 +19582,7 @@
               </a:spcBef>
             </a:pPr>
             <a:r>
-              <a:rPr b="1" i="0" sz="950">
+              <a:rPr sz="950" b="1" i="0">
                 <a:solidFill>
                   <a:srgbClr val="00555F"/>
                 </a:solidFill>
@@ -19132,7 +19591,7 @@
               <a:t>• Mathematical Equation: </a:t>
             </a:r>
             <a:r>
-              <a:rPr b="0" i="0" sz="900">
+              <a:rPr sz="900" b="0" i="0">
                 <a:solidFill>
                   <a:srgbClr val="192330"/>
                 </a:solidFill>
@@ -19148,7 +19607,7 @@
               </a:spcBef>
             </a:pPr>
             <a:r>
-              <a:rPr b="1" i="0" sz="950">
+              <a:rPr sz="950" b="1" i="0">
                 <a:solidFill>
                   <a:srgbClr val="00555F"/>
                 </a:solidFill>
@@ -19157,7 +19616,7 @@
               <a:t>• Analytical Advantage: </a:t>
             </a:r>
             <a:r>
-              <a:rPr b="0" i="0" sz="900">
+              <a:rPr sz="900" b="0" i="0">
                 <a:solidFill>
                   <a:srgbClr val="192330"/>
                 </a:solidFill>
@@ -19177,7 +19636,7 @@
 </file>
 
 <file path=ppt/slides/slide8.xml><?xml version="1.0" encoding="utf-8"?>
-<p:sld xmlns:a="http://schemas.openxmlformats.org/drawingml/2006/main" xmlns:p="http://schemas.openxmlformats.org/presentationml/2006/main" xmlns:r="http://schemas.openxmlformats.org/officeDocument/2006/relationships">
+<p:sld xmlns:a="http://schemas.openxmlformats.org/drawingml/2006/main" xmlns:r="http://schemas.openxmlformats.org/officeDocument/2006/relationships" xmlns:p="http://schemas.openxmlformats.org/presentationml/2006/main">
   <p:cSld>
     <p:spTree>
       <p:nvGrpSpPr>
@@ -19185,7 +19644,14 @@
         <p:cNvGrpSpPr/>
         <p:nvPr/>
       </p:nvGrpSpPr>
-      <p:grpSpPr/>
+      <p:grpSpPr>
+        <a:xfrm>
+          <a:off x="0" y="0"/>
+          <a:ext cx="0" cy="0"/>
+          <a:chOff x="0" y="0"/>
+          <a:chExt cx="0" cy="0"/>
+        </a:xfrm>
+      </p:grpSpPr>
       <p:sp>
         <p:nvSpPr>
           <p:cNvPr id="2" name="Rectangle 1"/>
@@ -19226,6 +19692,7 @@
           <a:lstStyle/>
           <a:p>
             <a:pPr algn="ctr"/>
+            <a:endParaRPr/>
           </a:p>
         </p:txBody>
       </p:sp>
@@ -19269,6 +19736,7 @@
           <a:lstStyle/>
           <a:p>
             <a:pPr algn="ctr"/>
+            <a:endParaRPr/>
           </a:p>
         </p:txBody>
       </p:sp>
@@ -19312,6 +19780,7 @@
           <a:lstStyle/>
           <a:p>
             <a:pPr algn="ctr"/>
+            <a:endParaRPr/>
           </a:p>
         </p:txBody>
       </p:sp>
@@ -19332,7 +19801,7 @@
           <a:noFill/>
         </p:spPr>
         <p:txBody>
-          <a:bodyPr wrap="square" tIns="0" bIns="0" lIns="0" rIns="0">
+          <a:bodyPr wrap="square" lIns="0" tIns="0" rIns="0" bIns="0">
             <a:spAutoFit/>
           </a:bodyPr>
           <a:lstStyle/>
@@ -19414,20 +19883,20 @@
           <a:noFill/>
         </p:spPr>
         <p:txBody>
-          <a:bodyPr wrap="none" tIns="0" bIns="0" lIns="0" rIns="0">
+          <a:bodyPr wrap="none" lIns="0" tIns="0" rIns="0" bIns="0">
             <a:spAutoFit/>
           </a:bodyPr>
           <a:lstStyle/>
           <a:p>
             <a:pPr>
-              <a:defRPr sz="850">
-                <a:solidFill>
-                  <a:srgbClr val="5A6978"/>
+              <a:defRPr sz="750">
+                <a:solidFill>
+                  <a:srgbClr val="8090A0"/>
                 </a:solidFill>
               </a:defRPr>
             </a:pPr>
             <a:r>
-              <a:t>CA3 Machine Learning Mini-Project  |  Healthcare Facility Analytics  |  Candidate: Aditya09977  |  Submission: Oct 2026</a:t>
+              <a:t>CA3 Machine Learning Mini-Project  |  Healthcare Facility Analytics  |  Yesh Raheja (23070521174) &amp; Aditya Gurve (23070521231)  |  Oct 2026</a:t>
             </a:r>
           </a:p>
         </p:txBody>
@@ -19474,6 +19943,7 @@
           <a:lstStyle/>
           <a:p>
             <a:pPr algn="ctr"/>
+            <a:endParaRPr/>
           </a:p>
         </p:txBody>
       </p:sp>
@@ -19517,6 +19987,7 @@
           <a:lstStyle/>
           <a:p>
             <a:pPr algn="ctr"/>
+            <a:endParaRPr/>
           </a:p>
         </p:txBody>
       </p:sp>
@@ -19537,7 +20008,7 @@
           <a:noFill/>
         </p:spPr>
         <p:txBody>
-          <a:bodyPr wrap="square" tIns="0" bIns="0" lIns="0" rIns="0">
+          <a:bodyPr wrap="square" lIns="0" tIns="0" rIns="0" bIns="0">
             <a:spAutoFit/>
           </a:bodyPr>
           <a:lstStyle/>
@@ -19572,13 +20043,13 @@
           <a:noFill/>
         </p:spPr>
         <p:txBody>
-          <a:bodyPr wrap="square" tIns="0" bIns="0" lIns="0" rIns="0">
+          <a:bodyPr wrap="square" lIns="0" tIns="0" rIns="0" bIns="0">
             <a:spAutoFit/>
           </a:bodyPr>
           <a:lstStyle/>
           <a:p>
             <a:r>
-              <a:rPr b="1" i="0" sz="900">
+              <a:rPr sz="900" b="1" i="0">
                 <a:solidFill>
                   <a:srgbClr val="007A87"/>
                 </a:solidFill>
@@ -19587,7 +20058,7 @@
               <a:t>• Mathematical Core: </a:t>
             </a:r>
             <a:r>
-              <a:rPr b="0" i="0" sz="850">
+              <a:rPr sz="850" b="0" i="0">
                 <a:solidFill>
                   <a:srgbClr val="192330"/>
                 </a:solidFill>
@@ -19603,7 +20074,7 @@
               </a:spcBef>
             </a:pPr>
             <a:r>
-              <a:rPr b="1" i="0" sz="900">
+              <a:rPr sz="900" b="1" i="0">
                 <a:solidFill>
                   <a:srgbClr val="007A87"/>
                 </a:solidFill>
@@ -19612,7 +20083,7 @@
               <a:t>• Tested Hyperparameters: </a:t>
             </a:r>
             <a:r>
-              <a:rPr b="0" i="0" sz="850">
+              <a:rPr sz="850" b="0" i="0">
                 <a:solidFill>
                   <a:srgbClr val="192330"/>
                 </a:solidFill>
@@ -19628,7 +20099,7 @@
               </a:spcBef>
             </a:pPr>
             <a:r>
-              <a:rPr b="1" i="0" sz="900">
+              <a:rPr sz="900" b="1" i="0">
                 <a:solidFill>
                   <a:srgbClr val="007A87"/>
                 </a:solidFill>
@@ -19637,7 +20108,7 @@
               <a:t>• Time Complexity: </a:t>
             </a:r>
             <a:r>
-              <a:rPr b="0" i="0" sz="850">
+              <a:rPr sz="850" b="0" i="0">
                 <a:solidFill>
                   <a:srgbClr val="192330"/>
                 </a:solidFill>
@@ -19653,7 +20124,7 @@
               </a:spcBef>
             </a:pPr>
             <a:r>
-              <a:rPr b="1" i="0" sz="900">
+              <a:rPr sz="900" b="1" i="0">
                 <a:solidFill>
                   <a:srgbClr val="007A87"/>
                 </a:solidFill>
@@ -19662,7 +20133,7 @@
               <a:t>• Distance Metric: </a:t>
             </a:r>
             <a:r>
-              <a:rPr b="0" i="0" sz="850">
+              <a:rPr sz="850" b="0" i="0">
                 <a:solidFill>
                   <a:srgbClr val="192330"/>
                 </a:solidFill>
@@ -19678,7 +20149,7 @@
               </a:spcBef>
             </a:pPr>
             <a:r>
-              <a:rPr b="1" i="0" sz="900">
+              <a:rPr sz="900" b="1" i="0">
                 <a:solidFill>
                   <a:srgbClr val="007A87"/>
                 </a:solidFill>
@@ -19687,7 +20158,7 @@
               <a:t>• Key Strengths: </a:t>
             </a:r>
             <a:r>
-              <a:rPr b="0" i="0" sz="850">
+              <a:rPr sz="850" b="0" i="0">
                 <a:solidFill>
                   <a:srgbClr val="192330"/>
                 </a:solidFill>
@@ -19703,7 +20174,7 @@
               </a:spcBef>
             </a:pPr>
             <a:r>
-              <a:rPr b="1" i="0" sz="900">
+              <a:rPr sz="900" b="1" i="0">
                 <a:solidFill>
                   <a:srgbClr val="007A87"/>
                 </a:solidFill>
@@ -19712,7 +20183,7 @@
               <a:t>• Empirical Selection: </a:t>
             </a:r>
             <a:r>
-              <a:rPr b="0" i="0" sz="850">
+              <a:rPr sz="850" b="0" i="0">
                 <a:solidFill>
                   <a:srgbClr val="192330"/>
                 </a:solidFill>
@@ -19765,6 +20236,7 @@
           <a:lstStyle/>
           <a:p>
             <a:pPr algn="ctr"/>
+            <a:endParaRPr/>
           </a:p>
         </p:txBody>
       </p:sp>
@@ -19808,6 +20280,7 @@
           <a:lstStyle/>
           <a:p>
             <a:pPr algn="ctr"/>
+            <a:endParaRPr/>
           </a:p>
         </p:txBody>
       </p:sp>
@@ -19828,7 +20301,7 @@
           <a:noFill/>
         </p:spPr>
         <p:txBody>
-          <a:bodyPr wrap="square" tIns="0" bIns="0" lIns="0" rIns="0">
+          <a:bodyPr wrap="square" lIns="0" tIns="0" rIns="0" bIns="0">
             <a:spAutoFit/>
           </a:bodyPr>
           <a:lstStyle/>
@@ -19863,13 +20336,13 @@
           <a:noFill/>
         </p:spPr>
         <p:txBody>
-          <a:bodyPr wrap="square" tIns="0" bIns="0" lIns="0" rIns="0">
+          <a:bodyPr wrap="square" lIns="0" tIns="0" rIns="0" bIns="0">
             <a:spAutoFit/>
           </a:bodyPr>
           <a:lstStyle/>
           <a:p>
             <a:r>
-              <a:rPr b="1" i="0" sz="900">
+              <a:rPr sz="900" b="1" i="0">
                 <a:solidFill>
                   <a:srgbClr val="0A2540"/>
                 </a:solidFill>
@@ -19878,7 +20351,7 @@
               <a:t>• Mathematical Core: </a:t>
             </a:r>
             <a:r>
-              <a:rPr b="0" i="0" sz="850">
+              <a:rPr sz="850" b="0" i="0">
                 <a:solidFill>
                   <a:srgbClr val="192330"/>
                 </a:solidFill>
@@ -19894,7 +20367,7 @@
               </a:spcBef>
             </a:pPr>
             <a:r>
-              <a:rPr b="1" i="0" sz="900">
+              <a:rPr sz="900" b="1" i="0">
                 <a:solidFill>
                   <a:srgbClr val="0A2540"/>
                 </a:solidFill>
@@ -19903,7 +20376,7 @@
               <a:t>• Tested Linkages: </a:t>
             </a:r>
             <a:r>
-              <a:rPr b="0" i="0" sz="850">
+              <a:rPr sz="850" b="0" i="0">
                 <a:solidFill>
                   <a:srgbClr val="192330"/>
                 </a:solidFill>
@@ -19919,7 +20392,7 @@
               </a:spcBef>
             </a:pPr>
             <a:r>
-              <a:rPr b="1" i="0" sz="900">
+              <a:rPr sz="900" b="1" i="0">
                 <a:solidFill>
                   <a:srgbClr val="0A2540"/>
                 </a:solidFill>
@@ -19928,7 +20401,7 @@
               <a:t>• Time &amp; Space Complexity: </a:t>
             </a:r>
             <a:r>
-              <a:rPr b="0" i="0" sz="850">
+              <a:rPr sz="850" b="0" i="0">
                 <a:solidFill>
                   <a:srgbClr val="192330"/>
                 </a:solidFill>
@@ -19944,7 +20417,7 @@
               </a:spcBef>
             </a:pPr>
             <a:r>
-              <a:rPr b="1" i="0" sz="900">
+              <a:rPr sz="900" b="1" i="0">
                 <a:solidFill>
                   <a:srgbClr val="0A2540"/>
                 </a:solidFill>
@@ -19953,7 +20426,7 @@
               <a:t>• Metric Requirements: </a:t>
             </a:r>
             <a:r>
-              <a:rPr b="0" i="0" sz="850">
+              <a:rPr sz="850" b="0" i="0">
                 <a:solidFill>
                   <a:srgbClr val="192330"/>
                 </a:solidFill>
@@ -19969,7 +20442,7 @@
               </a:spcBef>
             </a:pPr>
             <a:r>
-              <a:rPr b="1" i="0" sz="900">
+              <a:rPr sz="900" b="1" i="0">
                 <a:solidFill>
                   <a:srgbClr val="0A2540"/>
                 </a:solidFill>
@@ -19978,7 +20451,7 @@
               <a:t>• Key Strengths: </a:t>
             </a:r>
             <a:r>
-              <a:rPr b="0" i="0" sz="850">
+              <a:rPr sz="850" b="0" i="0">
                 <a:solidFill>
                   <a:srgbClr val="192330"/>
                 </a:solidFill>
@@ -19994,7 +20467,7 @@
               </a:spcBef>
             </a:pPr>
             <a:r>
-              <a:rPr b="1" i="0" sz="900">
+              <a:rPr sz="900" b="1" i="0">
                 <a:solidFill>
                   <a:srgbClr val="0A2540"/>
                 </a:solidFill>
@@ -20003,7 +20476,7 @@
               <a:t>• Empirical Confirmation: </a:t>
             </a:r>
             <a:r>
-              <a:rPr b="0" i="0" sz="850">
+              <a:rPr sz="850" b="0" i="0">
                 <a:solidFill>
                   <a:srgbClr val="192330"/>
                 </a:solidFill>
@@ -20056,6 +20529,7 @@
           <a:lstStyle/>
           <a:p>
             <a:pPr algn="ctr"/>
+            <a:endParaRPr/>
           </a:p>
         </p:txBody>
       </p:sp>
@@ -20099,6 +20573,7 @@
           <a:lstStyle/>
           <a:p>
             <a:pPr algn="ctr"/>
+            <a:endParaRPr/>
           </a:p>
         </p:txBody>
       </p:sp>
@@ -20119,7 +20594,7 @@
           <a:noFill/>
         </p:spPr>
         <p:txBody>
-          <a:bodyPr wrap="square" tIns="0" bIns="0" lIns="0" rIns="0">
+          <a:bodyPr wrap="square" lIns="0" tIns="0" rIns="0" bIns="0">
             <a:spAutoFit/>
           </a:bodyPr>
           <a:lstStyle/>
@@ -20154,13 +20629,13 @@
           <a:noFill/>
         </p:spPr>
         <p:txBody>
-          <a:bodyPr wrap="square" tIns="0" bIns="0" lIns="0" rIns="0">
+          <a:bodyPr wrap="square" lIns="0" tIns="0" rIns="0" bIns="0">
             <a:spAutoFit/>
           </a:bodyPr>
           <a:lstStyle/>
           <a:p>
             <a:r>
-              <a:rPr b="1" i="0" sz="900">
+              <a:rPr sz="900" b="1" i="0">
                 <a:solidFill>
                   <a:srgbClr val="BE6E0F"/>
                 </a:solidFill>
@@ -20169,7 +20644,7 @@
               <a:t>• Mathematical Core: </a:t>
             </a:r>
             <a:r>
-              <a:rPr b="0" i="0" sz="850">
+              <a:rPr sz="850" b="0" i="0">
                 <a:solidFill>
                   <a:srgbClr val="192330"/>
                 </a:solidFill>
@@ -20185,7 +20660,7 @@
               </a:spcBef>
             </a:pPr>
             <a:r>
-              <a:rPr b="1" i="0" sz="900">
+              <a:rPr sz="900" b="1" i="0">
                 <a:solidFill>
                   <a:srgbClr val="BE6E0F"/>
                 </a:solidFill>
@@ -20194,7 +20669,7 @@
               <a:t>• Tested Parameter Grid: </a:t>
             </a:r>
             <a:r>
-              <a:rPr b="0" i="0" sz="850">
+              <a:rPr sz="850" b="0" i="0">
                 <a:solidFill>
                   <a:srgbClr val="192330"/>
                 </a:solidFill>
@@ -20210,7 +20685,7 @@
               </a:spcBef>
             </a:pPr>
             <a:r>
-              <a:rPr b="1" i="0" sz="900">
+              <a:rPr sz="900" b="1" i="0">
                 <a:solidFill>
                   <a:srgbClr val="BE6E0F"/>
                 </a:solidFill>
@@ -20219,7 +20694,7 @@
               <a:t>• Computational Scaling: </a:t>
             </a:r>
             <a:r>
-              <a:rPr b="0" i="0" sz="850">
+              <a:rPr sz="850" b="0" i="0">
                 <a:solidFill>
                   <a:srgbClr val="192330"/>
                 </a:solidFill>
@@ -20235,7 +20710,7 @@
               </a:spcBef>
             </a:pPr>
             <a:r>
-              <a:rPr b="1" i="0" sz="900">
+              <a:rPr sz="900" b="1" i="0">
                 <a:solidFill>
                   <a:srgbClr val="BE6E0F"/>
                 </a:solidFill>
@@ -20244,7 +20719,7 @@
               <a:t>• Geometric Flexibility: </a:t>
             </a:r>
             <a:r>
-              <a:rPr b="0" i="0" sz="850">
+              <a:rPr sz="850" b="0" i="0">
                 <a:solidFill>
                   <a:srgbClr val="192330"/>
                 </a:solidFill>
@@ -20260,7 +20735,7 @@
               </a:spcBef>
             </a:pPr>
             <a:r>
-              <a:rPr b="1" i="0" sz="900">
+              <a:rPr sz="900" b="1" i="0">
                 <a:solidFill>
                   <a:srgbClr val="BE6E0F"/>
                 </a:solidFill>
@@ -20269,7 +20744,7 @@
               <a:t>• Sensitivity: </a:t>
             </a:r>
             <a:r>
-              <a:rPr b="0" i="0" sz="850">
+              <a:rPr sz="850" b="0" i="0">
                 <a:solidFill>
                   <a:srgbClr val="192330"/>
                 </a:solidFill>
@@ -20285,7 +20760,7 @@
               </a:spcBef>
             </a:pPr>
             <a:r>
-              <a:rPr b="1" i="0" sz="900">
+              <a:rPr sz="900" b="1" i="0">
                 <a:solidFill>
                   <a:srgbClr val="BE6E0F"/>
                 </a:solidFill>
@@ -20294,7 +20769,7 @@
               <a:t>• Empirical Role: </a:t>
             </a:r>
             <a:r>
-              <a:rPr b="0" i="0" sz="850">
+              <a:rPr sz="850" b="0" i="0">
                 <a:solidFill>
                   <a:srgbClr val="192330"/>
                 </a:solidFill>
@@ -20347,6 +20822,7 @@
           <a:lstStyle/>
           <a:p>
             <a:pPr algn="ctr"/>
+            <a:endParaRPr/>
           </a:p>
         </p:txBody>
       </p:sp>
@@ -20390,6 +20866,7 @@
           <a:lstStyle/>
           <a:p>
             <a:pPr algn="ctr"/>
+            <a:endParaRPr/>
           </a:p>
         </p:txBody>
       </p:sp>
@@ -20410,7 +20887,7 @@
           <a:noFill/>
         </p:spPr>
         <p:txBody>
-          <a:bodyPr wrap="square" tIns="0" bIns="0" lIns="0" rIns="0">
+          <a:bodyPr wrap="square" lIns="0" tIns="0" rIns="0" bIns="0">
             <a:spAutoFit/>
           </a:bodyPr>
           <a:lstStyle/>
@@ -20445,13 +20922,13 @@
           <a:noFill/>
         </p:spPr>
         <p:txBody>
-          <a:bodyPr wrap="square" tIns="0" bIns="0" lIns="0" rIns="0">
+          <a:bodyPr wrap="square" lIns="0" tIns="0" rIns="0" bIns="0">
             <a:spAutoFit/>
           </a:bodyPr>
           <a:lstStyle/>
           <a:p>
             <a:r>
-              <a:rPr b="1" i="0" sz="1000">
+              <a:rPr sz="1000" b="1" i="0">
                 <a:solidFill>
                   <a:srgbClr val="0A2540"/>
                 </a:solidFill>
@@ -20460,7 +20937,7 @@
               <a:t>Triangulation Rationale: </a:t>
             </a:r>
             <a:r>
-              <a:rPr b="0" i="0" sz="950">
+              <a:rPr sz="950" b="0" i="0">
                 <a:solidFill>
                   <a:srgbClr val="192330"/>
                 </a:solidFill>
@@ -20477,7 +20954,7 @@
               </a:spcBef>
             </a:pPr>
             <a:r>
-              <a:rPr b="1" i="0" sz="1000">
+              <a:rPr sz="1000" b="1" i="0">
                 <a:solidFill>
                   <a:srgbClr val="00555F"/>
                 </a:solidFill>
@@ -20486,7 +20963,7 @@
               <a:t>Resulting Consensus: </a:t>
             </a:r>
             <a:r>
-              <a:rPr b="0" i="0" sz="950">
+              <a:rPr sz="950" b="0" i="0">
                 <a:solidFill>
                   <a:srgbClr val="192330"/>
                 </a:solidFill>
@@ -20506,7 +20983,7 @@
 </file>
 
 <file path=ppt/slides/slide9.xml><?xml version="1.0" encoding="utf-8"?>
-<p:sld xmlns:a="http://schemas.openxmlformats.org/drawingml/2006/main" xmlns:p="http://schemas.openxmlformats.org/presentationml/2006/main" xmlns:r="http://schemas.openxmlformats.org/officeDocument/2006/relationships">
+<p:sld xmlns:a="http://schemas.openxmlformats.org/drawingml/2006/main" xmlns:r="http://schemas.openxmlformats.org/officeDocument/2006/relationships" xmlns:p="http://schemas.openxmlformats.org/presentationml/2006/main">
   <p:cSld>
     <p:spTree>
       <p:nvGrpSpPr>
@@ -20514,7 +20991,14 @@
         <p:cNvGrpSpPr/>
         <p:nvPr/>
       </p:nvGrpSpPr>
-      <p:grpSpPr/>
+      <p:grpSpPr>
+        <a:xfrm>
+          <a:off x="0" y="0"/>
+          <a:ext cx="0" cy="0"/>
+          <a:chOff x="0" y="0"/>
+          <a:chExt cx="0" cy="0"/>
+        </a:xfrm>
+      </p:grpSpPr>
       <p:sp>
         <p:nvSpPr>
           <p:cNvPr id="2" name="Rectangle 1"/>
@@ -20555,6 +21039,7 @@
           <a:lstStyle/>
           <a:p>
             <a:pPr algn="ctr"/>
+            <a:endParaRPr/>
           </a:p>
         </p:txBody>
       </p:sp>
@@ -20598,6 +21083,7 @@
           <a:lstStyle/>
           <a:p>
             <a:pPr algn="ctr"/>
+            <a:endParaRPr/>
           </a:p>
         </p:txBody>
       </p:sp>
@@ -20641,6 +21127,7 @@
           <a:lstStyle/>
           <a:p>
             <a:pPr algn="ctr"/>
+            <a:endParaRPr/>
           </a:p>
         </p:txBody>
       </p:sp>
@@ -20661,7 +21148,7 @@
           <a:noFill/>
         </p:spPr>
         <p:txBody>
-          <a:bodyPr wrap="square" tIns="0" bIns="0" lIns="0" rIns="0">
+          <a:bodyPr wrap="square" lIns="0" tIns="0" rIns="0" bIns="0">
             <a:spAutoFit/>
           </a:bodyPr>
           <a:lstStyle/>
@@ -20743,20 +21230,20 @@
           <a:noFill/>
         </p:spPr>
         <p:txBody>
-          <a:bodyPr wrap="none" tIns="0" bIns="0" lIns="0" rIns="0">
+          <a:bodyPr wrap="none" lIns="0" tIns="0" rIns="0" bIns="0">
             <a:spAutoFit/>
           </a:bodyPr>
           <a:lstStyle/>
           <a:p>
             <a:pPr>
-              <a:defRPr sz="850">
-                <a:solidFill>
-                  <a:srgbClr val="5A6978"/>
+              <a:defRPr sz="750">
+                <a:solidFill>
+                  <a:srgbClr val="8090A0"/>
                 </a:solidFill>
               </a:defRPr>
             </a:pPr>
             <a:r>
-              <a:t>CA3 Machine Learning Mini-Project  |  Healthcare Facility Analytics  |  Candidate: Aditya09977  |  Submission: Oct 2026</a:t>
+              <a:t>CA3 Machine Learning Mini-Project  |  Healthcare Facility Analytics  |  Yesh Raheja (23070521174) &amp; Aditya Gurve (23070521231)  |  Oct 2026</a:t>
             </a:r>
           </a:p>
         </p:txBody>
@@ -20803,6 +21290,7 @@
           <a:lstStyle/>
           <a:p>
             <a:pPr algn="ctr"/>
+            <a:endParaRPr/>
           </a:p>
         </p:txBody>
       </p:sp>
@@ -20846,6 +21334,7 @@
           <a:lstStyle/>
           <a:p>
             <a:pPr algn="ctr"/>
+            <a:endParaRPr/>
           </a:p>
         </p:txBody>
       </p:sp>
@@ -20866,7 +21355,7 @@
           <a:noFill/>
         </p:spPr>
         <p:txBody>
-          <a:bodyPr wrap="square" tIns="0" bIns="0" lIns="0" rIns="0">
+          <a:bodyPr wrap="square" lIns="0" tIns="0" rIns="0" bIns="0">
             <a:spAutoFit/>
           </a:bodyPr>
           <a:lstStyle/>
@@ -20901,13 +21390,13 @@
           <a:noFill/>
         </p:spPr>
         <p:txBody>
-          <a:bodyPr wrap="square" tIns="0" bIns="0" lIns="0" rIns="0">
+          <a:bodyPr wrap="square" lIns="0" tIns="0" rIns="0" bIns="0">
             <a:spAutoFit/>
           </a:bodyPr>
           <a:lstStyle/>
           <a:p>
             <a:r>
-              <a:rPr b="1" i="0" sz="900">
+              <a:rPr sz="900" b="1" i="0">
                 <a:solidFill>
                   <a:srgbClr val="007A87"/>
                 </a:solidFill>
@@ -20916,7 +21405,7 @@
               <a:t>• Objective Formulation: </a:t>
             </a:r>
             <a:r>
-              <a:rPr b="0" i="0" sz="850">
+              <a:rPr sz="850" b="0" i="0">
                 <a:solidFill>
                   <a:srgbClr val="192330"/>
                 </a:solidFill>
@@ -20932,7 +21421,7 @@
               </a:spcBef>
             </a:pPr>
             <a:r>
-              <a:rPr b="1" i="0" sz="950">
+              <a:rPr sz="950" b="1" i="0">
                 <a:solidFill>
                   <a:srgbClr val="00555F"/>
                 </a:solidFill>
@@ -20941,7 +21430,7 @@
               <a:t>• Mathematical Formula: </a:t>
             </a:r>
             <a:r>
-              <a:rPr b="1" i="0" sz="950">
+              <a:rPr sz="950" b="1" i="0">
                 <a:solidFill>
                   <a:srgbClr val="0A2540"/>
                 </a:solidFill>
@@ -20957,7 +21446,7 @@
               </a:spcBef>
             </a:pPr>
             <a:r>
-              <a:rPr b="1" i="0" sz="900">
+              <a:rPr sz="900" b="1" i="0">
                 <a:solidFill>
                   <a:srgbClr val="007A87"/>
                 </a:solidFill>
@@ -20966,7 +21455,7 @@
               <a:t>• Notation: </a:t>
             </a:r>
             <a:r>
-              <a:rPr b="0" i="0" sz="850">
+              <a:rPr sz="850" b="0" i="0">
                 <a:solidFill>
                   <a:srgbClr val="192330"/>
                 </a:solidFill>
@@ -20982,7 +21471,7 @@
               </a:spcBef>
             </a:pPr>
             <a:r>
-              <a:rPr b="1" i="0" sz="900">
+              <a:rPr sz="900" b="1" i="0">
                 <a:solidFill>
                   <a:srgbClr val="007A87"/>
                 </a:solidFill>
@@ -20991,7 +21480,7 @@
               <a:t>• Optimization Behavior: </a:t>
             </a:r>
             <a:r>
-              <a:rPr b="0" i="0" sz="850">
+              <a:rPr sz="850" b="0" i="0">
                 <a:solidFill>
                   <a:srgbClr val="192330"/>
                 </a:solidFill>
@@ -21007,7 +21496,7 @@
               </a:spcBef>
             </a:pPr>
             <a:r>
-              <a:rPr b="1" i="0" sz="900">
+              <a:rPr sz="900" b="1" i="0">
                 <a:solidFill>
                   <a:srgbClr val="007A87"/>
                 </a:solidFill>
@@ -21016,7 +21505,7 @@
               <a:t>• Empirical Convergence: </a:t>
             </a:r>
             <a:r>
-              <a:rPr b="0" i="0" sz="850">
+              <a:rPr sz="850" b="0" i="0">
                 <a:solidFill>
                   <a:srgbClr val="192330"/>
                 </a:solidFill>
@@ -21069,6 +21558,7 @@
           <a:lstStyle/>
           <a:p>
             <a:pPr algn="ctr"/>
+            <a:endParaRPr/>
           </a:p>
         </p:txBody>
       </p:sp>
@@ -21112,6 +21602,7 @@
           <a:lstStyle/>
           <a:p>
             <a:pPr algn="ctr"/>
+            <a:endParaRPr/>
           </a:p>
         </p:txBody>
       </p:sp>
@@ -21132,7 +21623,7 @@
           <a:noFill/>
         </p:spPr>
         <p:txBody>
-          <a:bodyPr wrap="square" tIns="0" bIns="0" lIns="0" rIns="0">
+          <a:bodyPr wrap="square" lIns="0" tIns="0" rIns="0" bIns="0">
             <a:spAutoFit/>
           </a:bodyPr>
           <a:lstStyle/>
@@ -21167,13 +21658,13 @@
           <a:noFill/>
         </p:spPr>
         <p:txBody>
-          <a:bodyPr wrap="square" tIns="0" bIns="0" lIns="0" rIns="0">
+          <a:bodyPr wrap="square" lIns="0" tIns="0" rIns="0" bIns="0">
             <a:spAutoFit/>
           </a:bodyPr>
           <a:lstStyle/>
           <a:p>
             <a:r>
-              <a:rPr b="1" i="0" sz="900">
+              <a:rPr sz="900" b="1" i="0">
                 <a:solidFill>
                   <a:srgbClr val="0A2540"/>
                 </a:solidFill>
@@ -21182,7 +21673,7 @@
               <a:t>• Cohesion vs Separation: </a:t>
             </a:r>
             <a:r>
-              <a:rPr b="0" i="0" sz="850">
+              <a:rPr sz="850" b="0" i="0">
                 <a:solidFill>
                   <a:srgbClr val="192330"/>
                 </a:solidFill>
@@ -21198,7 +21689,7 @@
               </a:spcBef>
             </a:pPr>
             <a:r>
-              <a:rPr b="1" i="0" sz="950">
+              <a:rPr sz="950" b="1" i="0">
                 <a:solidFill>
                   <a:srgbClr val="00555F"/>
                 </a:solidFill>
@@ -21207,7 +21698,7 @@
               <a:t>• Mathematical Formula: </a:t>
             </a:r>
             <a:r>
-              <a:rPr b="1" i="0" sz="950">
+              <a:rPr sz="950" b="1" i="0">
                 <a:solidFill>
                   <a:srgbClr val="0A2540"/>
                 </a:solidFill>
@@ -21223,7 +21714,7 @@
               </a:spcBef>
             </a:pPr>
             <a:r>
-              <a:rPr b="1" i="0" sz="900">
+              <a:rPr sz="900" b="1" i="0">
                 <a:solidFill>
                   <a:srgbClr val="0A2540"/>
                 </a:solidFill>
@@ -21232,7 +21723,7 @@
               <a:t>• Notation: </a:t>
             </a:r>
             <a:r>
-              <a:rPr b="0" i="0" sz="850">
+              <a:rPr sz="850" b="0" i="0">
                 <a:solidFill>
                   <a:srgbClr val="192330"/>
                 </a:solidFill>
@@ -21248,7 +21739,7 @@
               </a:spcBef>
             </a:pPr>
             <a:r>
-              <a:rPr b="1" i="0" sz="900">
+              <a:rPr sz="900" b="1" i="0">
                 <a:solidFill>
                   <a:srgbClr val="0A2540"/>
                 </a:solidFill>
@@ -21257,7 +21748,7 @@
               <a:t>• Benchmark Scale: </a:t>
             </a:r>
             <a:r>
-              <a:rPr b="0" i="0" sz="850">
+              <a:rPr sz="850" b="0" i="0">
                 <a:solidFill>
                   <a:srgbClr val="192330"/>
                 </a:solidFill>
@@ -21273,7 +21764,7 @@
               </a:spcBef>
             </a:pPr>
             <a:r>
-              <a:rPr b="1" i="0" sz="900">
+              <a:rPr sz="900" b="1" i="0">
                 <a:solidFill>
                   <a:srgbClr val="0A2540"/>
                 </a:solidFill>
@@ -21282,7 +21773,7 @@
               <a:t>• Our Model Benchmark: </a:t>
             </a:r>
             <a:r>
-              <a:rPr b="0" i="0" sz="850">
+              <a:rPr sz="850" b="0" i="0">
                 <a:solidFill>
                   <a:srgbClr val="192330"/>
                 </a:solidFill>
@@ -21335,6 +21826,7 @@
           <a:lstStyle/>
           <a:p>
             <a:pPr algn="ctr"/>
+            <a:endParaRPr/>
           </a:p>
         </p:txBody>
       </p:sp>
@@ -21378,6 +21870,7 @@
           <a:lstStyle/>
           <a:p>
             <a:pPr algn="ctr"/>
+            <a:endParaRPr/>
           </a:p>
         </p:txBody>
       </p:sp>
@@ -21398,7 +21891,7 @@
           <a:noFill/>
         </p:spPr>
         <p:txBody>
-          <a:bodyPr wrap="square" tIns="0" bIns="0" lIns="0" rIns="0">
+          <a:bodyPr wrap="square" lIns="0" tIns="0" rIns="0" bIns="0">
             <a:spAutoFit/>
           </a:bodyPr>
           <a:lstStyle/>
@@ -21433,13 +21926,13 @@
           <a:noFill/>
         </p:spPr>
         <p:txBody>
-          <a:bodyPr wrap="square" tIns="0" bIns="0" lIns="0" rIns="0">
+          <a:bodyPr wrap="square" lIns="0" tIns="0" rIns="0" bIns="0">
             <a:spAutoFit/>
           </a:bodyPr>
           <a:lstStyle/>
           <a:p>
             <a:r>
-              <a:rPr b="1" i="0" sz="900">
+              <a:rPr sz="900" b="1" i="0">
                 <a:solidFill>
                   <a:srgbClr val="0A2540"/>
                 </a:solidFill>
@@ -21448,7 +21941,7 @@
               <a:t>• Dispersion Ratio: </a:t>
             </a:r>
             <a:r>
-              <a:rPr b="0" i="0" sz="850">
+              <a:rPr sz="850" b="0" i="0">
                 <a:solidFill>
                   <a:srgbClr val="192330"/>
                 </a:solidFill>
@@ -21464,7 +21957,7 @@
               </a:spcBef>
             </a:pPr>
             <a:r>
-              <a:rPr b="1" i="0" sz="950">
+              <a:rPr sz="950" b="1" i="0">
                 <a:solidFill>
                   <a:srgbClr val="00555F"/>
                 </a:solidFill>
@@ -21473,7 +21966,7 @@
               <a:t>• Mathematical Formula: </a:t>
             </a:r>
             <a:r>
-              <a:rPr b="1" i="0" sz="950">
+              <a:rPr sz="950" b="1" i="0">
                 <a:solidFill>
                   <a:srgbClr val="0A2540"/>
                 </a:solidFill>
@@ -21489,7 +21982,7 @@
               </a:spcBef>
             </a:pPr>
             <a:r>
-              <a:rPr b="1" i="0" sz="900">
+              <a:rPr sz="900" b="1" i="0">
                 <a:solidFill>
                   <a:srgbClr val="0A2540"/>
                 </a:solidFill>
@@ -21498,7 +21991,7 @@
               <a:t>• Notation: </a:t>
             </a:r>
             <a:r>
-              <a:rPr b="0" i="0" sz="850">
+              <a:rPr sz="850" b="0" i="0">
                 <a:solidFill>
                   <a:srgbClr val="192330"/>
                 </a:solidFill>
@@ -21514,7 +22007,7 @@
               </a:spcBef>
             </a:pPr>
             <a:r>
-              <a:rPr b="1" i="0" sz="900">
+              <a:rPr sz="900" b="1" i="0">
                 <a:solidFill>
                   <a:srgbClr val="0A2540"/>
                 </a:solidFill>
@@ -21523,7 +22016,7 @@
               <a:t>• Optimization Direction: </a:t>
             </a:r>
             <a:r>
-              <a:rPr b="0" i="0" sz="850">
+              <a:rPr sz="850" b="0" i="0">
                 <a:solidFill>
                   <a:srgbClr val="192330"/>
                 </a:solidFill>
@@ -21539,7 +22032,7 @@
               </a:spcBef>
             </a:pPr>
             <a:r>
-              <a:rPr b="1" i="0" sz="900">
+              <a:rPr sz="900" b="1" i="0">
                 <a:solidFill>
                   <a:srgbClr val="0A2540"/>
                 </a:solidFill>
@@ -21548,7 +22041,7 @@
               <a:t>• Our Model Benchmark: </a:t>
             </a:r>
             <a:r>
-              <a:rPr b="0" i="0" sz="850">
+              <a:rPr sz="850" b="0" i="0">
                 <a:solidFill>
                   <a:srgbClr val="192330"/>
                 </a:solidFill>
@@ -21601,6 +22094,7 @@
           <a:lstStyle/>
           <a:p>
             <a:pPr algn="ctr"/>
+            <a:endParaRPr/>
           </a:p>
         </p:txBody>
       </p:sp>
@@ -21644,6 +22138,7 @@
           <a:lstStyle/>
           <a:p>
             <a:pPr algn="ctr"/>
+            <a:endParaRPr/>
           </a:p>
         </p:txBody>
       </p:sp>
@@ -21664,7 +22159,7 @@
           <a:noFill/>
         </p:spPr>
         <p:txBody>
-          <a:bodyPr wrap="square" tIns="0" bIns="0" lIns="0" rIns="0">
+          <a:bodyPr wrap="square" lIns="0" tIns="0" rIns="0" bIns="0">
             <a:spAutoFit/>
           </a:bodyPr>
           <a:lstStyle/>
@@ -21699,13 +22194,13 @@
           <a:noFill/>
         </p:spPr>
         <p:txBody>
-          <a:bodyPr wrap="square" tIns="0" bIns="0" lIns="0" rIns="0">
+          <a:bodyPr wrap="square" lIns="0" tIns="0" rIns="0" bIns="0">
             <a:spAutoFit/>
           </a:bodyPr>
           <a:lstStyle/>
           <a:p>
             <a:r>
-              <a:rPr b="1" i="0" sz="900">
+              <a:rPr sz="900" b="1" i="0">
                 <a:solidFill>
                   <a:srgbClr val="007A87"/>
                 </a:solidFill>
@@ -21714,7 +22209,7 @@
               <a:t>• Variance Ratio Criterion: </a:t>
             </a:r>
             <a:r>
-              <a:rPr b="0" i="0" sz="850">
+              <a:rPr sz="850" b="0" i="0">
                 <a:solidFill>
                   <a:srgbClr val="192330"/>
                 </a:solidFill>
@@ -21730,7 +22225,7 @@
               </a:spcBef>
             </a:pPr>
             <a:r>
-              <a:rPr b="1" i="0" sz="950">
+              <a:rPr sz="950" b="1" i="0">
                 <a:solidFill>
                   <a:srgbClr val="00555F"/>
                 </a:solidFill>
@@ -21739,7 +22234,7 @@
               <a:t>• Mathematical Formula: </a:t>
             </a:r>
             <a:r>
-              <a:rPr b="1" i="0" sz="950">
+              <a:rPr sz="950" b="1" i="0">
                 <a:solidFill>
                   <a:srgbClr val="0A2540"/>
                 </a:solidFill>
@@ -21755,7 +22250,7 @@
               </a:spcBef>
             </a:pPr>
             <a:r>
-              <a:rPr b="1" i="0" sz="900">
+              <a:rPr sz="900" b="1" i="0">
                 <a:solidFill>
                   <a:srgbClr val="007A87"/>
                 </a:solidFill>
@@ -21764,7 +22259,7 @@
               <a:t>• Notation: </a:t>
             </a:r>
             <a:r>
-              <a:rPr b="0" i="0" sz="850">
+              <a:rPr sz="850" b="0" i="0">
                 <a:solidFill>
                   <a:srgbClr val="192330"/>
                 </a:solidFill>
@@ -21780,7 +22275,7 @@
               </a:spcBef>
             </a:pPr>
             <a:r>
-              <a:rPr b="1" i="0" sz="900">
+              <a:rPr sz="900" b="1" i="0">
                 <a:solidFill>
                   <a:srgbClr val="007A87"/>
                 </a:solidFill>
@@ -21789,7 +22284,7 @@
               <a:t>• Optimization Direction: </a:t>
             </a:r>
             <a:r>
-              <a:rPr b="0" i="0" sz="850">
+              <a:rPr sz="850" b="0" i="0">
                 <a:solidFill>
                   <a:srgbClr val="192330"/>
                 </a:solidFill>
@@ -21805,7 +22300,7 @@
               </a:spcBef>
             </a:pPr>
             <a:r>
-              <a:rPr b="1" i="0" sz="900">
+              <a:rPr sz="900" b="1" i="0">
                 <a:solidFill>
                   <a:srgbClr val="007A87"/>
                 </a:solidFill>
@@ -21814,7 +22309,7 @@
               <a:t>• Our Model Benchmark: </a:t>
             </a:r>
             <a:r>
-              <a:rPr b="0" i="0" sz="850">
+              <a:rPr sz="850" b="0" i="0">
                 <a:solidFill>
                   <a:srgbClr val="192330"/>
                 </a:solidFill>
